--- a/40_AWS/04_修正依頼/Ksm_aws_proposal_001_新機能提案書_カスミAWS活用v1.0_ja.pptx
+++ b/40_AWS/04_修正依頼/Ksm_aws_proposal_001_新機能提案書_カスミAWS活用v1.0_ja.pptx
@@ -4,6 +4,9 @@
   <p:sldMasterIdLst>
     <p:sldMasterId id="2147483648" r:id="rId1"/>
   </p:sldMasterIdLst>
+  <p:notesMasterIdLst>
+    <p:notesMasterId r:id="rId11"/>
+  </p:notesMasterIdLst>
   <p:sldIdLst>
     <p:sldId id="256" r:id="rId2"/>
     <p:sldId id="257" r:id="rId3"/>
@@ -15,11 +18,8 @@
     <p:sldId id="263" r:id="rId9"/>
     <p:sldId id="264" r:id="rId10"/>
   </p:sldIdLst>
-  <p:notesMasterIdLst>
-    <p:notesMasterId r:id="rId11"/>
-  </p:notesMasterIdLst>
-  <p:sldSz cx="9902952" cy="6858000"/>
-  <p:notesSz cx="6858000" cy="9902952"/>
+  <p:sldSz cx="9902825" cy="6858000"/>
+  <p:notesSz cx="6858000" cy="9902825"/>
   <p:defaultTextStyle>
     <a:lvl1pPr marL="0" algn="l" defTabSz="914400" rtl="0" eaLnBrk="1" latinLnBrk="0" hangingPunct="1">
       <a:defRPr sz="1800" kern="1200">
@@ -112,7 +112,64 @@
       </a:defRPr>
     </a:lvl9pPr>
   </p:defaultTextStyle>
+  <p:extLst>
+    <p:ext uri="{EFAFB233-063F-42B5-8137-9DF3F51BA10A}">
+      <p15:sldGuideLst xmlns:p15="http://schemas.microsoft.com/office/powerpoint/2012/main"/>
+    </p:ext>
+  </p:extLst>
 </p:presentation>
+</file>
+
+<file path=ppt/changesInfos/changesInfo1.xml><?xml version="1.0" encoding="utf-8"?>
+<pc:chgInfo xmlns:a="http://schemas.openxmlformats.org/drawingml/2006/main" xmlns:r="http://schemas.openxmlformats.org/officeDocument/2006/relationships" xmlns:ac="http://schemas.microsoft.com/office/drawing/2013/main/command" xmlns:pc="http://schemas.microsoft.com/office/powerpoint/2013/main/command">
+  <pc:docChgLst>
+    <pc:chgData name="きよはら かづとし" userId="26e88724-ac8c-499a-8fbd-8793ef8545c4" providerId="ADAL" clId="{90E159B1-F5D3-4E03-A1D2-40239C3FB8B4}"/>
+    <pc:docChg chg="modSld">
+      <pc:chgData name="きよはら かづとし" userId="26e88724-ac8c-499a-8fbd-8793ef8545c4" providerId="ADAL" clId="{90E159B1-F5D3-4E03-A1D2-40239C3FB8B4}" dt="2026-03-10T15:43:43.463" v="33" actId="20577"/>
+      <pc:docMkLst>
+        <pc:docMk/>
+      </pc:docMkLst>
+      <pc:sldChg chg="modSp mod">
+        <pc:chgData name="きよはら かづとし" userId="26e88724-ac8c-499a-8fbd-8793ef8545c4" providerId="ADAL" clId="{90E159B1-F5D3-4E03-A1D2-40239C3FB8B4}" dt="2026-03-10T15:42:09.269" v="1" actId="6549"/>
+        <pc:sldMkLst>
+          <pc:docMk/>
+          <pc:sldMk cId="0" sldId="258"/>
+        </pc:sldMkLst>
+        <pc:spChg chg="mod">
+          <ac:chgData name="きよはら かづとし" userId="26e88724-ac8c-499a-8fbd-8793ef8545c4" providerId="ADAL" clId="{90E159B1-F5D3-4E03-A1D2-40239C3FB8B4}" dt="2026-03-10T15:42:09.269" v="1" actId="6549"/>
+          <ac:spMkLst>
+            <pc:docMk/>
+            <pc:sldMk cId="0" sldId="258"/>
+            <ac:spMk id="18" creationId="{00000000-0000-0000-0000-000000000000}"/>
+          </ac:spMkLst>
+        </pc:spChg>
+      </pc:sldChg>
+      <pc:sldChg chg="modSp mod">
+        <pc:chgData name="きよはら かづとし" userId="26e88724-ac8c-499a-8fbd-8793ef8545c4" providerId="ADAL" clId="{90E159B1-F5D3-4E03-A1D2-40239C3FB8B4}" dt="2026-03-10T15:43:43.463" v="33" actId="20577"/>
+        <pc:sldMkLst>
+          <pc:docMk/>
+          <pc:sldMk cId="0" sldId="260"/>
+        </pc:sldMkLst>
+        <pc:spChg chg="mod">
+          <ac:chgData name="きよはら かづとし" userId="26e88724-ac8c-499a-8fbd-8793ef8545c4" providerId="ADAL" clId="{90E159B1-F5D3-4E03-A1D2-40239C3FB8B4}" dt="2026-03-10T15:43:43.463" v="33" actId="20577"/>
+          <ac:spMkLst>
+            <pc:docMk/>
+            <pc:sldMk cId="0" sldId="260"/>
+            <ac:spMk id="20" creationId="{00000000-0000-0000-0000-000000000000}"/>
+          </ac:spMkLst>
+        </pc:spChg>
+        <pc:spChg chg="mod">
+          <ac:chgData name="きよはら かづとし" userId="26e88724-ac8c-499a-8fbd-8793ef8545c4" providerId="ADAL" clId="{90E159B1-F5D3-4E03-A1D2-40239C3FB8B4}" dt="2026-03-10T15:43:25.090" v="17" actId="20577"/>
+          <ac:spMkLst>
+            <pc:docMk/>
+            <pc:sldMk cId="0" sldId="260"/>
+            <ac:spMk id="31" creationId="{00000000-0000-0000-0000-000000000000}"/>
+          </ac:spMkLst>
+        </pc:spChg>
+      </pc:sldChg>
+    </pc:docChg>
+  </pc:docChgLst>
+</pc:chgInfo>
 </file>
 
 <file path=ppt/notesMasters/notesMaster1.xml><?xml version="1.0" encoding="utf-8"?>
@@ -137,241 +194,17 @@
           <a:chExt cx="0" cy="0"/>
         </a:xfrm>
       </p:grpSpPr>
-      <p:sp>
-        <p:nvSpPr>
-          <p:cNvPr id="2" name="Header Placeholder 1"/>
-          <p:cNvSpPr>
-            <a:spLocks noGrp="1"/>
-          </p:cNvSpPr>
-          <p:nvPr>
-            <p:ph type="hdr" sz="quarter"/>
-          </p:nvPr>
-        </p:nvSpPr>
-        <p:spPr>
-          <a:xfrm>
-            <a:off x="0" y="0"/>
-            <a:ext cx="2971800" cy="458788"/>
-          </a:xfrm>
-          <a:prstGeom prst="rect">
-            <a:avLst/>
-          </a:prstGeom>
-        </p:spPr>
-        <p:txBody>
-          <a:bodyPr vert="horz" lIns="91440" tIns="45720" rIns="91440" bIns="45720" rtlCol="0"/>
-          <a:lstStyle>
-            <a:lvl1pPr algn="l">
-              <a:defRPr sz="1200"/>
-            </a:lvl1pPr>
-          </a:lstStyle>
-          <a:p>
-            <a:endParaRPr lang="en-US"/>
-          </a:p>
-        </p:txBody>
-      </p:sp>
-      <p:sp>
-        <p:nvSpPr>
-          <p:cNvPr id="3" name="Date Placeholder 2"/>
-          <p:cNvSpPr>
-            <a:spLocks noGrp="1"/>
-          </p:cNvSpPr>
-          <p:nvPr>
-            <p:ph type="dt" idx="1"/>
-          </p:nvPr>
-        </p:nvSpPr>
-        <p:spPr>
-          <a:xfrm>
-            <a:off x="3884613" y="0"/>
-            <a:ext cx="2971800" cy="458788"/>
-          </a:xfrm>
-          <a:prstGeom prst="rect">
-            <a:avLst/>
-          </a:prstGeom>
-        </p:spPr>
-        <p:txBody>
-          <a:bodyPr vert="horz" lIns="91440" tIns="45720" rIns="91440" bIns="45720" rtlCol="0"/>
-          <a:lstStyle>
-            <a:lvl1pPr algn="r">
-              <a:defRPr sz="1200"/>
-            </a:lvl1pPr>
-          </a:lstStyle>
-          <a:p>
-            <a:fld id="{5282F153-3F37-0F45-9E97-73ACFA13230C}" type="datetimeFigureOut">
-              <a:rPr lang="en-US"/>
-              <a:t>7/23/19</a:t>
-            </a:fld>
-            <a:endParaRPr lang="en-US"/>
-          </a:p>
-        </p:txBody>
-      </p:sp>
-      <p:sp>
-        <p:nvSpPr>
-          <p:cNvPr id="4" name="Slide Image Placeholder 3"/>
-          <p:cNvSpPr>
-            <a:spLocks noGrp="1" noRot="1" noChangeAspect="1"/>
-          </p:cNvSpPr>
-          <p:nvPr>
-            <p:ph type="sldImg" idx="2"/>
-          </p:nvPr>
-        </p:nvSpPr>
-        <p:spPr>
-          <a:xfrm>
-            <a:off x="685800" y="1143000"/>
-            <a:ext cx="5486400" cy="3086100"/>
-          </a:xfrm>
-          <a:prstGeom prst="rect">
-            <a:avLst/>
-          </a:prstGeom>
-          <a:noFill/>
-          <a:ln w="12700">
-            <a:solidFill>
-              <a:prstClr val="black"/>
-            </a:solidFill>
-          </a:ln>
-        </p:spPr>
-        <p:txBody>
-          <a:bodyPr vert="horz" lIns="91440" tIns="45720" rIns="91440" bIns="45720" rtlCol="0" anchor="ctr"/>
-          <a:lstStyle/>
-          <a:p>
-            <a:endParaRPr lang="en-US"/>
-          </a:p>
-        </p:txBody>
-      </p:sp>
-      <p:sp>
-        <p:nvSpPr>
-          <p:cNvPr id="5" name="Notes Placeholder 4"/>
-          <p:cNvSpPr>
-            <a:spLocks noGrp="1"/>
-          </p:cNvSpPr>
-          <p:nvPr>
-            <p:ph type="body" sz="quarter" idx="3"/>
-          </p:nvPr>
-        </p:nvSpPr>
-        <p:spPr>
-          <a:xfrm>
-            <a:off x="685800" y="4400550"/>
-            <a:ext cx="5486400" cy="3600450"/>
-          </a:xfrm>
-          <a:prstGeom prst="rect">
-            <a:avLst/>
-          </a:prstGeom>
-        </p:spPr>
-        <p:txBody>
-          <a:bodyPr vert="horz" lIns="91440" tIns="45720" rIns="91440" bIns="45720" rtlCol="0"/>
-          <a:lstStyle/>
-          <a:p>
-            <a:pPr lvl="0"/>
-            <a:r>
-              <a:rPr lang="en-US"/>
-              <a:t>Click to edit Master text styles</a:t>
-            </a:r>
-          </a:p>
-          <a:p>
-            <a:pPr lvl="1"/>
-            <a:r>
-              <a:rPr lang="en-US"/>
-              <a:t>Second level</a:t>
-            </a:r>
-          </a:p>
-          <a:p>
-            <a:pPr lvl="2"/>
-            <a:r>
-              <a:rPr lang="en-US"/>
-              <a:t>Third level</a:t>
-            </a:r>
-          </a:p>
-          <a:p>
-            <a:pPr lvl="3"/>
-            <a:r>
-              <a:rPr lang="en-US"/>
-              <a:t>Fourth level</a:t>
-            </a:r>
-          </a:p>
-          <a:p>
-            <a:pPr lvl="4"/>
-            <a:r>
-              <a:rPr lang="en-US"/>
-              <a:t>Fifth level</a:t>
-            </a:r>
-          </a:p>
-        </p:txBody>
-      </p:sp>
-      <p:sp>
-        <p:nvSpPr>
-          <p:cNvPr id="6" name="Footer Placeholder 5"/>
-          <p:cNvSpPr>
-            <a:spLocks noGrp="1"/>
-          </p:cNvSpPr>
-          <p:nvPr>
-            <p:ph type="ftr" sz="quarter" idx="4"/>
-          </p:nvPr>
-        </p:nvSpPr>
-        <p:spPr>
-          <a:xfrm>
-            <a:off x="0" y="8685213"/>
-            <a:ext cx="2971800" cy="458787"/>
-          </a:xfrm>
-          <a:prstGeom prst="rect">
-            <a:avLst/>
-          </a:prstGeom>
-        </p:spPr>
-        <p:txBody>
-          <a:bodyPr vert="horz" lIns="91440" tIns="45720" rIns="91440" bIns="45720" rtlCol="0" anchor="b"/>
-          <a:lstStyle>
-            <a:lvl1pPr algn="l">
-              <a:defRPr sz="1200"/>
-            </a:lvl1pPr>
-          </a:lstStyle>
-          <a:p>
-            <a:endParaRPr lang="en-US"/>
-          </a:p>
-        </p:txBody>
-      </p:sp>
-      <p:sp>
-        <p:nvSpPr>
-          <p:cNvPr id="7" name="Slide Number Placeholder 6"/>
-          <p:cNvSpPr>
-            <a:spLocks noGrp="1"/>
-          </p:cNvSpPr>
-          <p:nvPr>
-            <p:ph type="sldNum" sz="quarter" idx="5"/>
-          </p:nvPr>
-        </p:nvSpPr>
-        <p:spPr>
-          <a:xfrm>
-            <a:off x="3884613" y="8685213"/>
-            <a:ext cx="2971800" cy="458787"/>
-          </a:xfrm>
-          <a:prstGeom prst="rect">
-            <a:avLst/>
-          </a:prstGeom>
-        </p:spPr>
-        <p:txBody>
-          <a:bodyPr vert="horz" lIns="91440" tIns="45720" rIns="91440" bIns="45720" rtlCol="0" anchor="b"/>
-          <a:lstStyle>
-            <a:lvl1pPr algn="r">
-              <a:defRPr sz="1200"/>
-            </a:lvl1pPr>
-          </a:lstStyle>
-          <a:p>
-            <a:fld id="{CE5E9CC1-C706-0F49-92D6-E571CC5EEA8F}" type="slidenum">
-              <a:rPr lang="en-US"/>
-              <a:t>‹#›</a:t>
-            </a:fld>
-            <a:endParaRPr lang="en-US"/>
-          </a:p>
-        </p:txBody>
-      </p:sp>
     </p:spTree>
     <p:extLst>
       <p:ext uri="{BB962C8B-B14F-4D97-AF65-F5344CB8AC3E}">
-        <p14:creationId xmlns:p14="http://schemas.microsoft.com/office/powerpoint/2010/main" val="1024086991"/>
+        <p14:creationId xmlns:p14="http://schemas.microsoft.com/office/powerpoint/2010/main" val="2568343216"/>
       </p:ext>
     </p:extLst>
   </p:cSld>
   <p:clrMap bg1="lt1" tx1="dk1" bg2="lt2" tx2="dk2" accent1="accent1" accent2="accent2" accent3="accent3" accent4="accent4" accent5="accent5" accent6="accent6" hlink="hlink" folHlink="folHlink"/>
   <p:notesStyle>
     <a:lvl1pPr marL="0" algn="l" defTabSz="914400" rtl="0" eaLnBrk="1" latinLnBrk="0" hangingPunct="1">
-      <a:defRPr sz="1200" kern="1200">
+      <a:defRPr kumimoji="1" sz="1200" kern="1200">
         <a:solidFill>
           <a:schemeClr val="tx1"/>
         </a:solidFill>
@@ -381,7 +214,7 @@
       </a:defRPr>
     </a:lvl1pPr>
     <a:lvl2pPr marL="457200" algn="l" defTabSz="914400" rtl="0" eaLnBrk="1" latinLnBrk="0" hangingPunct="1">
-      <a:defRPr sz="1200" kern="1200">
+      <a:defRPr kumimoji="1" sz="1200" kern="1200">
         <a:solidFill>
           <a:schemeClr val="tx1"/>
         </a:solidFill>
@@ -391,7 +224,7 @@
       </a:defRPr>
     </a:lvl2pPr>
     <a:lvl3pPr marL="914400" algn="l" defTabSz="914400" rtl="0" eaLnBrk="1" latinLnBrk="0" hangingPunct="1">
-      <a:defRPr sz="1200" kern="1200">
+      <a:defRPr kumimoji="1" sz="1200" kern="1200">
         <a:solidFill>
           <a:schemeClr val="tx1"/>
         </a:solidFill>
@@ -401,7 +234,7 @@
       </a:defRPr>
     </a:lvl3pPr>
     <a:lvl4pPr marL="1371600" algn="l" defTabSz="914400" rtl="0" eaLnBrk="1" latinLnBrk="0" hangingPunct="1">
-      <a:defRPr sz="1200" kern="1200">
+      <a:defRPr kumimoji="1" sz="1200" kern="1200">
         <a:solidFill>
           <a:schemeClr val="tx1"/>
         </a:solidFill>
@@ -411,7 +244,7 @@
       </a:defRPr>
     </a:lvl4pPr>
     <a:lvl5pPr marL="1828800" algn="l" defTabSz="914400" rtl="0" eaLnBrk="1" latinLnBrk="0" hangingPunct="1">
-      <a:defRPr sz="1200" kern="1200">
+      <a:defRPr kumimoji="1" sz="1200" kern="1200">
         <a:solidFill>
           <a:schemeClr val="tx1"/>
         </a:solidFill>
@@ -421,7 +254,7 @@
       </a:defRPr>
     </a:lvl5pPr>
     <a:lvl6pPr marL="2286000" algn="l" defTabSz="914400" rtl="0" eaLnBrk="1" latinLnBrk="0" hangingPunct="1">
-      <a:defRPr sz="1200" kern="1200">
+      <a:defRPr kumimoji="1" sz="1200" kern="1200">
         <a:solidFill>
           <a:schemeClr val="tx1"/>
         </a:solidFill>
@@ -431,7 +264,7 @@
       </a:defRPr>
     </a:lvl6pPr>
     <a:lvl7pPr marL="2743200" algn="l" defTabSz="914400" rtl="0" eaLnBrk="1" latinLnBrk="0" hangingPunct="1">
-      <a:defRPr sz="1200" kern="1200">
+      <a:defRPr kumimoji="1" sz="1200" kern="1200">
         <a:solidFill>
           <a:schemeClr val="tx1"/>
         </a:solidFill>
@@ -441,7 +274,7 @@
       </a:defRPr>
     </a:lvl7pPr>
     <a:lvl8pPr marL="3200400" algn="l" defTabSz="914400" rtl="0" eaLnBrk="1" latinLnBrk="0" hangingPunct="1">
-      <a:defRPr sz="1200" kern="1200">
+      <a:defRPr kumimoji="1" sz="1200" kern="1200">
         <a:solidFill>
           <a:schemeClr val="tx1"/>
         </a:solidFill>
@@ -451,7 +284,7 @@
       </a:defRPr>
     </a:lvl8pPr>
     <a:lvl9pPr marL="3657600" algn="l" defTabSz="914400" rtl="0" eaLnBrk="1" latinLnBrk="0" hangingPunct="1">
-      <a:defRPr sz="1200" kern="1200">
+      <a:defRPr kumimoji="1" sz="1200" kern="1200">
         <a:solidFill>
           <a:schemeClr val="tx1"/>
         </a:solidFill>
@@ -508,10 +341,6 @@
           <a:bodyPr/>
           <a:lstStyle/>
           <a:p>
-            <a:r>
-              <a:rPr lang="en-US" dirty="0"/>
-              <a:t/>
-            </a:r>
             <a:endParaRPr lang="en-US" dirty="0"/>
           </a:p>
         </p:txBody>
@@ -596,10 +425,6 @@
           <a:bodyPr/>
           <a:lstStyle/>
           <a:p>
-            <a:r>
-              <a:rPr lang="en-US" dirty="0"/>
-              <a:t/>
-            </a:r>
             <a:endParaRPr lang="en-US" dirty="0"/>
           </a:p>
         </p:txBody>
@@ -684,10 +509,6 @@
           <a:bodyPr/>
           <a:lstStyle/>
           <a:p>
-            <a:r>
-              <a:rPr lang="en-US" dirty="0"/>
-              <a:t/>
-            </a:r>
             <a:endParaRPr lang="en-US" dirty="0"/>
           </a:p>
         </p:txBody>
@@ -772,10 +593,6 @@
           <a:bodyPr/>
           <a:lstStyle/>
           <a:p>
-            <a:r>
-              <a:rPr lang="en-US" dirty="0"/>
-              <a:t/>
-            </a:r>
             <a:endParaRPr lang="en-US" dirty="0"/>
           </a:p>
         </p:txBody>
@@ -860,10 +677,6 @@
           <a:bodyPr/>
           <a:lstStyle/>
           <a:p>
-            <a:r>
-              <a:rPr lang="en-US" dirty="0"/>
-              <a:t/>
-            </a:r>
             <a:endParaRPr lang="en-US" dirty="0"/>
           </a:p>
         </p:txBody>
@@ -948,10 +761,6 @@
           <a:bodyPr/>
           <a:lstStyle/>
           <a:p>
-            <a:r>
-              <a:rPr lang="en-US" dirty="0"/>
-              <a:t/>
-            </a:r>
             <a:endParaRPr lang="en-US" dirty="0"/>
           </a:p>
         </p:txBody>
@@ -1036,10 +845,6 @@
           <a:bodyPr/>
           <a:lstStyle/>
           <a:p>
-            <a:r>
-              <a:rPr lang="en-US" dirty="0"/>
-              <a:t/>
-            </a:r>
             <a:endParaRPr lang="en-US" dirty="0"/>
           </a:p>
         </p:txBody>
@@ -1124,10 +929,6 @@
           <a:bodyPr/>
           <a:lstStyle/>
           <a:p>
-            <a:r>
-              <a:rPr lang="en-US" dirty="0"/>
-              <a:t/>
-            </a:r>
             <a:endParaRPr lang="en-US" dirty="0"/>
           </a:p>
         </p:txBody>
@@ -1212,10 +1013,6 @@
           <a:bodyPr/>
           <a:lstStyle/>
           <a:p>
-            <a:r>
-              <a:rPr lang="en-US" dirty="0"/>
-              <a:t/>
-            </a:r>
             <a:endParaRPr lang="en-US" dirty="0"/>
           </a:p>
         </p:txBody>
@@ -1289,6 +1086,11 @@
 <file path=ppt/slideMasters/slideMaster1.xml><?xml version="1.0" encoding="utf-8"?>
 <p:sldMaster xmlns:a="http://schemas.openxmlformats.org/drawingml/2006/main" xmlns:r="http://schemas.openxmlformats.org/officeDocument/2006/relationships" xmlns:p="http://schemas.openxmlformats.org/presentationml/2006/main">
   <p:cSld>
+    <p:bg>
+      <p:bgRef idx="1001">
+        <a:schemeClr val="bg1"/>
+      </p:bgRef>
+    </p:bg>
     <p:spTree>
       <p:nvGrpSpPr>
         <p:cNvPr id="1" name=""/>
@@ -1571,6 +1373,7 @@
         <a:solidFill>
           <a:srgbClr val="FFFFFF"/>
         </a:solidFill>
+        <a:effectLst/>
       </p:bgPr>
     </p:bg>
     <p:spTree>
@@ -1589,94 +1392,7 @@
       </p:grpSpPr>
       <p:pic>
         <p:nvPicPr>
-          <p:cNvPr id="2" name="Image 0" descr="/mnt/skills/user/luvina-ppt/assets/decoration_dots.png">    </p:cNvPr>
-          <p:cNvPicPr>
-            <a:picLocks noChangeAspect="1"/>
-          </p:cNvPicPr>
-          <p:nvPr/>
-        </p:nvPicPr>
-        <p:blipFill>
-          <a:blip r:embed="rId1"/>
-          <a:stretch>
-            <a:fillRect/>
-          </a:stretch>
-        </p:blipFill>
-        <p:spPr>
-          <a:xfrm>
-            <a:off x="0" y="0"/>
-            <a:ext cx="3904488" cy="2880360"/>
-          </a:xfrm>
-          <a:prstGeom prst="rect">
-            <a:avLst/>
-          </a:prstGeom>
-        </p:spPr>
-      </p:pic>
-      <p:pic>
-        <p:nvPicPr>
-          <p:cNvPr id="3" name="Image 1" descr="/mnt/skills/user/luvina-ppt/assets/luvina_badge.png">    </p:cNvPr>
-          <p:cNvPicPr>
-            <a:picLocks noChangeAspect="1"/>
-          </p:cNvPicPr>
-          <p:nvPr/>
-        </p:nvPicPr>
-        <p:blipFill>
-          <a:blip r:embed="rId2"/>
-          <a:stretch>
-            <a:fillRect/>
-          </a:stretch>
-        </p:blipFill>
-        <p:spPr>
-          <a:xfrm>
-            <a:off x="109728" y="109728"/>
-            <a:ext cx="1874520" cy="466344"/>
-          </a:xfrm>
-          <a:prstGeom prst="rect">
-            <a:avLst/>
-          </a:prstGeom>
-        </p:spPr>
-      </p:pic>
-      <p:sp>
-        <p:nvSpPr>
-          <p:cNvPr id="4" name="Text 0"/>
-          <p:cNvSpPr/>
-          <p:nvPr/>
-        </p:nvSpPr>
-        <p:spPr>
-          <a:xfrm>
-            <a:off x="438912" y="173736"/>
-            <a:ext cx="1216152" cy="329184"/>
-          </a:xfrm>
-          <a:prstGeom prst="rect">
-            <a:avLst/>
-          </a:prstGeom>
-          <a:noFill/>
-          <a:ln/>
-        </p:spPr>
-        <p:txBody>
-          <a:bodyPr wrap="square" lIns="0" tIns="0" rIns="0" bIns="0" rtlCol="0" anchor="ctr"/>
-          <a:lstStyle/>
-          <a:p>
-            <a:pPr indent="0" marL="0">
-              <a:buNone/>
-            </a:pPr>
-            <a:r>
-              <a:rPr lang="en-US" sz="1600" b="1" dirty="0">
-                <a:solidFill>
-                  <a:srgbClr val="FFFFFF"/>
-                </a:solidFill>
-                <a:latin typeface="Arial Black" pitchFamily="34" charset="0"/>
-                <a:ea typeface="Arial Black" pitchFamily="34" charset="-122"/>
-                <a:cs typeface="Arial Black" pitchFamily="34" charset="-120"/>
-              </a:rPr>
-              <a:t>LUVINA</a:t>
-            </a:r>
-            <a:endParaRPr lang="en-US" sz="1600" dirty="0"/>
-          </a:p>
-        </p:txBody>
-      </p:sp>
-      <p:pic>
-        <p:nvPicPr>
-          <p:cNvPr id="5" name="Image 2" descr="/mnt/skills/user/luvina-ppt/assets/luvina_logo.png">    </p:cNvPr>
+          <p:cNvPr id="2" name="Image 0" descr="/mnt/skills/user/luvina-ppt/assets/decoration_dots.png"/>
           <p:cNvPicPr>
             <a:picLocks noChangeAspect="1"/>
           </p:cNvPicPr>
@@ -1690,6 +1406,93 @@
         </p:blipFill>
         <p:spPr>
           <a:xfrm>
+            <a:off x="0" y="0"/>
+            <a:ext cx="3904488" cy="2880360"/>
+          </a:xfrm>
+          <a:prstGeom prst="rect">
+            <a:avLst/>
+          </a:prstGeom>
+        </p:spPr>
+      </p:pic>
+      <p:pic>
+        <p:nvPicPr>
+          <p:cNvPr id="3" name="Image 1" descr="/mnt/skills/user/luvina-ppt/assets/luvina_badge.png"/>
+          <p:cNvPicPr>
+            <a:picLocks noChangeAspect="1"/>
+          </p:cNvPicPr>
+          <p:nvPr/>
+        </p:nvPicPr>
+        <p:blipFill>
+          <a:blip r:embed="rId4"/>
+          <a:stretch>
+            <a:fillRect/>
+          </a:stretch>
+        </p:blipFill>
+        <p:spPr>
+          <a:xfrm>
+            <a:off x="109728" y="109728"/>
+            <a:ext cx="1874520" cy="466344"/>
+          </a:xfrm>
+          <a:prstGeom prst="rect">
+            <a:avLst/>
+          </a:prstGeom>
+        </p:spPr>
+      </p:pic>
+      <p:sp>
+        <p:nvSpPr>
+          <p:cNvPr id="4" name="Text 0"/>
+          <p:cNvSpPr/>
+          <p:nvPr/>
+        </p:nvSpPr>
+        <p:spPr>
+          <a:xfrm>
+            <a:off x="438912" y="173736"/>
+            <a:ext cx="1216152" cy="329184"/>
+          </a:xfrm>
+          <a:prstGeom prst="rect">
+            <a:avLst/>
+          </a:prstGeom>
+          <a:noFill/>
+          <a:ln/>
+        </p:spPr>
+        <p:txBody>
+          <a:bodyPr wrap="square" lIns="0" tIns="0" rIns="0" bIns="0" rtlCol="0" anchor="ctr"/>
+          <a:lstStyle/>
+          <a:p>
+            <a:pPr marL="0" indent="0">
+              <a:buNone/>
+            </a:pPr>
+            <a:r>
+              <a:rPr lang="en-US" sz="1600" b="1" dirty="0">
+                <a:solidFill>
+                  <a:srgbClr val="FFFFFF"/>
+                </a:solidFill>
+                <a:latin typeface="Arial Black" pitchFamily="34" charset="0"/>
+                <a:ea typeface="Arial Black" pitchFamily="34" charset="-122"/>
+                <a:cs typeface="Arial Black" pitchFamily="34" charset="-120"/>
+              </a:rPr>
+              <a:t>LUVINA</a:t>
+            </a:r>
+            <a:endParaRPr lang="en-US" sz="1600" dirty="0"/>
+          </a:p>
+        </p:txBody>
+      </p:sp>
+      <p:pic>
+        <p:nvPicPr>
+          <p:cNvPr id="5" name="Image 2" descr="/mnt/skills/user/luvina-ppt/assets/luvina_logo.png"/>
+          <p:cNvPicPr>
+            <a:picLocks noChangeAspect="1"/>
+          </p:cNvPicPr>
+          <p:nvPr/>
+        </p:nvPicPr>
+        <p:blipFill>
+          <a:blip r:embed="rId5"/>
+          <a:stretch>
+            <a:fillRect/>
+          </a:stretch>
+        </p:blipFill>
+        <p:spPr>
+          <a:xfrm>
             <a:off x="8924544" y="109728"/>
             <a:ext cx="932688" cy="466344"/>
           </a:xfrm>
@@ -1717,6 +1520,13 @@
           </a:solidFill>
           <a:ln/>
         </p:spPr>
+        <p:txBody>
+          <a:bodyPr/>
+          <a:lstStyle/>
+          <a:p>
+            <a:endParaRPr lang="ja-JP" altLang="en-US"/>
+          </a:p>
+        </p:txBody>
       </p:sp>
       <p:sp>
         <p:nvSpPr>
@@ -1739,7 +1549,7 @@
           <a:bodyPr wrap="square" lIns="0" tIns="0" rIns="0" bIns="0" rtlCol="0" anchor="ctr"/>
           <a:lstStyle/>
           <a:p>
-            <a:pPr indent="0" marL="0">
+            <a:pPr marL="0" indent="0">
               <a:buNone/>
             </a:pPr>
             <a:r>
@@ -1775,7 +1585,7 @@
           <a:bodyPr wrap="square" lIns="0" tIns="0" rIns="0" bIns="0" rtlCol="0" anchor="ctr"/>
           <a:lstStyle/>
           <a:p>
-            <a:pPr indent="0" marL="0">
+            <a:pPr marL="0" indent="0">
               <a:buNone/>
             </a:pPr>
             <a:r>
@@ -1792,7 +1602,7 @@
             <a:endParaRPr lang="en-US" sz="3200" dirty="0"/>
           </a:p>
           <a:p>
-            <a:pPr indent="0" marL="0">
+            <a:pPr marL="0" indent="0">
               <a:buNone/>
             </a:pPr>
             <a:r>
@@ -1831,7 +1641,7 @@
           <a:bodyPr wrap="square" lIns="0" tIns="0" rIns="0" bIns="0" rtlCol="0" anchor="ctr"/>
           <a:lstStyle/>
           <a:p>
-            <a:pPr indent="0" marL="0">
+            <a:pPr marL="0" indent="0">
               <a:buNone/>
             </a:pPr>
             <a:r>
@@ -1848,7 +1658,7 @@
             <a:endParaRPr lang="en-US" sz="1500" dirty="0"/>
           </a:p>
           <a:p>
-            <a:pPr indent="0" marL="0">
+            <a:pPr marL="0" indent="0">
               <a:buNone/>
             </a:pPr>
             <a:r>
@@ -1888,6 +1698,13 @@
             <a:prstDash val="solid"/>
           </a:ln>
         </p:spPr>
+        <p:txBody>
+          <a:bodyPr/>
+          <a:lstStyle/>
+          <a:p>
+            <a:endParaRPr lang="ja-JP" altLang="en-US"/>
+          </a:p>
+        </p:txBody>
       </p:sp>
       <p:sp>
         <p:nvSpPr>
@@ -1910,7 +1727,7 @@
           <a:bodyPr wrap="square" lIns="0" tIns="0" rIns="0" bIns="0" rtlCol="0" anchor="ctr"/>
           <a:lstStyle/>
           <a:p>
-            <a:pPr indent="0" marL="0">
+            <a:pPr marL="0" indent="0">
               <a:buNone/>
             </a:pPr>
             <a:r>
@@ -1949,7 +1766,7 @@
           <a:bodyPr wrap="square" lIns="0" tIns="0" rIns="0" bIns="0" rtlCol="0" anchor="ctr"/>
           <a:lstStyle/>
           <a:p>
-            <a:pPr indent="0" marL="0">
+            <a:pPr marL="0" indent="0">
               <a:buNone/>
             </a:pPr>
             <a:r>
@@ -1988,7 +1805,7 @@
           <a:bodyPr wrap="square" lIns="0" tIns="0" rIns="0" bIns="0" rtlCol="0" anchor="ctr"/>
           <a:lstStyle/>
           <a:p>
-            <a:pPr indent="0" marL="0">
+            <a:pPr marL="0" indent="0">
               <a:buNone/>
             </a:pPr>
             <a:r>
@@ -2022,6 +1839,7 @@
         <a:solidFill>
           <a:srgbClr val="FFFFFF"/>
         </a:solidFill>
+        <a:effectLst/>
       </p:bgPr>
     </p:bg>
     <p:spTree>
@@ -2040,94 +1858,7 @@
       </p:grpSpPr>
       <p:pic>
         <p:nvPicPr>
-          <p:cNvPr id="2" name="Image 0" descr="/mnt/skills/user/luvina-ppt/assets/decoration_dots.png">    </p:cNvPr>
-          <p:cNvPicPr>
-            <a:picLocks noChangeAspect="1"/>
-          </p:cNvPicPr>
-          <p:nvPr/>
-        </p:nvPicPr>
-        <p:blipFill>
-          <a:blip r:embed="rId1"/>
-          <a:stretch>
-            <a:fillRect/>
-          </a:stretch>
-        </p:blipFill>
-        <p:spPr>
-          <a:xfrm>
-            <a:off x="0" y="0"/>
-            <a:ext cx="3904488" cy="2880360"/>
-          </a:xfrm>
-          <a:prstGeom prst="rect">
-            <a:avLst/>
-          </a:prstGeom>
-        </p:spPr>
-      </p:pic>
-      <p:pic>
-        <p:nvPicPr>
-          <p:cNvPr id="3" name="Image 1" descr="/mnt/skills/user/luvina-ppt/assets/luvina_badge.png">    </p:cNvPr>
-          <p:cNvPicPr>
-            <a:picLocks noChangeAspect="1"/>
-          </p:cNvPicPr>
-          <p:nvPr/>
-        </p:nvPicPr>
-        <p:blipFill>
-          <a:blip r:embed="rId2"/>
-          <a:stretch>
-            <a:fillRect/>
-          </a:stretch>
-        </p:blipFill>
-        <p:spPr>
-          <a:xfrm>
-            <a:off x="109728" y="109728"/>
-            <a:ext cx="1874520" cy="466344"/>
-          </a:xfrm>
-          <a:prstGeom prst="rect">
-            <a:avLst/>
-          </a:prstGeom>
-        </p:spPr>
-      </p:pic>
-      <p:sp>
-        <p:nvSpPr>
-          <p:cNvPr id="4" name="Text 0"/>
-          <p:cNvSpPr/>
-          <p:nvPr/>
-        </p:nvSpPr>
-        <p:spPr>
-          <a:xfrm>
-            <a:off x="438912" y="173736"/>
-            <a:ext cx="1216152" cy="329184"/>
-          </a:xfrm>
-          <a:prstGeom prst="rect">
-            <a:avLst/>
-          </a:prstGeom>
-          <a:noFill/>
-          <a:ln/>
-        </p:spPr>
-        <p:txBody>
-          <a:bodyPr wrap="square" lIns="0" tIns="0" rIns="0" bIns="0" rtlCol="0" anchor="ctr"/>
-          <a:lstStyle/>
-          <a:p>
-            <a:pPr indent="0" marL="0">
-              <a:buNone/>
-            </a:pPr>
-            <a:r>
-              <a:rPr lang="en-US" sz="1600" b="1" dirty="0">
-                <a:solidFill>
-                  <a:srgbClr val="FFFFFF"/>
-                </a:solidFill>
-                <a:latin typeface="Arial Black" pitchFamily="34" charset="0"/>
-                <a:ea typeface="Arial Black" pitchFamily="34" charset="-122"/>
-                <a:cs typeface="Arial Black" pitchFamily="34" charset="-120"/>
-              </a:rPr>
-              <a:t>LUVINA</a:t>
-            </a:r>
-            <a:endParaRPr lang="en-US" sz="1600" dirty="0"/>
-          </a:p>
-        </p:txBody>
-      </p:sp>
-      <p:pic>
-        <p:nvPicPr>
-          <p:cNvPr id="5" name="Image 2" descr="/mnt/skills/user/luvina-ppt/assets/luvina_logo.png">    </p:cNvPr>
+          <p:cNvPr id="2" name="Image 0" descr="/mnt/skills/user/luvina-ppt/assets/decoration_dots.png"/>
           <p:cNvPicPr>
             <a:picLocks noChangeAspect="1"/>
           </p:cNvPicPr>
@@ -2141,6 +1872,93 @@
         </p:blipFill>
         <p:spPr>
           <a:xfrm>
+            <a:off x="0" y="0"/>
+            <a:ext cx="3904488" cy="2880360"/>
+          </a:xfrm>
+          <a:prstGeom prst="rect">
+            <a:avLst/>
+          </a:prstGeom>
+        </p:spPr>
+      </p:pic>
+      <p:pic>
+        <p:nvPicPr>
+          <p:cNvPr id="3" name="Image 1" descr="/mnt/skills/user/luvina-ppt/assets/luvina_badge.png"/>
+          <p:cNvPicPr>
+            <a:picLocks noChangeAspect="1"/>
+          </p:cNvPicPr>
+          <p:nvPr/>
+        </p:nvPicPr>
+        <p:blipFill>
+          <a:blip r:embed="rId4"/>
+          <a:stretch>
+            <a:fillRect/>
+          </a:stretch>
+        </p:blipFill>
+        <p:spPr>
+          <a:xfrm>
+            <a:off x="109728" y="109728"/>
+            <a:ext cx="1874520" cy="466344"/>
+          </a:xfrm>
+          <a:prstGeom prst="rect">
+            <a:avLst/>
+          </a:prstGeom>
+        </p:spPr>
+      </p:pic>
+      <p:sp>
+        <p:nvSpPr>
+          <p:cNvPr id="4" name="Text 0"/>
+          <p:cNvSpPr/>
+          <p:nvPr/>
+        </p:nvSpPr>
+        <p:spPr>
+          <a:xfrm>
+            <a:off x="438912" y="173736"/>
+            <a:ext cx="1216152" cy="329184"/>
+          </a:xfrm>
+          <a:prstGeom prst="rect">
+            <a:avLst/>
+          </a:prstGeom>
+          <a:noFill/>
+          <a:ln/>
+        </p:spPr>
+        <p:txBody>
+          <a:bodyPr wrap="square" lIns="0" tIns="0" rIns="0" bIns="0" rtlCol="0" anchor="ctr"/>
+          <a:lstStyle/>
+          <a:p>
+            <a:pPr marL="0" indent="0">
+              <a:buNone/>
+            </a:pPr>
+            <a:r>
+              <a:rPr lang="en-US" sz="1600" b="1" dirty="0">
+                <a:solidFill>
+                  <a:srgbClr val="FFFFFF"/>
+                </a:solidFill>
+                <a:latin typeface="Arial Black" pitchFamily="34" charset="0"/>
+                <a:ea typeface="Arial Black" pitchFamily="34" charset="-122"/>
+                <a:cs typeface="Arial Black" pitchFamily="34" charset="-120"/>
+              </a:rPr>
+              <a:t>LUVINA</a:t>
+            </a:r>
+            <a:endParaRPr lang="en-US" sz="1600" dirty="0"/>
+          </a:p>
+        </p:txBody>
+      </p:sp>
+      <p:pic>
+        <p:nvPicPr>
+          <p:cNvPr id="5" name="Image 2" descr="/mnt/skills/user/luvina-ppt/assets/luvina_logo.png"/>
+          <p:cNvPicPr>
+            <a:picLocks noChangeAspect="1"/>
+          </p:cNvPicPr>
+          <p:nvPr/>
+        </p:nvPicPr>
+        <p:blipFill>
+          <a:blip r:embed="rId5"/>
+          <a:stretch>
+            <a:fillRect/>
+          </a:stretch>
+        </p:blipFill>
+        <p:spPr>
+          <a:xfrm>
             <a:off x="8924544" y="109728"/>
             <a:ext cx="932688" cy="466344"/>
           </a:xfrm>
@@ -2168,6 +1986,13 @@
           </a:solidFill>
           <a:ln/>
         </p:spPr>
+        <p:txBody>
+          <a:bodyPr/>
+          <a:lstStyle/>
+          <a:p>
+            <a:endParaRPr lang="ja-JP" altLang="en-US"/>
+          </a:p>
+        </p:txBody>
       </p:sp>
       <p:sp>
         <p:nvSpPr>
@@ -2190,7 +2015,7 @@
           <a:bodyPr wrap="square" lIns="0" tIns="0" rIns="0" bIns="0" rtlCol="0" anchor="ctr"/>
           <a:lstStyle/>
           <a:p>
-            <a:pPr indent="0" marL="0">
+            <a:pPr marL="0" indent="0">
               <a:buNone/>
             </a:pPr>
             <a:r>
@@ -2229,7 +2054,7 @@
           <a:bodyPr wrap="square" lIns="0" tIns="0" rIns="0" bIns="0" rtlCol="0" anchor="ctr"/>
           <a:lstStyle/>
           <a:p>
-            <a:pPr indent="0" marL="0">
+            <a:pPr marL="0" indent="0">
               <a:buNone/>
             </a:pPr>
             <a:r>
@@ -2266,6 +2091,13 @@
           </a:solidFill>
           <a:ln/>
         </p:spPr>
+        <p:txBody>
+          <a:bodyPr/>
+          <a:lstStyle/>
+          <a:p>
+            <a:endParaRPr lang="ja-JP" altLang="en-US"/>
+          </a:p>
+        </p:txBody>
       </p:sp>
       <p:sp>
         <p:nvSpPr>
@@ -2288,7 +2120,7 @@
           <a:bodyPr wrap="square" lIns="0" tIns="0" rIns="0" bIns="0" rtlCol="0" anchor="ctr"/>
           <a:lstStyle/>
           <a:p>
-            <a:pPr indent="0" marL="0">
+            <a:pPr marL="0" indent="0">
               <a:buNone/>
             </a:pPr>
             <a:r>
@@ -2327,13 +2159,20 @@
             <a:prstDash val="solid"/>
           </a:ln>
           <a:effectLst>
-            <a:outerShdw sx="100000" sy="100000" kx="0" ky="0" algn="bl" rotWithShape="0" blurRad="50800" dist="25400" dir="8100000">
+            <a:outerShdw blurRad="50800" dist="25400" dir="8100000" algn="bl" rotWithShape="0">
               <a:srgbClr val="000000">
                 <a:alpha val="10000"/>
               </a:srgbClr>
             </a:outerShdw>
           </a:effectLst>
         </p:spPr>
+        <p:txBody>
+          <a:bodyPr/>
+          <a:lstStyle/>
+          <a:p>
+            <a:endParaRPr lang="ja-JP" altLang="en-US"/>
+          </a:p>
+        </p:txBody>
       </p:sp>
       <p:sp>
         <p:nvSpPr>
@@ -2354,6 +2193,13 @@
           </a:solidFill>
           <a:ln/>
         </p:spPr>
+        <p:txBody>
+          <a:bodyPr/>
+          <a:lstStyle/>
+          <a:p>
+            <a:endParaRPr lang="ja-JP" altLang="en-US"/>
+          </a:p>
+        </p:txBody>
       </p:sp>
       <p:sp>
         <p:nvSpPr>
@@ -2376,7 +2222,7 @@
           <a:bodyPr wrap="square" lIns="0" tIns="0" rIns="0" bIns="0" rtlCol="0" anchor="ctr"/>
           <a:lstStyle/>
           <a:p>
-            <a:pPr algn="ctr" indent="0" marL="0">
+            <a:pPr marL="0" indent="0" algn="ctr">
               <a:buNone/>
             </a:pPr>
             <a:r>
@@ -2415,7 +2261,7 @@
           <a:bodyPr wrap="square" lIns="0" tIns="0" rIns="0" bIns="0" rtlCol="0" anchor="ctr"/>
           <a:lstStyle/>
           <a:p>
-            <a:pPr algn="ctr" indent="0" marL="0">
+            <a:pPr marL="0" indent="0" algn="ctr">
               <a:buNone/>
             </a:pPr>
             <a:r>
@@ -2432,7 +2278,7 @@
             <a:endParaRPr lang="en-US" sz="1400" dirty="0"/>
           </a:p>
           <a:p>
-            <a:pPr algn="ctr" indent="0" marL="0">
+            <a:pPr marL="0" indent="0" algn="ctr">
               <a:buNone/>
             </a:pPr>
             <a:r>
@@ -2472,6 +2318,13 @@
             <a:prstDash val="solid"/>
           </a:ln>
         </p:spPr>
+        <p:txBody>
+          <a:bodyPr/>
+          <a:lstStyle/>
+          <a:p>
+            <a:endParaRPr lang="ja-JP" altLang="en-US"/>
+          </a:p>
+        </p:txBody>
       </p:sp>
       <p:sp>
         <p:nvSpPr>
@@ -2494,7 +2347,7 @@
           <a:bodyPr wrap="square" lIns="0" tIns="0" rIns="0" bIns="0" rtlCol="0" anchor="t"/>
           <a:lstStyle/>
           <a:p>
-            <a:pPr indent="0" marL="0">
+            <a:pPr marL="0" indent="0">
               <a:buNone/>
             </a:pPr>
             <a:r>
@@ -2511,13 +2364,13 @@
             <a:endParaRPr lang="en-US" sz="1000" dirty="0"/>
           </a:p>
           <a:p>
-            <a:pPr indent="0" marL="0">
+            <a:pPr marL="0" indent="0">
               <a:buNone/>
             </a:pPr>
             <a:endParaRPr lang="en-US" sz="1000" dirty="0"/>
           </a:p>
           <a:p>
-            <a:pPr indent="0" marL="0">
+            <a:pPr marL="0" indent="0">
               <a:buNone/>
             </a:pPr>
             <a:r>
@@ -2559,13 +2412,20 @@
             <a:prstDash val="solid"/>
           </a:ln>
           <a:effectLst>
-            <a:outerShdw sx="100000" sy="100000" kx="0" ky="0" algn="bl" rotWithShape="0" blurRad="50800" dist="25400" dir="8100000">
+            <a:outerShdw blurRad="50800" dist="25400" dir="8100000" algn="bl" rotWithShape="0">
               <a:srgbClr val="000000">
                 <a:alpha val="10000"/>
               </a:srgbClr>
             </a:outerShdw>
           </a:effectLst>
         </p:spPr>
+        <p:txBody>
+          <a:bodyPr/>
+          <a:lstStyle/>
+          <a:p>
+            <a:endParaRPr lang="ja-JP" altLang="en-US"/>
+          </a:p>
+        </p:txBody>
       </p:sp>
       <p:sp>
         <p:nvSpPr>
@@ -2586,6 +2446,13 @@
           </a:solidFill>
           <a:ln/>
         </p:spPr>
+        <p:txBody>
+          <a:bodyPr/>
+          <a:lstStyle/>
+          <a:p>
+            <a:endParaRPr lang="ja-JP" altLang="en-US"/>
+          </a:p>
+        </p:txBody>
       </p:sp>
       <p:sp>
         <p:nvSpPr>
@@ -2608,7 +2475,7 @@
           <a:bodyPr wrap="square" lIns="0" tIns="0" rIns="0" bIns="0" rtlCol="0" anchor="ctr"/>
           <a:lstStyle/>
           <a:p>
-            <a:pPr algn="ctr" indent="0" marL="0">
+            <a:pPr marL="0" indent="0" algn="ctr">
               <a:buNone/>
             </a:pPr>
             <a:r>
@@ -2647,7 +2514,7 @@
           <a:bodyPr wrap="square" lIns="0" tIns="0" rIns="0" bIns="0" rtlCol="0" anchor="ctr"/>
           <a:lstStyle/>
           <a:p>
-            <a:pPr algn="ctr" indent="0" marL="0">
+            <a:pPr marL="0" indent="0" algn="ctr">
               <a:buNone/>
             </a:pPr>
             <a:r>
@@ -2664,7 +2531,7 @@
             <a:endParaRPr lang="en-US" sz="1400" dirty="0"/>
           </a:p>
           <a:p>
-            <a:pPr algn="ctr" indent="0" marL="0">
+            <a:pPr marL="0" indent="0" algn="ctr">
               <a:buNone/>
             </a:pPr>
             <a:r>
@@ -2704,6 +2571,13 @@
             <a:prstDash val="solid"/>
           </a:ln>
         </p:spPr>
+        <p:txBody>
+          <a:bodyPr/>
+          <a:lstStyle/>
+          <a:p>
+            <a:endParaRPr lang="ja-JP" altLang="en-US"/>
+          </a:p>
+        </p:txBody>
       </p:sp>
       <p:sp>
         <p:nvSpPr>
@@ -2726,7 +2600,7 @@
           <a:bodyPr wrap="square" lIns="0" tIns="0" rIns="0" bIns="0" rtlCol="0" anchor="t"/>
           <a:lstStyle/>
           <a:p>
-            <a:pPr indent="0" marL="0">
+            <a:pPr marL="0" indent="0">
               <a:buNone/>
             </a:pPr>
             <a:r>
@@ -2743,13 +2617,13 @@
             <a:endParaRPr lang="en-US" sz="1000" dirty="0"/>
           </a:p>
           <a:p>
-            <a:pPr indent="0" marL="0">
+            <a:pPr marL="0" indent="0">
               <a:buNone/>
             </a:pPr>
             <a:endParaRPr lang="en-US" sz="1000" dirty="0"/>
           </a:p>
           <a:p>
-            <a:pPr indent="0" marL="0">
+            <a:pPr marL="0" indent="0">
               <a:buNone/>
             </a:pPr>
             <a:r>
@@ -2791,13 +2665,20 @@
             <a:prstDash val="solid"/>
           </a:ln>
           <a:effectLst>
-            <a:outerShdw sx="100000" sy="100000" kx="0" ky="0" algn="bl" rotWithShape="0" blurRad="50800" dist="25400" dir="8100000">
+            <a:outerShdw blurRad="50800" dist="25400" dir="8100000" algn="bl" rotWithShape="0">
               <a:srgbClr val="000000">
                 <a:alpha val="10000"/>
               </a:srgbClr>
             </a:outerShdw>
           </a:effectLst>
         </p:spPr>
+        <p:txBody>
+          <a:bodyPr/>
+          <a:lstStyle/>
+          <a:p>
+            <a:endParaRPr lang="ja-JP" altLang="en-US"/>
+          </a:p>
+        </p:txBody>
       </p:sp>
       <p:sp>
         <p:nvSpPr>
@@ -2818,6 +2699,13 @@
           </a:solidFill>
           <a:ln/>
         </p:spPr>
+        <p:txBody>
+          <a:bodyPr/>
+          <a:lstStyle/>
+          <a:p>
+            <a:endParaRPr lang="ja-JP" altLang="en-US"/>
+          </a:p>
+        </p:txBody>
       </p:sp>
       <p:sp>
         <p:nvSpPr>
@@ -2840,7 +2728,7 @@
           <a:bodyPr wrap="square" lIns="0" tIns="0" rIns="0" bIns="0" rtlCol="0" anchor="ctr"/>
           <a:lstStyle/>
           <a:p>
-            <a:pPr algn="ctr" indent="0" marL="0">
+            <a:pPr marL="0" indent="0" algn="ctr">
               <a:buNone/>
             </a:pPr>
             <a:r>
@@ -2879,7 +2767,7 @@
           <a:bodyPr wrap="square" lIns="0" tIns="0" rIns="0" bIns="0" rtlCol="0" anchor="ctr"/>
           <a:lstStyle/>
           <a:p>
-            <a:pPr algn="ctr" indent="0" marL="0">
+            <a:pPr marL="0" indent="0" algn="ctr">
               <a:buNone/>
             </a:pPr>
             <a:r>
@@ -2896,7 +2784,7 @@
             <a:endParaRPr lang="en-US" sz="1400" dirty="0"/>
           </a:p>
           <a:p>
-            <a:pPr algn="ctr" indent="0" marL="0">
+            <a:pPr marL="0" indent="0" algn="ctr">
               <a:buNone/>
             </a:pPr>
             <a:r>
@@ -2936,6 +2824,13 @@
             <a:prstDash val="solid"/>
           </a:ln>
         </p:spPr>
+        <p:txBody>
+          <a:bodyPr/>
+          <a:lstStyle/>
+          <a:p>
+            <a:endParaRPr lang="ja-JP" altLang="en-US"/>
+          </a:p>
+        </p:txBody>
       </p:sp>
       <p:sp>
         <p:nvSpPr>
@@ -2958,7 +2853,7 @@
           <a:bodyPr wrap="square" lIns="0" tIns="0" rIns="0" bIns="0" rtlCol="0" anchor="t"/>
           <a:lstStyle/>
           <a:p>
-            <a:pPr indent="0" marL="0">
+            <a:pPr marL="0" indent="0">
               <a:buNone/>
             </a:pPr>
             <a:r>
@@ -2975,13 +2870,13 @@
             <a:endParaRPr lang="en-US" sz="1000" dirty="0"/>
           </a:p>
           <a:p>
-            <a:pPr indent="0" marL="0">
+            <a:pPr marL="0" indent="0">
               <a:buNone/>
             </a:pPr>
             <a:endParaRPr lang="en-US" sz="1000" dirty="0"/>
           </a:p>
           <a:p>
-            <a:pPr indent="0" marL="0">
+            <a:pPr marL="0" indent="0">
               <a:buNone/>
             </a:pPr>
             <a:r>
@@ -3015,6 +2910,7 @@
         <a:solidFill>
           <a:srgbClr val="FFFFFF"/>
         </a:solidFill>
+        <a:effectLst/>
       </p:bgPr>
     </p:bg>
     <p:spTree>
@@ -3033,94 +2929,7 @@
       </p:grpSpPr>
       <p:pic>
         <p:nvPicPr>
-          <p:cNvPr id="2" name="Image 0" descr="/mnt/skills/user/luvina-ppt/assets/decoration_dots.png">    </p:cNvPr>
-          <p:cNvPicPr>
-            <a:picLocks noChangeAspect="1"/>
-          </p:cNvPicPr>
-          <p:nvPr/>
-        </p:nvPicPr>
-        <p:blipFill>
-          <a:blip r:embed="rId1"/>
-          <a:stretch>
-            <a:fillRect/>
-          </a:stretch>
-        </p:blipFill>
-        <p:spPr>
-          <a:xfrm>
-            <a:off x="0" y="0"/>
-            <a:ext cx="3904488" cy="2880360"/>
-          </a:xfrm>
-          <a:prstGeom prst="rect">
-            <a:avLst/>
-          </a:prstGeom>
-        </p:spPr>
-      </p:pic>
-      <p:pic>
-        <p:nvPicPr>
-          <p:cNvPr id="3" name="Image 1" descr="/mnt/skills/user/luvina-ppt/assets/luvina_badge.png">    </p:cNvPr>
-          <p:cNvPicPr>
-            <a:picLocks noChangeAspect="1"/>
-          </p:cNvPicPr>
-          <p:nvPr/>
-        </p:nvPicPr>
-        <p:blipFill>
-          <a:blip r:embed="rId2"/>
-          <a:stretch>
-            <a:fillRect/>
-          </a:stretch>
-        </p:blipFill>
-        <p:spPr>
-          <a:xfrm>
-            <a:off x="109728" y="109728"/>
-            <a:ext cx="1874520" cy="466344"/>
-          </a:xfrm>
-          <a:prstGeom prst="rect">
-            <a:avLst/>
-          </a:prstGeom>
-        </p:spPr>
-      </p:pic>
-      <p:sp>
-        <p:nvSpPr>
-          <p:cNvPr id="4" name="Text 0"/>
-          <p:cNvSpPr/>
-          <p:nvPr/>
-        </p:nvSpPr>
-        <p:spPr>
-          <a:xfrm>
-            <a:off x="438912" y="173736"/>
-            <a:ext cx="1216152" cy="329184"/>
-          </a:xfrm>
-          <a:prstGeom prst="rect">
-            <a:avLst/>
-          </a:prstGeom>
-          <a:noFill/>
-          <a:ln/>
-        </p:spPr>
-        <p:txBody>
-          <a:bodyPr wrap="square" lIns="0" tIns="0" rIns="0" bIns="0" rtlCol="0" anchor="ctr"/>
-          <a:lstStyle/>
-          <a:p>
-            <a:pPr indent="0" marL="0">
-              <a:buNone/>
-            </a:pPr>
-            <a:r>
-              <a:rPr lang="en-US" sz="1600" b="1" dirty="0">
-                <a:solidFill>
-                  <a:srgbClr val="FFFFFF"/>
-                </a:solidFill>
-                <a:latin typeface="Arial Black" pitchFamily="34" charset="0"/>
-                <a:ea typeface="Arial Black" pitchFamily="34" charset="-122"/>
-                <a:cs typeface="Arial Black" pitchFamily="34" charset="-120"/>
-              </a:rPr>
-              <a:t>LUVINA</a:t>
-            </a:r>
-            <a:endParaRPr lang="en-US" sz="1600" dirty="0"/>
-          </a:p>
-        </p:txBody>
-      </p:sp>
-      <p:pic>
-        <p:nvPicPr>
-          <p:cNvPr id="5" name="Image 2" descr="/mnt/skills/user/luvina-ppt/assets/luvina_logo.png">    </p:cNvPr>
+          <p:cNvPr id="2" name="Image 0" descr="/mnt/skills/user/luvina-ppt/assets/decoration_dots.png"/>
           <p:cNvPicPr>
             <a:picLocks noChangeAspect="1"/>
           </p:cNvPicPr>
@@ -3134,6 +2943,93 @@
         </p:blipFill>
         <p:spPr>
           <a:xfrm>
+            <a:off x="0" y="0"/>
+            <a:ext cx="3904488" cy="2880360"/>
+          </a:xfrm>
+          <a:prstGeom prst="rect">
+            <a:avLst/>
+          </a:prstGeom>
+        </p:spPr>
+      </p:pic>
+      <p:pic>
+        <p:nvPicPr>
+          <p:cNvPr id="3" name="Image 1" descr="/mnt/skills/user/luvina-ppt/assets/luvina_badge.png"/>
+          <p:cNvPicPr>
+            <a:picLocks noChangeAspect="1"/>
+          </p:cNvPicPr>
+          <p:nvPr/>
+        </p:nvPicPr>
+        <p:blipFill>
+          <a:blip r:embed="rId4"/>
+          <a:stretch>
+            <a:fillRect/>
+          </a:stretch>
+        </p:blipFill>
+        <p:spPr>
+          <a:xfrm>
+            <a:off x="109728" y="109728"/>
+            <a:ext cx="1874520" cy="466344"/>
+          </a:xfrm>
+          <a:prstGeom prst="rect">
+            <a:avLst/>
+          </a:prstGeom>
+        </p:spPr>
+      </p:pic>
+      <p:sp>
+        <p:nvSpPr>
+          <p:cNvPr id="4" name="Text 0"/>
+          <p:cNvSpPr/>
+          <p:nvPr/>
+        </p:nvSpPr>
+        <p:spPr>
+          <a:xfrm>
+            <a:off x="438912" y="173736"/>
+            <a:ext cx="1216152" cy="329184"/>
+          </a:xfrm>
+          <a:prstGeom prst="rect">
+            <a:avLst/>
+          </a:prstGeom>
+          <a:noFill/>
+          <a:ln/>
+        </p:spPr>
+        <p:txBody>
+          <a:bodyPr wrap="square" lIns="0" tIns="0" rIns="0" bIns="0" rtlCol="0" anchor="ctr"/>
+          <a:lstStyle/>
+          <a:p>
+            <a:pPr marL="0" indent="0">
+              <a:buNone/>
+            </a:pPr>
+            <a:r>
+              <a:rPr lang="en-US" sz="1600" b="1" dirty="0">
+                <a:solidFill>
+                  <a:srgbClr val="FFFFFF"/>
+                </a:solidFill>
+                <a:latin typeface="Arial Black" pitchFamily="34" charset="0"/>
+                <a:ea typeface="Arial Black" pitchFamily="34" charset="-122"/>
+                <a:cs typeface="Arial Black" pitchFamily="34" charset="-120"/>
+              </a:rPr>
+              <a:t>LUVINA</a:t>
+            </a:r>
+            <a:endParaRPr lang="en-US" sz="1600" dirty="0"/>
+          </a:p>
+        </p:txBody>
+      </p:sp>
+      <p:pic>
+        <p:nvPicPr>
+          <p:cNvPr id="5" name="Image 2" descr="/mnt/skills/user/luvina-ppt/assets/luvina_logo.png"/>
+          <p:cNvPicPr>
+            <a:picLocks noChangeAspect="1"/>
+          </p:cNvPicPr>
+          <p:nvPr/>
+        </p:nvPicPr>
+        <p:blipFill>
+          <a:blip r:embed="rId5"/>
+          <a:stretch>
+            <a:fillRect/>
+          </a:stretch>
+        </p:blipFill>
+        <p:spPr>
+          <a:xfrm>
             <a:off x="8924544" y="109728"/>
             <a:ext cx="932688" cy="466344"/>
           </a:xfrm>
@@ -3161,6 +3057,13 @@
           </a:solidFill>
           <a:ln/>
         </p:spPr>
+        <p:txBody>
+          <a:bodyPr/>
+          <a:lstStyle/>
+          <a:p>
+            <a:endParaRPr lang="ja-JP" altLang="en-US"/>
+          </a:p>
+        </p:txBody>
       </p:sp>
       <p:sp>
         <p:nvSpPr>
@@ -3183,7 +3086,7 @@
           <a:bodyPr wrap="square" lIns="0" tIns="0" rIns="0" bIns="0" rtlCol="0" anchor="ctr"/>
           <a:lstStyle/>
           <a:p>
-            <a:pPr indent="0" marL="0">
+            <a:pPr marL="0" indent="0">
               <a:buNone/>
             </a:pPr>
             <a:r>
@@ -3222,7 +3125,7 @@
           <a:bodyPr wrap="square" lIns="0" tIns="0" rIns="0" bIns="0" rtlCol="0" anchor="ctr"/>
           <a:lstStyle/>
           <a:p>
-            <a:pPr indent="0" marL="0">
+            <a:pPr marL="0" indent="0">
               <a:buNone/>
             </a:pPr>
             <a:r>
@@ -3259,6 +3162,13 @@
           </a:solidFill>
           <a:ln/>
         </p:spPr>
+        <p:txBody>
+          <a:bodyPr/>
+          <a:lstStyle/>
+          <a:p>
+            <a:endParaRPr lang="ja-JP" altLang="en-US"/>
+          </a:p>
+        </p:txBody>
       </p:sp>
       <p:sp>
         <p:nvSpPr>
@@ -3281,7 +3191,7 @@
           <a:bodyPr wrap="square" lIns="0" tIns="0" rIns="0" bIns="0" rtlCol="0" anchor="ctr"/>
           <a:lstStyle/>
           <a:p>
-            <a:pPr indent="0" marL="0">
+            <a:pPr marL="0" indent="0">
               <a:buNone/>
             </a:pPr>
             <a:r>
@@ -3320,6 +3230,13 @@
             <a:prstDash val="solid"/>
           </a:ln>
         </p:spPr>
+        <p:txBody>
+          <a:bodyPr/>
+          <a:lstStyle/>
+          <a:p>
+            <a:endParaRPr lang="ja-JP" altLang="en-US"/>
+          </a:p>
+        </p:txBody>
       </p:sp>
       <p:sp>
         <p:nvSpPr>
@@ -3342,7 +3259,7 @@
           <a:bodyPr wrap="square" lIns="0" tIns="0" rIns="0" bIns="0" rtlCol="0" anchor="ctr"/>
           <a:lstStyle/>
           <a:p>
-            <a:pPr indent="0" marL="0">
+            <a:pPr marL="0" indent="0">
               <a:buNone/>
             </a:pPr>
             <a:r>
@@ -3384,6 +3301,13 @@
             <a:prstDash val="solid"/>
           </a:ln>
         </p:spPr>
+        <p:txBody>
+          <a:bodyPr/>
+          <a:lstStyle/>
+          <a:p>
+            <a:endParaRPr lang="ja-JP" altLang="en-US"/>
+          </a:p>
+        </p:txBody>
       </p:sp>
       <p:sp>
         <p:nvSpPr>
@@ -3406,7 +3330,7 @@
           <a:bodyPr wrap="square" lIns="0" tIns="0" rIns="0" bIns="0" rtlCol="0" anchor="ctr"/>
           <a:lstStyle/>
           <a:p>
-            <a:pPr algn="ctr" indent="0" marL="0">
+            <a:pPr marL="0" indent="0" algn="ctr">
               <a:buNone/>
             </a:pPr>
             <a:r>
@@ -3423,7 +3347,7 @@
             <a:endParaRPr lang="en-US" sz="900" dirty="0"/>
           </a:p>
           <a:p>
-            <a:pPr algn="ctr" indent="0" marL="0">
+            <a:pPr marL="0" indent="0" algn="ctr">
               <a:buNone/>
             </a:pPr>
             <a:r>
@@ -3465,6 +3389,13 @@
             <a:prstDash val="solid"/>
           </a:ln>
         </p:spPr>
+        <p:txBody>
+          <a:bodyPr/>
+          <a:lstStyle/>
+          <a:p>
+            <a:endParaRPr lang="ja-JP" altLang="en-US"/>
+          </a:p>
+        </p:txBody>
       </p:sp>
       <p:sp>
         <p:nvSpPr>
@@ -3487,7 +3418,7 @@
           <a:bodyPr wrap="square" lIns="0" tIns="0" rIns="0" bIns="0" rtlCol="0" anchor="ctr"/>
           <a:lstStyle/>
           <a:p>
-            <a:pPr algn="ctr" indent="0" marL="0">
+            <a:pPr marL="0" indent="0" algn="ctr">
               <a:buNone/>
             </a:pPr>
             <a:r>
@@ -3504,7 +3435,7 @@
             <a:endParaRPr lang="en-US" sz="900" dirty="0"/>
           </a:p>
           <a:p>
-            <a:pPr algn="ctr" indent="0" marL="0">
+            <a:pPr marL="0" indent="0" algn="ctr">
               <a:buNone/>
             </a:pPr>
             <a:r>
@@ -3546,6 +3477,13 @@
             <a:prstDash val="solid"/>
           </a:ln>
         </p:spPr>
+        <p:txBody>
+          <a:bodyPr/>
+          <a:lstStyle/>
+          <a:p>
+            <a:endParaRPr lang="ja-JP" altLang="en-US"/>
+          </a:p>
+        </p:txBody>
       </p:sp>
       <p:sp>
         <p:nvSpPr>
@@ -3568,7 +3506,7 @@
           <a:bodyPr wrap="square" lIns="0" tIns="0" rIns="0" bIns="0" rtlCol="0" anchor="ctr"/>
           <a:lstStyle/>
           <a:p>
-            <a:pPr algn="ctr" indent="0" marL="0">
+            <a:pPr marL="0" indent="0" algn="ctr">
               <a:buNone/>
             </a:pPr>
             <a:r>
@@ -3585,7 +3523,7 @@
             <a:endParaRPr lang="en-US" sz="900" dirty="0"/>
           </a:p>
           <a:p>
-            <a:pPr algn="ctr" indent="0" marL="0">
+            <a:pPr marL="0" indent="0" algn="ctr">
               <a:buNone/>
             </a:pPr>
             <a:r>
@@ -3602,7 +3540,7 @@
             <a:endParaRPr lang="en-US" sz="900" dirty="0"/>
           </a:p>
           <a:p>
-            <a:pPr algn="ctr" indent="0" marL="0">
+            <a:pPr marL="0" indent="0" algn="ctr">
               <a:buNone/>
             </a:pPr>
             <a:r>
@@ -3614,7 +3552,7 @@
                 <a:ea typeface="Meiryo" pitchFamily="34" charset="-122"/>
                 <a:cs typeface="Meiryo" pitchFamily="34" charset="-120"/>
               </a:rPr>
-              <a:t>（2,000台）</a:t>
+              <a:t>（200台）</a:t>
             </a:r>
             <a:endParaRPr lang="en-US" sz="900" dirty="0"/>
           </a:p>
@@ -3641,7 +3579,7 @@
           <a:bodyPr wrap="square" lIns="0" tIns="0" rIns="0" bIns="0" rtlCol="0" anchor="ctr"/>
           <a:lstStyle/>
           <a:p>
-            <a:pPr indent="0" marL="0">
+            <a:pPr marL="0" indent="0">
               <a:buNone/>
             </a:pPr>
             <a:r>
@@ -3681,6 +3619,13 @@
             <a:prstDash val="solid"/>
           </a:ln>
         </p:spPr>
+        <p:txBody>
+          <a:bodyPr/>
+          <a:lstStyle/>
+          <a:p>
+            <a:endParaRPr lang="ja-JP" altLang="en-US"/>
+          </a:p>
+        </p:txBody>
       </p:sp>
       <p:sp>
         <p:nvSpPr>
@@ -3703,7 +3648,7 @@
           <a:bodyPr wrap="square" lIns="0" tIns="0" rIns="0" bIns="0" rtlCol="0" anchor="ctr"/>
           <a:lstStyle/>
           <a:p>
-            <a:pPr algn="ctr" indent="0" marL="0">
+            <a:pPr marL="0" indent="0" algn="ctr">
               <a:buNone/>
             </a:pPr>
             <a:r>
@@ -3742,7 +3687,7 @@
           <a:bodyPr wrap="square" lIns="0" tIns="0" rIns="0" bIns="0" rtlCol="0" anchor="ctr"/>
           <a:lstStyle/>
           <a:p>
-            <a:pPr algn="ctr" indent="0" marL="0">
+            <a:pPr marL="0" indent="0" algn="ctr">
               <a:buNone/>
             </a:pPr>
             <a:r>
@@ -3782,6 +3727,13 @@
             <a:prstDash val="solid"/>
           </a:ln>
         </p:spPr>
+        <p:txBody>
+          <a:bodyPr/>
+          <a:lstStyle/>
+          <a:p>
+            <a:endParaRPr lang="ja-JP" altLang="en-US"/>
+          </a:p>
+        </p:txBody>
       </p:sp>
       <p:sp>
         <p:nvSpPr>
@@ -3804,7 +3756,7 @@
           <a:bodyPr wrap="square" lIns="0" tIns="0" rIns="0" bIns="0" rtlCol="0" anchor="ctr"/>
           <a:lstStyle/>
           <a:p>
-            <a:pPr algn="ctr" indent="0" marL="0">
+            <a:pPr marL="0" indent="0" algn="ctr">
               <a:buNone/>
             </a:pPr>
             <a:r>
@@ -3840,7 +3792,7 @@
           <a:bodyPr wrap="square" lIns="0" tIns="0" rIns="0" bIns="0" rtlCol="0" anchor="ctr"/>
           <a:lstStyle/>
           <a:p>
-            <a:pPr algn="ctr" indent="0" marL="0">
+            <a:pPr marL="0" indent="0" algn="ctr">
               <a:buNone/>
             </a:pPr>
             <a:r>
@@ -3882,6 +3834,13 @@
             <a:prstDash val="solid"/>
           </a:ln>
         </p:spPr>
+        <p:txBody>
+          <a:bodyPr/>
+          <a:lstStyle/>
+          <a:p>
+            <a:endParaRPr lang="ja-JP" altLang="en-US"/>
+          </a:p>
+        </p:txBody>
       </p:sp>
       <p:sp>
         <p:nvSpPr>
@@ -3904,7 +3863,7 @@
           <a:bodyPr wrap="square" lIns="0" tIns="0" rIns="0" bIns="0" rtlCol="0" anchor="ctr"/>
           <a:lstStyle/>
           <a:p>
-            <a:pPr indent="0" marL="0">
+            <a:pPr marL="0" indent="0">
               <a:buNone/>
             </a:pPr>
             <a:r>
@@ -3946,6 +3905,13 @@
             <a:prstDash val="solid"/>
           </a:ln>
         </p:spPr>
+        <p:txBody>
+          <a:bodyPr/>
+          <a:lstStyle/>
+          <a:p>
+            <a:endParaRPr lang="ja-JP" altLang="en-US"/>
+          </a:p>
+        </p:txBody>
       </p:sp>
       <p:sp>
         <p:nvSpPr>
@@ -3968,7 +3934,7 @@
           <a:bodyPr wrap="square" lIns="0" tIns="0" rIns="0" bIns="0" rtlCol="0" anchor="ctr"/>
           <a:lstStyle/>
           <a:p>
-            <a:pPr algn="ctr" indent="0" marL="0">
+            <a:pPr marL="0" indent="0" algn="ctr">
               <a:buNone/>
             </a:pPr>
             <a:r>
@@ -4010,6 +3976,13 @@
             <a:prstDash val="solid"/>
           </a:ln>
         </p:spPr>
+        <p:txBody>
+          <a:bodyPr/>
+          <a:lstStyle/>
+          <a:p>
+            <a:endParaRPr lang="ja-JP" altLang="en-US"/>
+          </a:p>
+        </p:txBody>
       </p:sp>
       <p:sp>
         <p:nvSpPr>
@@ -4032,7 +4005,7 @@
           <a:bodyPr wrap="square" lIns="0" tIns="0" rIns="0" bIns="0" rtlCol="0" anchor="ctr"/>
           <a:lstStyle/>
           <a:p>
-            <a:pPr algn="ctr" indent="0" marL="0">
+            <a:pPr marL="0" indent="0" algn="ctr">
               <a:buNone/>
             </a:pPr>
             <a:r>
@@ -4049,7 +4022,7 @@
             <a:endParaRPr lang="en-US" sz="800" dirty="0"/>
           </a:p>
           <a:p>
-            <a:pPr algn="ctr" indent="0" marL="0">
+            <a:pPr marL="0" indent="0" algn="ctr">
               <a:buNone/>
             </a:pPr>
             <a:r>
@@ -4091,6 +4064,13 @@
             <a:prstDash val="solid"/>
           </a:ln>
         </p:spPr>
+        <p:txBody>
+          <a:bodyPr/>
+          <a:lstStyle/>
+          <a:p>
+            <a:endParaRPr lang="ja-JP" altLang="en-US"/>
+          </a:p>
+        </p:txBody>
       </p:sp>
       <p:sp>
         <p:nvSpPr>
@@ -4113,7 +4093,7 @@
           <a:bodyPr wrap="square" lIns="0" tIns="0" rIns="0" bIns="0" rtlCol="0" anchor="ctr"/>
           <a:lstStyle/>
           <a:p>
-            <a:pPr algn="ctr" indent="0" marL="0">
+            <a:pPr marL="0" indent="0" algn="ctr">
               <a:buNone/>
             </a:pPr>
             <a:r>
@@ -4130,7 +4110,7 @@
             <a:endParaRPr lang="en-US" sz="800" dirty="0"/>
           </a:p>
           <a:p>
-            <a:pPr algn="ctr" indent="0" marL="0">
+            <a:pPr marL="0" indent="0" algn="ctr">
               <a:buNone/>
             </a:pPr>
             <a:r>
@@ -4147,7 +4127,7 @@
             <a:endParaRPr lang="en-US" sz="800" dirty="0"/>
           </a:p>
           <a:p>
-            <a:pPr algn="ctr" indent="0" marL="0">
+            <a:pPr marL="0" indent="0" algn="ctr">
               <a:buNone/>
             </a:pPr>
             <a:r>
@@ -4164,7 +4144,7 @@
             <a:endParaRPr lang="en-US" sz="800" dirty="0"/>
           </a:p>
           <a:p>
-            <a:pPr algn="ctr" indent="0" marL="0">
+            <a:pPr marL="0" indent="0" algn="ctr">
               <a:buNone/>
             </a:pPr>
             <a:r>
@@ -4181,7 +4161,7 @@
             <a:endParaRPr lang="en-US" sz="800" dirty="0"/>
           </a:p>
           <a:p>
-            <a:pPr algn="ctr" indent="0" marL="0">
+            <a:pPr marL="0" indent="0" algn="ctr">
               <a:buNone/>
             </a:pPr>
             <a:r>
@@ -4198,7 +4178,7 @@
             <a:endParaRPr lang="en-US" sz="800" dirty="0"/>
           </a:p>
           <a:p>
-            <a:pPr algn="ctr" indent="0" marL="0">
+            <a:pPr marL="0" indent="0" algn="ctr">
               <a:buNone/>
             </a:pPr>
             <a:r>
@@ -4240,6 +4220,13 @@
             <a:prstDash val="solid"/>
           </a:ln>
         </p:spPr>
+        <p:txBody>
+          <a:bodyPr/>
+          <a:lstStyle/>
+          <a:p>
+            <a:endParaRPr lang="ja-JP" altLang="en-US"/>
+          </a:p>
+        </p:txBody>
       </p:sp>
       <p:sp>
         <p:nvSpPr>
@@ -4262,7 +4249,7 @@
           <a:bodyPr wrap="square" lIns="0" tIns="0" rIns="0" bIns="0" rtlCol="0" anchor="ctr"/>
           <a:lstStyle/>
           <a:p>
-            <a:pPr algn="ctr" indent="0" marL="0">
+            <a:pPr marL="0" indent="0" algn="ctr">
               <a:buNone/>
             </a:pPr>
             <a:r>
@@ -4279,7 +4266,7 @@
             <a:endParaRPr lang="en-US" sz="800" dirty="0"/>
           </a:p>
           <a:p>
-            <a:pPr algn="ctr" indent="0" marL="0">
+            <a:pPr marL="0" indent="0" algn="ctr">
               <a:buNone/>
             </a:pPr>
             <a:r>
@@ -4296,7 +4283,7 @@
             <a:endParaRPr lang="en-US" sz="800" dirty="0"/>
           </a:p>
           <a:p>
-            <a:pPr algn="ctr" indent="0" marL="0">
+            <a:pPr marL="0" indent="0" algn="ctr">
               <a:buNone/>
             </a:pPr>
             <a:r>
@@ -4313,7 +4300,7 @@
             <a:endParaRPr lang="en-US" sz="800" dirty="0"/>
           </a:p>
           <a:p>
-            <a:pPr algn="ctr" indent="0" marL="0">
+            <a:pPr marL="0" indent="0" algn="ctr">
               <a:buNone/>
             </a:pPr>
             <a:r>
@@ -4355,6 +4342,13 @@
             <a:prstDash val="solid"/>
           </a:ln>
         </p:spPr>
+        <p:txBody>
+          <a:bodyPr/>
+          <a:lstStyle/>
+          <a:p>
+            <a:endParaRPr lang="ja-JP" altLang="en-US"/>
+          </a:p>
+        </p:txBody>
       </p:sp>
       <p:sp>
         <p:nvSpPr>
@@ -4377,7 +4371,7 @@
           <a:bodyPr wrap="square" lIns="0" tIns="0" rIns="0" bIns="0" rtlCol="0" anchor="ctr"/>
           <a:lstStyle/>
           <a:p>
-            <a:pPr algn="ctr" indent="0" marL="0">
+            <a:pPr marL="0" indent="0" algn="ctr">
               <a:buNone/>
             </a:pPr>
             <a:r>
@@ -4394,7 +4388,7 @@
             <a:endParaRPr lang="en-US" sz="800" dirty="0"/>
           </a:p>
           <a:p>
-            <a:pPr algn="ctr" indent="0" marL="0">
+            <a:pPr marL="0" indent="0" algn="ctr">
               <a:buNone/>
             </a:pPr>
             <a:r>
@@ -4433,7 +4427,7 @@
           <a:bodyPr wrap="square" lIns="0" tIns="0" rIns="0" bIns="0" rtlCol="0" anchor="ctr"/>
           <a:lstStyle/>
           <a:p>
-            <a:pPr indent="0" marL="0">
+            <a:pPr marL="0" indent="0">
               <a:buNone/>
             </a:pPr>
             <a:r>
@@ -4450,7 +4444,7 @@
             <a:endParaRPr lang="en-US" sz="900" dirty="0"/>
           </a:p>
           <a:p>
-            <a:pPr indent="0" marL="0">
+            <a:pPr marL="0" indent="0">
               <a:buNone/>
             </a:pPr>
             <a:r>
@@ -4484,6 +4478,7 @@
         <a:solidFill>
           <a:srgbClr val="FFFFFF"/>
         </a:solidFill>
+        <a:effectLst/>
       </p:bgPr>
     </p:bg>
     <p:spTree>
@@ -4502,94 +4497,7 @@
       </p:grpSpPr>
       <p:pic>
         <p:nvPicPr>
-          <p:cNvPr id="2" name="Image 0" descr="/mnt/skills/user/luvina-ppt/assets/decoration_dots.png">    </p:cNvPr>
-          <p:cNvPicPr>
-            <a:picLocks noChangeAspect="1"/>
-          </p:cNvPicPr>
-          <p:nvPr/>
-        </p:nvPicPr>
-        <p:blipFill>
-          <a:blip r:embed="rId1"/>
-          <a:stretch>
-            <a:fillRect/>
-          </a:stretch>
-        </p:blipFill>
-        <p:spPr>
-          <a:xfrm>
-            <a:off x="0" y="0"/>
-            <a:ext cx="3904488" cy="2880360"/>
-          </a:xfrm>
-          <a:prstGeom prst="rect">
-            <a:avLst/>
-          </a:prstGeom>
-        </p:spPr>
-      </p:pic>
-      <p:pic>
-        <p:nvPicPr>
-          <p:cNvPr id="3" name="Image 1" descr="/mnt/skills/user/luvina-ppt/assets/luvina_badge.png">    </p:cNvPr>
-          <p:cNvPicPr>
-            <a:picLocks noChangeAspect="1"/>
-          </p:cNvPicPr>
-          <p:nvPr/>
-        </p:nvPicPr>
-        <p:blipFill>
-          <a:blip r:embed="rId2"/>
-          <a:stretch>
-            <a:fillRect/>
-          </a:stretch>
-        </p:blipFill>
-        <p:spPr>
-          <a:xfrm>
-            <a:off x="109728" y="109728"/>
-            <a:ext cx="1874520" cy="466344"/>
-          </a:xfrm>
-          <a:prstGeom prst="rect">
-            <a:avLst/>
-          </a:prstGeom>
-        </p:spPr>
-      </p:pic>
-      <p:sp>
-        <p:nvSpPr>
-          <p:cNvPr id="4" name="Text 0"/>
-          <p:cNvSpPr/>
-          <p:nvPr/>
-        </p:nvSpPr>
-        <p:spPr>
-          <a:xfrm>
-            <a:off x="438912" y="173736"/>
-            <a:ext cx="1216152" cy="329184"/>
-          </a:xfrm>
-          <a:prstGeom prst="rect">
-            <a:avLst/>
-          </a:prstGeom>
-          <a:noFill/>
-          <a:ln/>
-        </p:spPr>
-        <p:txBody>
-          <a:bodyPr wrap="square" lIns="0" tIns="0" rIns="0" bIns="0" rtlCol="0" anchor="ctr"/>
-          <a:lstStyle/>
-          <a:p>
-            <a:pPr indent="0" marL="0">
-              <a:buNone/>
-            </a:pPr>
-            <a:r>
-              <a:rPr lang="en-US" sz="1600" b="1" dirty="0">
-                <a:solidFill>
-                  <a:srgbClr val="FFFFFF"/>
-                </a:solidFill>
-                <a:latin typeface="Arial Black" pitchFamily="34" charset="0"/>
-                <a:ea typeface="Arial Black" pitchFamily="34" charset="-122"/>
-                <a:cs typeface="Arial Black" pitchFamily="34" charset="-120"/>
-              </a:rPr>
-              <a:t>LUVINA</a:t>
-            </a:r>
-            <a:endParaRPr lang="en-US" sz="1600" dirty="0"/>
-          </a:p>
-        </p:txBody>
-      </p:sp>
-      <p:pic>
-        <p:nvPicPr>
-          <p:cNvPr id="5" name="Image 2" descr="/mnt/skills/user/luvina-ppt/assets/luvina_logo.png">    </p:cNvPr>
+          <p:cNvPr id="2" name="Image 0" descr="/mnt/skills/user/luvina-ppt/assets/decoration_dots.png"/>
           <p:cNvPicPr>
             <a:picLocks noChangeAspect="1"/>
           </p:cNvPicPr>
@@ -4603,6 +4511,93 @@
         </p:blipFill>
         <p:spPr>
           <a:xfrm>
+            <a:off x="0" y="0"/>
+            <a:ext cx="3904488" cy="2880360"/>
+          </a:xfrm>
+          <a:prstGeom prst="rect">
+            <a:avLst/>
+          </a:prstGeom>
+        </p:spPr>
+      </p:pic>
+      <p:pic>
+        <p:nvPicPr>
+          <p:cNvPr id="3" name="Image 1" descr="/mnt/skills/user/luvina-ppt/assets/luvina_badge.png"/>
+          <p:cNvPicPr>
+            <a:picLocks noChangeAspect="1"/>
+          </p:cNvPicPr>
+          <p:nvPr/>
+        </p:nvPicPr>
+        <p:blipFill>
+          <a:blip r:embed="rId4"/>
+          <a:stretch>
+            <a:fillRect/>
+          </a:stretch>
+        </p:blipFill>
+        <p:spPr>
+          <a:xfrm>
+            <a:off x="109728" y="109728"/>
+            <a:ext cx="1874520" cy="466344"/>
+          </a:xfrm>
+          <a:prstGeom prst="rect">
+            <a:avLst/>
+          </a:prstGeom>
+        </p:spPr>
+      </p:pic>
+      <p:sp>
+        <p:nvSpPr>
+          <p:cNvPr id="4" name="Text 0"/>
+          <p:cNvSpPr/>
+          <p:nvPr/>
+        </p:nvSpPr>
+        <p:spPr>
+          <a:xfrm>
+            <a:off x="438912" y="173736"/>
+            <a:ext cx="1216152" cy="329184"/>
+          </a:xfrm>
+          <a:prstGeom prst="rect">
+            <a:avLst/>
+          </a:prstGeom>
+          <a:noFill/>
+          <a:ln/>
+        </p:spPr>
+        <p:txBody>
+          <a:bodyPr wrap="square" lIns="0" tIns="0" rIns="0" bIns="0" rtlCol="0" anchor="ctr"/>
+          <a:lstStyle/>
+          <a:p>
+            <a:pPr marL="0" indent="0">
+              <a:buNone/>
+            </a:pPr>
+            <a:r>
+              <a:rPr lang="en-US" sz="1600" b="1" dirty="0">
+                <a:solidFill>
+                  <a:srgbClr val="FFFFFF"/>
+                </a:solidFill>
+                <a:latin typeface="Arial Black" pitchFamily="34" charset="0"/>
+                <a:ea typeface="Arial Black" pitchFamily="34" charset="-122"/>
+                <a:cs typeface="Arial Black" pitchFamily="34" charset="-120"/>
+              </a:rPr>
+              <a:t>LUVINA</a:t>
+            </a:r>
+            <a:endParaRPr lang="en-US" sz="1600" dirty="0"/>
+          </a:p>
+        </p:txBody>
+      </p:sp>
+      <p:pic>
+        <p:nvPicPr>
+          <p:cNvPr id="5" name="Image 2" descr="/mnt/skills/user/luvina-ppt/assets/luvina_logo.png"/>
+          <p:cNvPicPr>
+            <a:picLocks noChangeAspect="1"/>
+          </p:cNvPicPr>
+          <p:nvPr/>
+        </p:nvPicPr>
+        <p:blipFill>
+          <a:blip r:embed="rId5"/>
+          <a:stretch>
+            <a:fillRect/>
+          </a:stretch>
+        </p:blipFill>
+        <p:spPr>
+          <a:xfrm>
             <a:off x="8924544" y="109728"/>
             <a:ext cx="932688" cy="466344"/>
           </a:xfrm>
@@ -4630,6 +4625,13 @@
           </a:solidFill>
           <a:ln/>
         </p:spPr>
+        <p:txBody>
+          <a:bodyPr/>
+          <a:lstStyle/>
+          <a:p>
+            <a:endParaRPr lang="ja-JP" altLang="en-US"/>
+          </a:p>
+        </p:txBody>
       </p:sp>
       <p:sp>
         <p:nvSpPr>
@@ -4652,7 +4654,7 @@
           <a:bodyPr wrap="square" lIns="0" tIns="0" rIns="0" bIns="0" rtlCol="0" anchor="ctr"/>
           <a:lstStyle/>
           <a:p>
-            <a:pPr indent="0" marL="0">
+            <a:pPr marL="0" indent="0">
               <a:buNone/>
             </a:pPr>
             <a:r>
@@ -4691,7 +4693,7 @@
           <a:bodyPr wrap="square" lIns="0" tIns="0" rIns="0" bIns="0" rtlCol="0" anchor="ctr"/>
           <a:lstStyle/>
           <a:p>
-            <a:pPr indent="0" marL="0">
+            <a:pPr marL="0" indent="0">
               <a:buNone/>
             </a:pPr>
             <a:r>
@@ -4728,6 +4730,13 @@
           </a:solidFill>
           <a:ln/>
         </p:spPr>
+        <p:txBody>
+          <a:bodyPr/>
+          <a:lstStyle/>
+          <a:p>
+            <a:endParaRPr lang="ja-JP" altLang="en-US"/>
+          </a:p>
+        </p:txBody>
       </p:sp>
       <p:sp>
         <p:nvSpPr>
@@ -4750,7 +4759,7 @@
           <a:bodyPr wrap="square" lIns="0" tIns="0" rIns="0" bIns="0" rtlCol="0" anchor="ctr"/>
           <a:lstStyle/>
           <a:p>
-            <a:pPr indent="0" marL="0">
+            <a:pPr marL="0" indent="0">
               <a:buNone/>
             </a:pPr>
             <a:r>
@@ -4789,6 +4798,13 @@
             <a:prstDash val="solid"/>
           </a:ln>
         </p:spPr>
+        <p:txBody>
+          <a:bodyPr/>
+          <a:lstStyle/>
+          <a:p>
+            <a:endParaRPr lang="ja-JP" altLang="en-US"/>
+          </a:p>
+        </p:txBody>
       </p:sp>
       <p:sp>
         <p:nvSpPr>
@@ -4811,7 +4827,7 @@
           <a:bodyPr wrap="square" lIns="0" tIns="0" rIns="0" bIns="0" rtlCol="0" anchor="ctr"/>
           <a:lstStyle/>
           <a:p>
-            <a:pPr indent="0" marL="0">
+            <a:pPr marL="0" indent="0">
               <a:buNone/>
             </a:pPr>
             <a:r>
@@ -4853,6 +4869,13 @@
             <a:prstDash val="solid"/>
           </a:ln>
         </p:spPr>
+        <p:txBody>
+          <a:bodyPr/>
+          <a:lstStyle/>
+          <a:p>
+            <a:endParaRPr lang="ja-JP" altLang="en-US"/>
+          </a:p>
+        </p:txBody>
       </p:sp>
       <p:sp>
         <p:nvSpPr>
@@ -4875,7 +4898,7 @@
           <a:bodyPr wrap="square" lIns="0" tIns="0" rIns="0" bIns="0" rtlCol="0" anchor="ctr"/>
           <a:lstStyle/>
           <a:p>
-            <a:pPr algn="ctr" indent="0" marL="0">
+            <a:pPr marL="0" indent="0" algn="ctr">
               <a:buNone/>
             </a:pPr>
             <a:r>
@@ -4917,6 +4940,13 @@
             <a:prstDash val="solid"/>
           </a:ln>
         </p:spPr>
+        <p:txBody>
+          <a:bodyPr/>
+          <a:lstStyle/>
+          <a:p>
+            <a:endParaRPr lang="ja-JP" altLang="en-US"/>
+          </a:p>
+        </p:txBody>
       </p:sp>
       <p:sp>
         <p:nvSpPr>
@@ -4939,7 +4969,7 @@
           <a:bodyPr wrap="square" lIns="0" tIns="0" rIns="0" bIns="0" rtlCol="0" anchor="ctr"/>
           <a:lstStyle/>
           <a:p>
-            <a:pPr algn="ctr" indent="0" marL="0">
+            <a:pPr marL="0" indent="0" algn="ctr">
               <a:buNone/>
             </a:pPr>
             <a:r>
@@ -4956,7 +4986,7 @@
             <a:endParaRPr lang="en-US" sz="800" dirty="0"/>
           </a:p>
           <a:p>
-            <a:pPr algn="ctr" indent="0" marL="0">
+            <a:pPr marL="0" indent="0" algn="ctr">
               <a:buNone/>
             </a:pPr>
             <a:r>
@@ -4998,6 +5028,13 @@
             <a:prstDash val="solid"/>
           </a:ln>
         </p:spPr>
+        <p:txBody>
+          <a:bodyPr/>
+          <a:lstStyle/>
+          <a:p>
+            <a:endParaRPr lang="ja-JP" altLang="en-US"/>
+          </a:p>
+        </p:txBody>
       </p:sp>
       <p:sp>
         <p:nvSpPr>
@@ -5020,7 +5057,7 @@
           <a:bodyPr wrap="square" lIns="0" tIns="0" rIns="0" bIns="0" rtlCol="0" anchor="ctr"/>
           <a:lstStyle/>
           <a:p>
-            <a:pPr algn="ctr" indent="0" marL="0">
+            <a:pPr marL="0" indent="0" algn="ctr">
               <a:buNone/>
             </a:pPr>
             <a:r>
@@ -5062,6 +5099,13 @@
             <a:prstDash val="solid"/>
           </a:ln>
         </p:spPr>
+        <p:txBody>
+          <a:bodyPr/>
+          <a:lstStyle/>
+          <a:p>
+            <a:endParaRPr lang="ja-JP" altLang="en-US"/>
+          </a:p>
+        </p:txBody>
       </p:sp>
       <p:sp>
         <p:nvSpPr>
@@ -5084,7 +5128,7 @@
           <a:bodyPr wrap="square" lIns="0" tIns="0" rIns="0" bIns="0" rtlCol="0" anchor="ctr"/>
           <a:lstStyle/>
           <a:p>
-            <a:pPr algn="ctr" indent="0" marL="0">
+            <a:pPr marL="0" indent="0" algn="ctr">
               <a:buNone/>
             </a:pPr>
             <a:r>
@@ -5101,7 +5145,7 @@
             <a:endParaRPr lang="en-US" sz="800" dirty="0"/>
           </a:p>
           <a:p>
-            <a:pPr algn="ctr" indent="0" marL="0">
+            <a:pPr marL="0" indent="0" algn="ctr">
               <a:buNone/>
             </a:pPr>
             <a:r>
@@ -5143,6 +5187,13 @@
             <a:prstDash val="solid"/>
           </a:ln>
         </p:spPr>
+        <p:txBody>
+          <a:bodyPr/>
+          <a:lstStyle/>
+          <a:p>
+            <a:endParaRPr lang="ja-JP" altLang="en-US"/>
+          </a:p>
+        </p:txBody>
       </p:sp>
       <p:sp>
         <p:nvSpPr>
@@ -5165,7 +5216,7 @@
           <a:bodyPr wrap="square" lIns="0" tIns="0" rIns="0" bIns="0" rtlCol="0" anchor="ctr"/>
           <a:lstStyle/>
           <a:p>
-            <a:pPr algn="ctr" indent="0" marL="0">
+            <a:pPr marL="0" indent="0" algn="ctr">
               <a:buNone/>
             </a:pPr>
             <a:r>
@@ -5207,6 +5258,13 @@
             <a:prstDash val="solid"/>
           </a:ln>
         </p:spPr>
+        <p:txBody>
+          <a:bodyPr/>
+          <a:lstStyle/>
+          <a:p>
+            <a:endParaRPr lang="ja-JP" altLang="en-US"/>
+          </a:p>
+        </p:txBody>
       </p:sp>
       <p:sp>
         <p:nvSpPr>
@@ -5229,7 +5287,7 @@
           <a:bodyPr wrap="square" lIns="0" tIns="0" rIns="0" bIns="0" rtlCol="0" anchor="ctr"/>
           <a:lstStyle/>
           <a:p>
-            <a:pPr algn="ctr" indent="0" marL="0">
+            <a:pPr marL="0" indent="0" algn="ctr">
               <a:buNone/>
             </a:pPr>
             <a:r>
@@ -5246,7 +5304,7 @@
             <a:endParaRPr lang="en-US" sz="800" dirty="0"/>
           </a:p>
           <a:p>
-            <a:pPr algn="ctr" indent="0" marL="0">
+            <a:pPr marL="0" indent="0" algn="ctr">
               <a:buNone/>
             </a:pPr>
             <a:r>
@@ -5288,6 +5346,13 @@
             <a:prstDash val="solid"/>
           </a:ln>
         </p:spPr>
+        <p:txBody>
+          <a:bodyPr/>
+          <a:lstStyle/>
+          <a:p>
+            <a:endParaRPr lang="ja-JP" altLang="en-US"/>
+          </a:p>
+        </p:txBody>
       </p:sp>
       <p:sp>
         <p:nvSpPr>
@@ -5310,7 +5375,7 @@
           <a:bodyPr wrap="square" lIns="0" tIns="0" rIns="0" bIns="0" rtlCol="0" anchor="ctr"/>
           <a:lstStyle/>
           <a:p>
-            <a:pPr algn="ctr" indent="0" marL="0">
+            <a:pPr marL="0" indent="0" algn="ctr">
               <a:buNone/>
             </a:pPr>
             <a:r>
@@ -5349,7 +5414,7 @@
           <a:bodyPr wrap="square" lIns="0" tIns="0" rIns="0" bIns="0" rtlCol="0" anchor="ctr"/>
           <a:lstStyle/>
           <a:p>
-            <a:pPr algn="ctr" indent="0" marL="0">
+            <a:pPr marL="0" indent="0" algn="ctr">
               <a:buNone/>
             </a:pPr>
             <a:r>
@@ -5388,7 +5453,7 @@
           <a:bodyPr wrap="square" lIns="0" tIns="0" rIns="0" bIns="0" rtlCol="0" anchor="ctr"/>
           <a:lstStyle/>
           <a:p>
-            <a:pPr algn="ctr" indent="0" marL="0">
+            <a:pPr marL="0" indent="0" algn="ctr">
               <a:buNone/>
             </a:pPr>
             <a:r>
@@ -5424,7 +5489,7 @@
           <a:bodyPr wrap="square" lIns="0" tIns="0" rIns="0" bIns="0" rtlCol="0" anchor="ctr"/>
           <a:lstStyle/>
           <a:p>
-            <a:pPr algn="ctr" indent="0" marL="0">
+            <a:pPr marL="0" indent="0" algn="ctr">
               <a:buNone/>
             </a:pPr>
             <a:r>
@@ -5466,6 +5531,13 @@
             <a:prstDash val="solid"/>
           </a:ln>
         </p:spPr>
+        <p:txBody>
+          <a:bodyPr/>
+          <a:lstStyle/>
+          <a:p>
+            <a:endParaRPr lang="ja-JP" altLang="en-US"/>
+          </a:p>
+        </p:txBody>
       </p:sp>
       <p:sp>
         <p:nvSpPr>
@@ -5488,7 +5560,7 @@
           <a:bodyPr wrap="square" lIns="0" tIns="0" rIns="0" bIns="0" rtlCol="0" anchor="ctr"/>
           <a:lstStyle/>
           <a:p>
-            <a:pPr indent="0" marL="0">
+            <a:pPr marL="0" indent="0">
               <a:buNone/>
             </a:pPr>
             <a:r>
@@ -5530,6 +5602,13 @@
             <a:prstDash val="solid"/>
           </a:ln>
         </p:spPr>
+        <p:txBody>
+          <a:bodyPr/>
+          <a:lstStyle/>
+          <a:p>
+            <a:endParaRPr lang="ja-JP" altLang="en-US"/>
+          </a:p>
+        </p:txBody>
       </p:sp>
       <p:sp>
         <p:nvSpPr>
@@ -5552,7 +5631,7 @@
           <a:bodyPr wrap="square" lIns="0" tIns="0" rIns="0" bIns="0" rtlCol="0" anchor="ctr"/>
           <a:lstStyle/>
           <a:p>
-            <a:pPr algn="ctr" indent="0" marL="0">
+            <a:pPr marL="0" indent="0" algn="ctr">
               <a:buNone/>
             </a:pPr>
             <a:r>
@@ -5594,6 +5673,13 @@
             <a:prstDash val="solid"/>
           </a:ln>
         </p:spPr>
+        <p:txBody>
+          <a:bodyPr/>
+          <a:lstStyle/>
+          <a:p>
+            <a:endParaRPr lang="ja-JP" altLang="en-US"/>
+          </a:p>
+        </p:txBody>
       </p:sp>
       <p:sp>
         <p:nvSpPr>
@@ -5616,7 +5702,7 @@
           <a:bodyPr wrap="square" lIns="0" tIns="0" rIns="0" bIns="0" rtlCol="0" anchor="ctr"/>
           <a:lstStyle/>
           <a:p>
-            <a:pPr algn="ctr" indent="0" marL="0">
+            <a:pPr marL="0" indent="0" algn="ctr">
               <a:buNone/>
             </a:pPr>
             <a:r>
@@ -5633,7 +5719,7 @@
             <a:endParaRPr lang="en-US" sz="900" dirty="0"/>
           </a:p>
           <a:p>
-            <a:pPr algn="ctr" indent="0" marL="0">
+            <a:pPr marL="0" indent="0" algn="ctr">
               <a:buNone/>
             </a:pPr>
             <a:r>
@@ -5650,7 +5736,7 @@
             <a:endParaRPr lang="en-US" sz="900" dirty="0"/>
           </a:p>
           <a:p>
-            <a:pPr algn="ctr" indent="0" marL="0">
+            <a:pPr marL="0" indent="0" algn="ctr">
               <a:buNone/>
             </a:pPr>
             <a:r>
@@ -5692,6 +5778,13 @@
             <a:prstDash val="solid"/>
           </a:ln>
         </p:spPr>
+        <p:txBody>
+          <a:bodyPr/>
+          <a:lstStyle/>
+          <a:p>
+            <a:endParaRPr lang="ja-JP" altLang="en-US"/>
+          </a:p>
+        </p:txBody>
       </p:sp>
       <p:sp>
         <p:nvSpPr>
@@ -5714,7 +5807,7 @@
           <a:bodyPr wrap="square" lIns="0" tIns="0" rIns="0" bIns="0" rtlCol="0" anchor="ctr"/>
           <a:lstStyle/>
           <a:p>
-            <a:pPr algn="ctr" indent="0" marL="0">
+            <a:pPr marL="0" indent="0" algn="ctr">
               <a:buNone/>
             </a:pPr>
             <a:r>
@@ -5731,7 +5824,7 @@
             <a:endParaRPr lang="en-US" sz="800" dirty="0"/>
           </a:p>
           <a:p>
-            <a:pPr algn="ctr" indent="0" marL="0">
+            <a:pPr marL="0" indent="0" algn="ctr">
               <a:buNone/>
             </a:pPr>
             <a:r>
@@ -5773,6 +5866,13 @@
             <a:prstDash val="solid"/>
           </a:ln>
         </p:spPr>
+        <p:txBody>
+          <a:bodyPr/>
+          <a:lstStyle/>
+          <a:p>
+            <a:endParaRPr lang="ja-JP" altLang="en-US"/>
+          </a:p>
+        </p:txBody>
       </p:sp>
       <p:sp>
         <p:nvSpPr>
@@ -5795,7 +5895,7 @@
           <a:bodyPr wrap="square" lIns="0" tIns="0" rIns="0" bIns="0" rtlCol="0" anchor="ctr"/>
           <a:lstStyle/>
           <a:p>
-            <a:pPr algn="ctr" indent="0" marL="0">
+            <a:pPr marL="0" indent="0" algn="ctr">
               <a:buNone/>
             </a:pPr>
             <a:r>
@@ -5812,7 +5912,7 @@
             <a:endParaRPr lang="en-US" sz="800" dirty="0"/>
           </a:p>
           <a:p>
-            <a:pPr algn="ctr" indent="0" marL="0">
+            <a:pPr marL="0" indent="0" algn="ctr">
               <a:buNone/>
             </a:pPr>
             <a:r>
@@ -5854,6 +5954,13 @@
             <a:prstDash val="solid"/>
           </a:ln>
         </p:spPr>
+        <p:txBody>
+          <a:bodyPr/>
+          <a:lstStyle/>
+          <a:p>
+            <a:endParaRPr lang="ja-JP" altLang="en-US"/>
+          </a:p>
+        </p:txBody>
       </p:sp>
       <p:sp>
         <p:nvSpPr>
@@ -5876,7 +5983,7 @@
           <a:bodyPr wrap="square" lIns="0" tIns="0" rIns="0" bIns="0" rtlCol="0" anchor="ctr"/>
           <a:lstStyle/>
           <a:p>
-            <a:pPr algn="ctr" indent="0" marL="0">
+            <a:pPr marL="0" indent="0" algn="ctr">
               <a:buNone/>
             </a:pPr>
             <a:r>
@@ -5893,7 +6000,7 @@
             <a:endParaRPr lang="en-US" sz="800" dirty="0"/>
           </a:p>
           <a:p>
-            <a:pPr algn="ctr" indent="0" marL="0">
+            <a:pPr marL="0" indent="0" algn="ctr">
               <a:buNone/>
             </a:pPr>
             <a:r>
@@ -5932,7 +6039,7 @@
           <a:bodyPr wrap="square" lIns="0" tIns="0" rIns="0" bIns="0" rtlCol="0" anchor="ctr"/>
           <a:lstStyle/>
           <a:p>
-            <a:pPr indent="0" marL="0">
+            <a:pPr marL="0" indent="0">
               <a:buNone/>
             </a:pPr>
             <a:r>
@@ -5949,7 +6056,7 @@
             <a:endParaRPr lang="en-US" sz="900" dirty="0"/>
           </a:p>
           <a:p>
-            <a:pPr indent="0" marL="0">
+            <a:pPr marL="0" indent="0">
               <a:buNone/>
             </a:pPr>
             <a:r>
@@ -5983,6 +6090,7 @@
         <a:solidFill>
           <a:srgbClr val="FFFFFF"/>
         </a:solidFill>
+        <a:effectLst/>
       </p:bgPr>
     </p:bg>
     <p:spTree>
@@ -6001,94 +6109,7 @@
       </p:grpSpPr>
       <p:pic>
         <p:nvPicPr>
-          <p:cNvPr id="2" name="Image 0" descr="/mnt/skills/user/luvina-ppt/assets/decoration_dots.png">    </p:cNvPr>
-          <p:cNvPicPr>
-            <a:picLocks noChangeAspect="1"/>
-          </p:cNvPicPr>
-          <p:nvPr/>
-        </p:nvPicPr>
-        <p:blipFill>
-          <a:blip r:embed="rId1"/>
-          <a:stretch>
-            <a:fillRect/>
-          </a:stretch>
-        </p:blipFill>
-        <p:spPr>
-          <a:xfrm>
-            <a:off x="0" y="0"/>
-            <a:ext cx="3904488" cy="2880360"/>
-          </a:xfrm>
-          <a:prstGeom prst="rect">
-            <a:avLst/>
-          </a:prstGeom>
-        </p:spPr>
-      </p:pic>
-      <p:pic>
-        <p:nvPicPr>
-          <p:cNvPr id="3" name="Image 1" descr="/mnt/skills/user/luvina-ppt/assets/luvina_badge.png">    </p:cNvPr>
-          <p:cNvPicPr>
-            <a:picLocks noChangeAspect="1"/>
-          </p:cNvPicPr>
-          <p:nvPr/>
-        </p:nvPicPr>
-        <p:blipFill>
-          <a:blip r:embed="rId2"/>
-          <a:stretch>
-            <a:fillRect/>
-          </a:stretch>
-        </p:blipFill>
-        <p:spPr>
-          <a:xfrm>
-            <a:off x="109728" y="109728"/>
-            <a:ext cx="1874520" cy="466344"/>
-          </a:xfrm>
-          <a:prstGeom prst="rect">
-            <a:avLst/>
-          </a:prstGeom>
-        </p:spPr>
-      </p:pic>
-      <p:sp>
-        <p:nvSpPr>
-          <p:cNvPr id="4" name="Text 0"/>
-          <p:cNvSpPr/>
-          <p:nvPr/>
-        </p:nvSpPr>
-        <p:spPr>
-          <a:xfrm>
-            <a:off x="438912" y="173736"/>
-            <a:ext cx="1216152" cy="329184"/>
-          </a:xfrm>
-          <a:prstGeom prst="rect">
-            <a:avLst/>
-          </a:prstGeom>
-          <a:noFill/>
-          <a:ln/>
-        </p:spPr>
-        <p:txBody>
-          <a:bodyPr wrap="square" lIns="0" tIns="0" rIns="0" bIns="0" rtlCol="0" anchor="ctr"/>
-          <a:lstStyle/>
-          <a:p>
-            <a:pPr indent="0" marL="0">
-              <a:buNone/>
-            </a:pPr>
-            <a:r>
-              <a:rPr lang="en-US" sz="1600" b="1" dirty="0">
-                <a:solidFill>
-                  <a:srgbClr val="FFFFFF"/>
-                </a:solidFill>
-                <a:latin typeface="Arial Black" pitchFamily="34" charset="0"/>
-                <a:ea typeface="Arial Black" pitchFamily="34" charset="-122"/>
-                <a:cs typeface="Arial Black" pitchFamily="34" charset="-120"/>
-              </a:rPr>
-              <a:t>LUVINA</a:t>
-            </a:r>
-            <a:endParaRPr lang="en-US" sz="1600" dirty="0"/>
-          </a:p>
-        </p:txBody>
-      </p:sp>
-      <p:pic>
-        <p:nvPicPr>
-          <p:cNvPr id="5" name="Image 2" descr="/mnt/skills/user/luvina-ppt/assets/luvina_logo.png">    </p:cNvPr>
+          <p:cNvPr id="2" name="Image 0" descr="/mnt/skills/user/luvina-ppt/assets/decoration_dots.png"/>
           <p:cNvPicPr>
             <a:picLocks noChangeAspect="1"/>
           </p:cNvPicPr>
@@ -6102,6 +6123,93 @@
         </p:blipFill>
         <p:spPr>
           <a:xfrm>
+            <a:off x="0" y="0"/>
+            <a:ext cx="3904488" cy="2880360"/>
+          </a:xfrm>
+          <a:prstGeom prst="rect">
+            <a:avLst/>
+          </a:prstGeom>
+        </p:spPr>
+      </p:pic>
+      <p:pic>
+        <p:nvPicPr>
+          <p:cNvPr id="3" name="Image 1" descr="/mnt/skills/user/luvina-ppt/assets/luvina_badge.png"/>
+          <p:cNvPicPr>
+            <a:picLocks noChangeAspect="1"/>
+          </p:cNvPicPr>
+          <p:nvPr/>
+        </p:nvPicPr>
+        <p:blipFill>
+          <a:blip r:embed="rId4"/>
+          <a:stretch>
+            <a:fillRect/>
+          </a:stretch>
+        </p:blipFill>
+        <p:spPr>
+          <a:xfrm>
+            <a:off x="109728" y="109728"/>
+            <a:ext cx="1874520" cy="466344"/>
+          </a:xfrm>
+          <a:prstGeom prst="rect">
+            <a:avLst/>
+          </a:prstGeom>
+        </p:spPr>
+      </p:pic>
+      <p:sp>
+        <p:nvSpPr>
+          <p:cNvPr id="4" name="Text 0"/>
+          <p:cNvSpPr/>
+          <p:nvPr/>
+        </p:nvSpPr>
+        <p:spPr>
+          <a:xfrm>
+            <a:off x="438912" y="173736"/>
+            <a:ext cx="1216152" cy="329184"/>
+          </a:xfrm>
+          <a:prstGeom prst="rect">
+            <a:avLst/>
+          </a:prstGeom>
+          <a:noFill/>
+          <a:ln/>
+        </p:spPr>
+        <p:txBody>
+          <a:bodyPr wrap="square" lIns="0" tIns="0" rIns="0" bIns="0" rtlCol="0" anchor="ctr"/>
+          <a:lstStyle/>
+          <a:p>
+            <a:pPr marL="0" indent="0">
+              <a:buNone/>
+            </a:pPr>
+            <a:r>
+              <a:rPr lang="en-US" sz="1600" b="1" dirty="0">
+                <a:solidFill>
+                  <a:srgbClr val="FFFFFF"/>
+                </a:solidFill>
+                <a:latin typeface="Arial Black" pitchFamily="34" charset="0"/>
+                <a:ea typeface="Arial Black" pitchFamily="34" charset="-122"/>
+                <a:cs typeface="Arial Black" pitchFamily="34" charset="-120"/>
+              </a:rPr>
+              <a:t>LUVINA</a:t>
+            </a:r>
+            <a:endParaRPr lang="en-US" sz="1600" dirty="0"/>
+          </a:p>
+        </p:txBody>
+      </p:sp>
+      <p:pic>
+        <p:nvPicPr>
+          <p:cNvPr id="5" name="Image 2" descr="/mnt/skills/user/luvina-ppt/assets/luvina_logo.png"/>
+          <p:cNvPicPr>
+            <a:picLocks noChangeAspect="1"/>
+          </p:cNvPicPr>
+          <p:nvPr/>
+        </p:nvPicPr>
+        <p:blipFill>
+          <a:blip r:embed="rId5"/>
+          <a:stretch>
+            <a:fillRect/>
+          </a:stretch>
+        </p:blipFill>
+        <p:spPr>
+          <a:xfrm>
             <a:off x="8924544" y="109728"/>
             <a:ext cx="932688" cy="466344"/>
           </a:xfrm>
@@ -6129,6 +6237,13 @@
           </a:solidFill>
           <a:ln/>
         </p:spPr>
+        <p:txBody>
+          <a:bodyPr/>
+          <a:lstStyle/>
+          <a:p>
+            <a:endParaRPr lang="ja-JP" altLang="en-US"/>
+          </a:p>
+        </p:txBody>
       </p:sp>
       <p:sp>
         <p:nvSpPr>
@@ -6151,7 +6266,7 @@
           <a:bodyPr wrap="square" lIns="0" tIns="0" rIns="0" bIns="0" rtlCol="0" anchor="ctr"/>
           <a:lstStyle/>
           <a:p>
-            <a:pPr indent="0" marL="0">
+            <a:pPr marL="0" indent="0">
               <a:buNone/>
             </a:pPr>
             <a:r>
@@ -6190,7 +6305,7 @@
           <a:bodyPr wrap="square" lIns="0" tIns="0" rIns="0" bIns="0" rtlCol="0" anchor="ctr"/>
           <a:lstStyle/>
           <a:p>
-            <a:pPr indent="0" marL="0">
+            <a:pPr marL="0" indent="0">
               <a:buNone/>
             </a:pPr>
             <a:r>
@@ -6227,6 +6342,13 @@
           </a:solidFill>
           <a:ln/>
         </p:spPr>
+        <p:txBody>
+          <a:bodyPr/>
+          <a:lstStyle/>
+          <a:p>
+            <a:endParaRPr lang="ja-JP" altLang="en-US"/>
+          </a:p>
+        </p:txBody>
       </p:sp>
       <p:sp>
         <p:nvSpPr>
@@ -6249,7 +6371,7 @@
           <a:bodyPr wrap="square" lIns="0" tIns="0" rIns="0" bIns="0" rtlCol="0" anchor="ctr"/>
           <a:lstStyle/>
           <a:p>
-            <a:pPr indent="0" marL="0">
+            <a:pPr marL="0" indent="0">
               <a:buNone/>
             </a:pPr>
             <a:r>
@@ -6288,13 +6410,20 @@
             <a:prstDash val="solid"/>
           </a:ln>
           <a:effectLst>
-            <a:outerShdw sx="100000" sy="100000" kx="0" ky="0" algn="bl" rotWithShape="0" blurRad="50800" dist="25400" dir="8100000">
+            <a:outerShdw blurRad="50800" dist="25400" dir="8100000" algn="bl" rotWithShape="0">
               <a:srgbClr val="000000">
                 <a:alpha val="10000"/>
               </a:srgbClr>
             </a:outerShdw>
           </a:effectLst>
         </p:spPr>
+        <p:txBody>
+          <a:bodyPr/>
+          <a:lstStyle/>
+          <a:p>
+            <a:endParaRPr lang="ja-JP" altLang="en-US"/>
+          </a:p>
+        </p:txBody>
       </p:sp>
       <p:sp>
         <p:nvSpPr>
@@ -6315,6 +6444,13 @@
           </a:solidFill>
           <a:ln/>
         </p:spPr>
+        <p:txBody>
+          <a:bodyPr/>
+          <a:lstStyle/>
+          <a:p>
+            <a:endParaRPr lang="ja-JP" altLang="en-US"/>
+          </a:p>
+        </p:txBody>
       </p:sp>
       <p:sp>
         <p:nvSpPr>
@@ -6337,7 +6473,7 @@
           <a:bodyPr wrap="square" lIns="0" tIns="0" rIns="0" bIns="0" rtlCol="0" anchor="ctr"/>
           <a:lstStyle/>
           <a:p>
-            <a:pPr algn="ctr" indent="0" marL="0">
+            <a:pPr marL="0" indent="0" algn="ctr">
               <a:buNone/>
             </a:pPr>
             <a:r>
@@ -6376,7 +6512,7 @@
           <a:bodyPr wrap="square" lIns="0" tIns="0" rIns="0" bIns="0" rtlCol="0" anchor="ctr"/>
           <a:lstStyle/>
           <a:p>
-            <a:pPr indent="0" marL="0">
+            <a:pPr marL="0" indent="0">
               <a:buNone/>
             </a:pPr>
             <a:r>
@@ -6416,6 +6552,13 @@
             <a:prstDash val="solid"/>
           </a:ln>
         </p:spPr>
+        <p:txBody>
+          <a:bodyPr/>
+          <a:lstStyle/>
+          <a:p>
+            <a:endParaRPr lang="ja-JP" altLang="en-US"/>
+          </a:p>
+        </p:txBody>
       </p:sp>
       <p:sp>
         <p:nvSpPr>
@@ -6438,7 +6581,7 @@
           <a:bodyPr wrap="square" lIns="0" tIns="0" rIns="0" bIns="0" rtlCol="0" anchor="ctr"/>
           <a:lstStyle/>
           <a:p>
-            <a:pPr indent="0" marL="0">
+            <a:pPr marL="0" indent="0">
               <a:buNone/>
             </a:pPr>
             <a:r>
@@ -6477,7 +6620,7 @@
           <a:bodyPr wrap="square" lIns="0" tIns="0" rIns="0" bIns="0" rtlCol="0" anchor="t"/>
           <a:lstStyle/>
           <a:p>
-            <a:pPr indent="0" marL="0">
+            <a:pPr marL="0" indent="0">
               <a:buNone/>
             </a:pPr>
             <a:r>
@@ -6516,7 +6659,7 @@
           <a:bodyPr wrap="square" lIns="0" tIns="0" rIns="0" bIns="0" rtlCol="0" anchor="t"/>
           <a:lstStyle/>
           <a:p>
-            <a:pPr indent="0" marL="0">
+            <a:pPr marL="0" indent="0">
               <a:buNone/>
             </a:pPr>
             <a:r>
@@ -6555,7 +6698,7 @@
           <a:bodyPr wrap="square" lIns="0" tIns="0" rIns="0" bIns="0" rtlCol="0" anchor="ctr"/>
           <a:lstStyle/>
           <a:p>
-            <a:pPr indent="0" marL="0">
+            <a:pPr marL="0" indent="0">
               <a:buNone/>
             </a:pPr>
             <a:r>
@@ -6594,7 +6737,7 @@
           <a:bodyPr wrap="square" lIns="0" tIns="0" rIns="0" bIns="0" rtlCol="0" anchor="t"/>
           <a:lstStyle/>
           <a:p>
-            <a:pPr indent="0" marL="0">
+            <a:pPr marL="0" indent="0">
               <a:buNone/>
             </a:pPr>
             <a:r>
@@ -6606,38 +6749,10 @@
                 <a:ea typeface="Meiryo" pitchFamily="34" charset="-122"/>
                 <a:cs typeface="Meiryo" pitchFamily="34" charset="-120"/>
               </a:rPr>
-              <a:t>⚠️  BIPROGY様の作業工数分コストが発生</a:t>
-            </a:r>
-            <a:endParaRPr lang="en-US" sz="1000" dirty="0"/>
-          </a:p>
-        </p:txBody>
-      </p:sp>
-      <p:sp>
-        <p:nvSpPr>
-          <p:cNvPr id="21" name="Text 16"/>
-          <p:cNvSpPr/>
-          <p:nvPr/>
-        </p:nvSpPr>
-        <p:spPr>
-          <a:xfrm>
-            <a:off x="548640" y="4206240"/>
-            <a:ext cx="4206240" cy="347472"/>
-          </a:xfrm>
-          <a:prstGeom prst="rect">
-            <a:avLst/>
-          </a:prstGeom>
-          <a:noFill/>
-          <a:ln/>
-        </p:spPr>
-        <p:txBody>
-          <a:bodyPr wrap="square" lIns="0" tIns="0" rIns="0" bIns="0" rtlCol="0" anchor="t"/>
-          <a:lstStyle/>
-          <a:p>
-            <a:pPr indent="0" marL="0">
-              <a:buNone/>
-            </a:pPr>
-            <a:r>
-              <a:rPr lang="en-US" sz="1000" dirty="0">
+              <a:t>⚠️  </a:t>
+            </a:r>
+            <a:r>
+              <a:rPr lang="en-US" sz="1000" dirty="0" err="1">
                 <a:solidFill>
                   <a:srgbClr val="333333"/>
                 </a:solidFill>
@@ -6645,6 +6760,67 @@
                 <a:ea typeface="Meiryo" pitchFamily="34" charset="-122"/>
                 <a:cs typeface="Meiryo" pitchFamily="34" charset="-120"/>
               </a:rPr>
+              <a:t>BIPROGY様</a:t>
+            </a:r>
+            <a:r>
+              <a:rPr lang="ja-JP" altLang="en-US" sz="1000" dirty="0">
+                <a:solidFill>
+                  <a:srgbClr val="333333"/>
+                </a:solidFill>
+                <a:latin typeface="Meiryo" pitchFamily="34" charset="0"/>
+                <a:ea typeface="Meiryo" pitchFamily="34" charset="-122"/>
+                <a:cs typeface="Meiryo" pitchFamily="34" charset="-120"/>
+              </a:rPr>
+              <a:t>・アイネス様</a:t>
+            </a:r>
+            <a:r>
+              <a:rPr lang="en-US" sz="1000" dirty="0" err="1">
+                <a:solidFill>
+                  <a:srgbClr val="333333"/>
+                </a:solidFill>
+                <a:latin typeface="Meiryo" pitchFamily="34" charset="0"/>
+                <a:ea typeface="Meiryo" pitchFamily="34" charset="-122"/>
+                <a:cs typeface="Meiryo" pitchFamily="34" charset="-120"/>
+              </a:rPr>
+              <a:t>の作業工数分コストが発生</a:t>
+            </a:r>
+            <a:endParaRPr lang="en-US" sz="1000" dirty="0"/>
+          </a:p>
+        </p:txBody>
+      </p:sp>
+      <p:sp>
+        <p:nvSpPr>
+          <p:cNvPr id="21" name="Text 16"/>
+          <p:cNvSpPr/>
+          <p:nvPr/>
+        </p:nvSpPr>
+        <p:spPr>
+          <a:xfrm>
+            <a:off x="548640" y="4206240"/>
+            <a:ext cx="4206240" cy="347472"/>
+          </a:xfrm>
+          <a:prstGeom prst="rect">
+            <a:avLst/>
+          </a:prstGeom>
+          <a:noFill/>
+          <a:ln/>
+        </p:spPr>
+        <p:txBody>
+          <a:bodyPr wrap="square" lIns="0" tIns="0" rIns="0" bIns="0" rtlCol="0" anchor="t"/>
+          <a:lstStyle/>
+          <a:p>
+            <a:pPr marL="0" indent="0">
+              <a:buNone/>
+            </a:pPr>
+            <a:r>
+              <a:rPr lang="en-US" sz="1000" dirty="0">
+                <a:solidFill>
+                  <a:srgbClr val="333333"/>
+                </a:solidFill>
+                <a:latin typeface="Meiryo" pitchFamily="34" charset="0"/>
+                <a:ea typeface="Meiryo" pitchFamily="34" charset="-122"/>
+                <a:cs typeface="Meiryo" pitchFamily="34" charset="-120"/>
+              </a:rPr>
               <a:t>⚠️  修正・追加のたびにBIPROGY様への依頼が必要</a:t>
             </a:r>
             <a:endParaRPr lang="en-US" sz="1000" dirty="0"/>
@@ -6672,7 +6848,7 @@
           <a:bodyPr wrap="square" lIns="0" tIns="0" rIns="0" bIns="0" rtlCol="0" anchor="t"/>
           <a:lstStyle/>
           <a:p>
-            <a:pPr indent="0" marL="0">
+            <a:pPr marL="0" indent="0">
               <a:buNone/>
             </a:pPr>
             <a:r>
@@ -6714,13 +6890,20 @@
             <a:prstDash val="solid"/>
           </a:ln>
           <a:effectLst>
-            <a:outerShdw sx="100000" sy="100000" kx="0" ky="0" algn="bl" rotWithShape="0" blurRad="50800" dist="25400" dir="8100000">
+            <a:outerShdw blurRad="50800" dist="25400" dir="8100000" algn="bl" rotWithShape="0">
               <a:srgbClr val="000000">
                 <a:alpha val="10000"/>
               </a:srgbClr>
             </a:outerShdw>
           </a:effectLst>
         </p:spPr>
+        <p:txBody>
+          <a:bodyPr/>
+          <a:lstStyle/>
+          <a:p>
+            <a:endParaRPr lang="ja-JP" altLang="en-US"/>
+          </a:p>
+        </p:txBody>
       </p:sp>
       <p:sp>
         <p:nvSpPr>
@@ -6741,6 +6924,13 @@
           </a:solidFill>
           <a:ln/>
         </p:spPr>
+        <p:txBody>
+          <a:bodyPr/>
+          <a:lstStyle/>
+          <a:p>
+            <a:endParaRPr lang="ja-JP" altLang="en-US"/>
+          </a:p>
+        </p:txBody>
       </p:sp>
       <p:sp>
         <p:nvSpPr>
@@ -6763,7 +6953,7 @@
           <a:bodyPr wrap="square" lIns="0" tIns="0" rIns="0" bIns="0" rtlCol="0" anchor="ctr"/>
           <a:lstStyle/>
           <a:p>
-            <a:pPr algn="ctr" indent="0" marL="0">
+            <a:pPr marL="0" indent="0" algn="ctr">
               <a:buNone/>
             </a:pPr>
             <a:r>
@@ -6800,6 +6990,13 @@
           </a:solidFill>
           <a:ln/>
         </p:spPr>
+        <p:txBody>
+          <a:bodyPr/>
+          <a:lstStyle/>
+          <a:p>
+            <a:endParaRPr lang="ja-JP" altLang="en-US"/>
+          </a:p>
+        </p:txBody>
       </p:sp>
       <p:sp>
         <p:nvSpPr>
@@ -6822,7 +7019,7 @@
           <a:bodyPr wrap="square" lIns="0" tIns="0" rIns="0" bIns="0" rtlCol="0" anchor="ctr"/>
           <a:lstStyle/>
           <a:p>
-            <a:pPr algn="ctr" indent="0" marL="0">
+            <a:pPr marL="0" indent="0" algn="ctr">
               <a:buNone/>
             </a:pPr>
             <a:r>
@@ -6861,7 +7058,7 @@
           <a:bodyPr wrap="square" lIns="0" tIns="0" rIns="0" bIns="0" rtlCol="0" anchor="ctr"/>
           <a:lstStyle/>
           <a:p>
-            <a:pPr indent="0" marL="0">
+            <a:pPr marL="0" indent="0">
               <a:buNone/>
             </a:pPr>
             <a:r>
@@ -6901,6 +7098,13 @@
             <a:prstDash val="solid"/>
           </a:ln>
         </p:spPr>
+        <p:txBody>
+          <a:bodyPr/>
+          <a:lstStyle/>
+          <a:p>
+            <a:endParaRPr lang="ja-JP" altLang="en-US"/>
+          </a:p>
+        </p:txBody>
       </p:sp>
       <p:sp>
         <p:nvSpPr>
@@ -6923,7 +7127,7 @@
           <a:bodyPr wrap="square" lIns="0" tIns="0" rIns="0" bIns="0" rtlCol="0" anchor="ctr"/>
           <a:lstStyle/>
           <a:p>
-            <a:pPr indent="0" marL="0">
+            <a:pPr marL="0" indent="0">
               <a:buNone/>
             </a:pPr>
             <a:r>
@@ -6962,7 +7166,7 @@
           <a:bodyPr wrap="square" lIns="0" tIns="0" rIns="0" bIns="0" rtlCol="0" anchor="t"/>
           <a:lstStyle/>
           <a:p>
-            <a:pPr indent="0" marL="0">
+            <a:pPr marL="0" indent="0">
               <a:buNone/>
             </a:pPr>
             <a:r>
@@ -6974,38 +7178,10 @@
                 <a:ea typeface="Meiryo" pitchFamily="34" charset="-122"/>
                 <a:cs typeface="Meiryo" pitchFamily="34" charset="-120"/>
               </a:rPr>
-              <a:t>✅  BIPROGY様の作業コストを最小化</a:t>
-            </a:r>
-            <a:endParaRPr lang="en-US" sz="1000" dirty="0"/>
-          </a:p>
-        </p:txBody>
-      </p:sp>
-      <p:sp>
-        <p:nvSpPr>
-          <p:cNvPr id="32" name="Text 27"/>
-          <p:cNvSpPr/>
-          <p:nvPr/>
-        </p:nvSpPr>
-        <p:spPr>
-          <a:xfrm>
-            <a:off x="5303520" y="3017520"/>
-            <a:ext cx="4206240" cy="347472"/>
-          </a:xfrm>
-          <a:prstGeom prst="rect">
-            <a:avLst/>
-          </a:prstGeom>
-          <a:noFill/>
-          <a:ln/>
-        </p:spPr>
-        <p:txBody>
-          <a:bodyPr wrap="square" lIns="0" tIns="0" rIns="0" bIns="0" rtlCol="0" anchor="t"/>
-          <a:lstStyle/>
-          <a:p>
-            <a:pPr indent="0" marL="0">
-              <a:buNone/>
-            </a:pPr>
-            <a:r>
-              <a:rPr lang="en-US" sz="1000" dirty="0">
+              <a:t>✅  </a:t>
+            </a:r>
+            <a:r>
+              <a:rPr lang="en-US" sz="1000" dirty="0" err="1">
                 <a:solidFill>
                   <a:srgbClr val="333333"/>
                 </a:solidFill>
@@ -7013,38 +7189,10 @@
                 <a:ea typeface="Meiryo" pitchFamily="34" charset="-122"/>
                 <a:cs typeface="Meiryo" pitchFamily="34" charset="-120"/>
               </a:rPr>
-              <a:t>✅  修正・追加をLuvinaが迅速に対応可能</a:t>
-            </a:r>
-            <a:endParaRPr lang="en-US" sz="1000" dirty="0"/>
-          </a:p>
-        </p:txBody>
-      </p:sp>
-      <p:sp>
-        <p:nvSpPr>
-          <p:cNvPr id="33" name="Text 28"/>
-          <p:cNvSpPr/>
-          <p:nvPr/>
-        </p:nvSpPr>
-        <p:spPr>
-          <a:xfrm>
-            <a:off x="5303520" y="3401568"/>
-            <a:ext cx="4206240" cy="347472"/>
-          </a:xfrm>
-          <a:prstGeom prst="rect">
-            <a:avLst/>
-          </a:prstGeom>
-          <a:noFill/>
-          <a:ln/>
-        </p:spPr>
-        <p:txBody>
-          <a:bodyPr wrap="square" lIns="0" tIns="0" rIns="0" bIns="0" rtlCol="0" anchor="t"/>
-          <a:lstStyle/>
-          <a:p>
-            <a:pPr indent="0" marL="0">
-              <a:buNone/>
-            </a:pPr>
-            <a:r>
-              <a:rPr lang="en-US" sz="1000" dirty="0">
+              <a:t>BIPROGY様</a:t>
+            </a:r>
+            <a:r>
+              <a:rPr lang="ja-JP" altLang="en-US" sz="1000" dirty="0">
                 <a:solidFill>
                   <a:srgbClr val="333333"/>
                 </a:solidFill>
@@ -7052,46 +7200,18 @@
                 <a:ea typeface="Meiryo" pitchFamily="34" charset="-122"/>
                 <a:cs typeface="Meiryo" pitchFamily="34" charset="-120"/>
               </a:rPr>
-              <a:t>✅  運用効率が高い</a:t>
-            </a:r>
-            <a:endParaRPr lang="en-US" sz="1000" dirty="0"/>
-          </a:p>
-        </p:txBody>
-      </p:sp>
-      <p:sp>
-        <p:nvSpPr>
-          <p:cNvPr id="34" name="Text 29"/>
-          <p:cNvSpPr/>
-          <p:nvPr/>
-        </p:nvSpPr>
-        <p:spPr>
-          <a:xfrm>
-            <a:off x="5303520" y="3922776"/>
-            <a:ext cx="1371600" cy="256032"/>
-          </a:xfrm>
-          <a:prstGeom prst="rect">
-            <a:avLst/>
-          </a:prstGeom>
-          <a:noFill/>
-          <a:ln/>
-        </p:spPr>
-        <p:txBody>
-          <a:bodyPr wrap="square" lIns="0" tIns="0" rIns="0" bIns="0" rtlCol="0" anchor="ctr"/>
-          <a:lstStyle/>
-          <a:p>
-            <a:pPr indent="0" marL="0">
-              <a:buNone/>
-            </a:pPr>
-            <a:r>
-              <a:rPr lang="en-US" sz="1000" b="1" dirty="0">
-                <a:solidFill>
-                  <a:srgbClr val="CC0000"/>
+              <a:t>・アイネス様</a:t>
+            </a:r>
+            <a:r>
+              <a:rPr lang="en-US" sz="1000" dirty="0" err="1">
+                <a:solidFill>
+                  <a:srgbClr val="333333"/>
                 </a:solidFill>
                 <a:latin typeface="Meiryo" pitchFamily="34" charset="0"/>
                 <a:ea typeface="Meiryo" pitchFamily="34" charset="-122"/>
                 <a:cs typeface="Meiryo" pitchFamily="34" charset="-120"/>
               </a:rPr>
-              <a:t>デメリット</a:t>
+              <a:t>の作業コストを最小化</a:t>
             </a:r>
             <a:endParaRPr lang="en-US" sz="1000" dirty="0"/>
           </a:p>
@@ -7099,13 +7219,13 @@
       </p:sp>
       <p:sp>
         <p:nvSpPr>
-          <p:cNvPr id="35" name="Text 30"/>
-          <p:cNvSpPr/>
-          <p:nvPr/>
-        </p:nvSpPr>
-        <p:spPr>
-          <a:xfrm>
-            <a:off x="5303520" y="4224528"/>
+          <p:cNvPr id="32" name="Text 27"/>
+          <p:cNvSpPr/>
+          <p:nvPr/>
+        </p:nvSpPr>
+        <p:spPr>
+          <a:xfrm>
+            <a:off x="5303520" y="3017520"/>
             <a:ext cx="4206240" cy="347472"/>
           </a:xfrm>
           <a:prstGeom prst="rect">
@@ -7118,7 +7238,7 @@
           <a:bodyPr wrap="square" lIns="0" tIns="0" rIns="0" bIns="0" rtlCol="0" anchor="t"/>
           <a:lstStyle/>
           <a:p>
-            <a:pPr indent="0" marL="0">
+            <a:pPr marL="0" indent="0">
               <a:buNone/>
             </a:pPr>
             <a:r>
@@ -7130,6 +7250,123 @@
                 <a:ea typeface="Meiryo" pitchFamily="34" charset="-122"/>
                 <a:cs typeface="Meiryo" pitchFamily="34" charset="-120"/>
               </a:rPr>
+              <a:t>✅  修正・追加をLuvinaが迅速に対応可能</a:t>
+            </a:r>
+            <a:endParaRPr lang="en-US" sz="1000" dirty="0"/>
+          </a:p>
+        </p:txBody>
+      </p:sp>
+      <p:sp>
+        <p:nvSpPr>
+          <p:cNvPr id="33" name="Text 28"/>
+          <p:cNvSpPr/>
+          <p:nvPr/>
+        </p:nvSpPr>
+        <p:spPr>
+          <a:xfrm>
+            <a:off x="5303520" y="3401568"/>
+            <a:ext cx="4206240" cy="347472"/>
+          </a:xfrm>
+          <a:prstGeom prst="rect">
+            <a:avLst/>
+          </a:prstGeom>
+          <a:noFill/>
+          <a:ln/>
+        </p:spPr>
+        <p:txBody>
+          <a:bodyPr wrap="square" lIns="0" tIns="0" rIns="0" bIns="0" rtlCol="0" anchor="t"/>
+          <a:lstStyle/>
+          <a:p>
+            <a:pPr marL="0" indent="0">
+              <a:buNone/>
+            </a:pPr>
+            <a:r>
+              <a:rPr lang="en-US" sz="1000" dirty="0">
+                <a:solidFill>
+                  <a:srgbClr val="333333"/>
+                </a:solidFill>
+                <a:latin typeface="Meiryo" pitchFamily="34" charset="0"/>
+                <a:ea typeface="Meiryo" pitchFamily="34" charset="-122"/>
+                <a:cs typeface="Meiryo" pitchFamily="34" charset="-120"/>
+              </a:rPr>
+              <a:t>✅  運用効率が高い</a:t>
+            </a:r>
+            <a:endParaRPr lang="en-US" sz="1000" dirty="0"/>
+          </a:p>
+        </p:txBody>
+      </p:sp>
+      <p:sp>
+        <p:nvSpPr>
+          <p:cNvPr id="34" name="Text 29"/>
+          <p:cNvSpPr/>
+          <p:nvPr/>
+        </p:nvSpPr>
+        <p:spPr>
+          <a:xfrm>
+            <a:off x="5303520" y="3922776"/>
+            <a:ext cx="1371600" cy="256032"/>
+          </a:xfrm>
+          <a:prstGeom prst="rect">
+            <a:avLst/>
+          </a:prstGeom>
+          <a:noFill/>
+          <a:ln/>
+        </p:spPr>
+        <p:txBody>
+          <a:bodyPr wrap="square" lIns="0" tIns="0" rIns="0" bIns="0" rtlCol="0" anchor="ctr"/>
+          <a:lstStyle/>
+          <a:p>
+            <a:pPr marL="0" indent="0">
+              <a:buNone/>
+            </a:pPr>
+            <a:r>
+              <a:rPr lang="en-US" sz="1000" b="1" dirty="0">
+                <a:solidFill>
+                  <a:srgbClr val="CC0000"/>
+                </a:solidFill>
+                <a:latin typeface="Meiryo" pitchFamily="34" charset="0"/>
+                <a:ea typeface="Meiryo" pitchFamily="34" charset="-122"/>
+                <a:cs typeface="Meiryo" pitchFamily="34" charset="-120"/>
+              </a:rPr>
+              <a:t>デメリット</a:t>
+            </a:r>
+            <a:endParaRPr lang="en-US" sz="1000" dirty="0"/>
+          </a:p>
+        </p:txBody>
+      </p:sp>
+      <p:sp>
+        <p:nvSpPr>
+          <p:cNvPr id="35" name="Text 30"/>
+          <p:cNvSpPr/>
+          <p:nvPr/>
+        </p:nvSpPr>
+        <p:spPr>
+          <a:xfrm>
+            <a:off x="5303520" y="4224528"/>
+            <a:ext cx="4206240" cy="347472"/>
+          </a:xfrm>
+          <a:prstGeom prst="rect">
+            <a:avLst/>
+          </a:prstGeom>
+          <a:noFill/>
+          <a:ln/>
+        </p:spPr>
+        <p:txBody>
+          <a:bodyPr wrap="square" lIns="0" tIns="0" rIns="0" bIns="0" rtlCol="0" anchor="t"/>
+          <a:lstStyle/>
+          <a:p>
+            <a:pPr marL="0" indent="0">
+              <a:buNone/>
+            </a:pPr>
+            <a:r>
+              <a:rPr lang="en-US" sz="1000" dirty="0">
+                <a:solidFill>
+                  <a:srgbClr val="333333"/>
+                </a:solidFill>
+                <a:latin typeface="Meiryo" pitchFamily="34" charset="0"/>
+                <a:ea typeface="Meiryo" pitchFamily="34" charset="-122"/>
+                <a:cs typeface="Meiryo" pitchFamily="34" charset="-120"/>
+              </a:rPr>
               <a:t>⚠️  カスミAWS側でIAMロール設定が必要（1回のみ）</a:t>
             </a:r>
             <a:endParaRPr lang="en-US" sz="1000" dirty="0"/>
@@ -7157,7 +7394,7 @@
           <a:bodyPr wrap="square" lIns="0" tIns="0" rIns="0" bIns="0" rtlCol="0" anchor="t"/>
           <a:lstStyle/>
           <a:p>
-            <a:pPr indent="0" marL="0">
+            <a:pPr marL="0" indent="0">
               <a:buNone/>
             </a:pPr>
             <a:r>
@@ -7191,6 +7428,7 @@
         <a:solidFill>
           <a:srgbClr val="FFFFFF"/>
         </a:solidFill>
+        <a:effectLst/>
       </p:bgPr>
     </p:bg>
     <p:spTree>
@@ -7209,94 +7447,7 @@
       </p:grpSpPr>
       <p:pic>
         <p:nvPicPr>
-          <p:cNvPr id="2" name="Image 0" descr="/mnt/skills/user/luvina-ppt/assets/decoration_dots.png">    </p:cNvPr>
-          <p:cNvPicPr>
-            <a:picLocks noChangeAspect="1"/>
-          </p:cNvPicPr>
-          <p:nvPr/>
-        </p:nvPicPr>
-        <p:blipFill>
-          <a:blip r:embed="rId1"/>
-          <a:stretch>
-            <a:fillRect/>
-          </a:stretch>
-        </p:blipFill>
-        <p:spPr>
-          <a:xfrm>
-            <a:off x="0" y="0"/>
-            <a:ext cx="3904488" cy="2880360"/>
-          </a:xfrm>
-          <a:prstGeom prst="rect">
-            <a:avLst/>
-          </a:prstGeom>
-        </p:spPr>
-      </p:pic>
-      <p:pic>
-        <p:nvPicPr>
-          <p:cNvPr id="3" name="Image 1" descr="/mnt/skills/user/luvina-ppt/assets/luvina_badge.png">    </p:cNvPr>
-          <p:cNvPicPr>
-            <a:picLocks noChangeAspect="1"/>
-          </p:cNvPicPr>
-          <p:nvPr/>
-        </p:nvPicPr>
-        <p:blipFill>
-          <a:blip r:embed="rId2"/>
-          <a:stretch>
-            <a:fillRect/>
-          </a:stretch>
-        </p:blipFill>
-        <p:spPr>
-          <a:xfrm>
-            <a:off x="109728" y="109728"/>
-            <a:ext cx="1874520" cy="466344"/>
-          </a:xfrm>
-          <a:prstGeom prst="rect">
-            <a:avLst/>
-          </a:prstGeom>
-        </p:spPr>
-      </p:pic>
-      <p:sp>
-        <p:nvSpPr>
-          <p:cNvPr id="4" name="Text 0"/>
-          <p:cNvSpPr/>
-          <p:nvPr/>
-        </p:nvSpPr>
-        <p:spPr>
-          <a:xfrm>
-            <a:off x="438912" y="173736"/>
-            <a:ext cx="1216152" cy="329184"/>
-          </a:xfrm>
-          <a:prstGeom prst="rect">
-            <a:avLst/>
-          </a:prstGeom>
-          <a:noFill/>
-          <a:ln/>
-        </p:spPr>
-        <p:txBody>
-          <a:bodyPr wrap="square" lIns="0" tIns="0" rIns="0" bIns="0" rtlCol="0" anchor="ctr"/>
-          <a:lstStyle/>
-          <a:p>
-            <a:pPr indent="0" marL="0">
-              <a:buNone/>
-            </a:pPr>
-            <a:r>
-              <a:rPr lang="en-US" sz="1600" b="1" dirty="0">
-                <a:solidFill>
-                  <a:srgbClr val="FFFFFF"/>
-                </a:solidFill>
-                <a:latin typeface="Arial Black" pitchFamily="34" charset="0"/>
-                <a:ea typeface="Arial Black" pitchFamily="34" charset="-122"/>
-                <a:cs typeface="Arial Black" pitchFamily="34" charset="-120"/>
-              </a:rPr>
-              <a:t>LUVINA</a:t>
-            </a:r>
-            <a:endParaRPr lang="en-US" sz="1600" dirty="0"/>
-          </a:p>
-        </p:txBody>
-      </p:sp>
-      <p:pic>
-        <p:nvPicPr>
-          <p:cNvPr id="5" name="Image 2" descr="/mnt/skills/user/luvina-ppt/assets/luvina_logo.png">    </p:cNvPr>
+          <p:cNvPr id="2" name="Image 0" descr="/mnt/skills/user/luvina-ppt/assets/decoration_dots.png"/>
           <p:cNvPicPr>
             <a:picLocks noChangeAspect="1"/>
           </p:cNvPicPr>
@@ -7310,6 +7461,93 @@
         </p:blipFill>
         <p:spPr>
           <a:xfrm>
+            <a:off x="0" y="0"/>
+            <a:ext cx="3904488" cy="2880360"/>
+          </a:xfrm>
+          <a:prstGeom prst="rect">
+            <a:avLst/>
+          </a:prstGeom>
+        </p:spPr>
+      </p:pic>
+      <p:pic>
+        <p:nvPicPr>
+          <p:cNvPr id="3" name="Image 1" descr="/mnt/skills/user/luvina-ppt/assets/luvina_badge.png"/>
+          <p:cNvPicPr>
+            <a:picLocks noChangeAspect="1"/>
+          </p:cNvPicPr>
+          <p:nvPr/>
+        </p:nvPicPr>
+        <p:blipFill>
+          <a:blip r:embed="rId4"/>
+          <a:stretch>
+            <a:fillRect/>
+          </a:stretch>
+        </p:blipFill>
+        <p:spPr>
+          <a:xfrm>
+            <a:off x="109728" y="109728"/>
+            <a:ext cx="1874520" cy="466344"/>
+          </a:xfrm>
+          <a:prstGeom prst="rect">
+            <a:avLst/>
+          </a:prstGeom>
+        </p:spPr>
+      </p:pic>
+      <p:sp>
+        <p:nvSpPr>
+          <p:cNvPr id="4" name="Text 0"/>
+          <p:cNvSpPr/>
+          <p:nvPr/>
+        </p:nvSpPr>
+        <p:spPr>
+          <a:xfrm>
+            <a:off x="438912" y="173736"/>
+            <a:ext cx="1216152" cy="329184"/>
+          </a:xfrm>
+          <a:prstGeom prst="rect">
+            <a:avLst/>
+          </a:prstGeom>
+          <a:noFill/>
+          <a:ln/>
+        </p:spPr>
+        <p:txBody>
+          <a:bodyPr wrap="square" lIns="0" tIns="0" rIns="0" bIns="0" rtlCol="0" anchor="ctr"/>
+          <a:lstStyle/>
+          <a:p>
+            <a:pPr marL="0" indent="0">
+              <a:buNone/>
+            </a:pPr>
+            <a:r>
+              <a:rPr lang="en-US" sz="1600" b="1" dirty="0">
+                <a:solidFill>
+                  <a:srgbClr val="FFFFFF"/>
+                </a:solidFill>
+                <a:latin typeface="Arial Black" pitchFamily="34" charset="0"/>
+                <a:ea typeface="Arial Black" pitchFamily="34" charset="-122"/>
+                <a:cs typeface="Arial Black" pitchFamily="34" charset="-120"/>
+              </a:rPr>
+              <a:t>LUVINA</a:t>
+            </a:r>
+            <a:endParaRPr lang="en-US" sz="1600" dirty="0"/>
+          </a:p>
+        </p:txBody>
+      </p:sp>
+      <p:pic>
+        <p:nvPicPr>
+          <p:cNvPr id="5" name="Image 2" descr="/mnt/skills/user/luvina-ppt/assets/luvina_logo.png"/>
+          <p:cNvPicPr>
+            <a:picLocks noChangeAspect="1"/>
+          </p:cNvPicPr>
+          <p:nvPr/>
+        </p:nvPicPr>
+        <p:blipFill>
+          <a:blip r:embed="rId5"/>
+          <a:stretch>
+            <a:fillRect/>
+          </a:stretch>
+        </p:blipFill>
+        <p:spPr>
+          <a:xfrm>
             <a:off x="8924544" y="109728"/>
             <a:ext cx="932688" cy="466344"/>
           </a:xfrm>
@@ -7337,6 +7575,13 @@
           </a:solidFill>
           <a:ln/>
         </p:spPr>
+        <p:txBody>
+          <a:bodyPr/>
+          <a:lstStyle/>
+          <a:p>
+            <a:endParaRPr lang="ja-JP" altLang="en-US"/>
+          </a:p>
+        </p:txBody>
       </p:sp>
       <p:sp>
         <p:nvSpPr>
@@ -7359,7 +7604,7 @@
           <a:bodyPr wrap="square" lIns="0" tIns="0" rIns="0" bIns="0" rtlCol="0" anchor="ctr"/>
           <a:lstStyle/>
           <a:p>
-            <a:pPr indent="0" marL="0">
+            <a:pPr marL="0" indent="0">
               <a:buNone/>
             </a:pPr>
             <a:r>
@@ -7398,7 +7643,7 @@
           <a:bodyPr wrap="square" lIns="0" tIns="0" rIns="0" bIns="0" rtlCol="0" anchor="ctr"/>
           <a:lstStyle/>
           <a:p>
-            <a:pPr indent="0" marL="0">
+            <a:pPr marL="0" indent="0">
               <a:buNone/>
             </a:pPr>
             <a:r>
@@ -7435,6 +7680,13 @@
           </a:solidFill>
           <a:ln/>
         </p:spPr>
+        <p:txBody>
+          <a:bodyPr/>
+          <a:lstStyle/>
+          <a:p>
+            <a:endParaRPr lang="ja-JP" altLang="en-US"/>
+          </a:p>
+        </p:txBody>
       </p:sp>
       <p:sp>
         <p:nvSpPr>
@@ -7457,7 +7709,7 @@
           <a:bodyPr wrap="square" lIns="0" tIns="0" rIns="0" bIns="0" rtlCol="0" anchor="ctr"/>
           <a:lstStyle/>
           <a:p>
-            <a:pPr indent="0" marL="0">
+            <a:pPr marL="0" indent="0">
               <a:buNone/>
             </a:pPr>
             <a:r>
@@ -7493,7 +7745,7 @@
           <a:bodyPr wrap="square" lIns="0" tIns="0" rIns="0" bIns="0" rtlCol="0" anchor="ctr"/>
           <a:lstStyle/>
           <a:p>
-            <a:pPr indent="0" marL="0">
+            <a:pPr marL="0" indent="0">
               <a:buNone/>
             </a:pPr>
             <a:r>
@@ -7513,7 +7765,7 @@
       </p:sp>
       <p:graphicFrame>
         <p:nvGraphicFramePr>
-          <p:cNvPr id="7" name="Table 0"/>
+          <p:cNvPr id="12" name="Table 0"/>
           <p:cNvGraphicFramePr>
             <a:graphicFrameLocks noGrp="1"/>
           </p:cNvGraphicFramePr>
@@ -7527,16 +7779,34 @@
         </p:nvGraphicFramePr>
         <p:xfrm>
           <a:off x="365760" y="1920240"/>
-          <a:ext cx="9171432" cy="914400"/>
+          <a:ext cx="9171432" cy="2514600"/>
         </p:xfrm>
         <a:graphic>
           <a:graphicData uri="http://schemas.openxmlformats.org/drawingml/2006/table">
             <a:tbl>
               <a:tblPr/>
               <a:tblGrid>
-                <a:gridCol w="1463040"/>
-                <a:gridCol w="3840480"/>
-                <a:gridCol w="3867912"/>
+                <a:gridCol w="1463040">
+                  <a:extLst>
+                    <a:ext uri="{9D8B030D-6E8A-4147-A177-3AD203B41FA5}">
+                      <a16:colId xmlns:a16="http://schemas.microsoft.com/office/drawing/2014/main" val="20000"/>
+                    </a:ext>
+                  </a:extLst>
+                </a:gridCol>
+                <a:gridCol w="3840480">
+                  <a:extLst>
+                    <a:ext uri="{9D8B030D-6E8A-4147-A177-3AD203B41FA5}">
+                      <a16:colId xmlns:a16="http://schemas.microsoft.com/office/drawing/2014/main" val="20001"/>
+                    </a:ext>
+                  </a:extLst>
+                </a:gridCol>
+                <a:gridCol w="3867912">
+                  <a:extLst>
+                    <a:ext uri="{9D8B030D-6E8A-4147-A177-3AD203B41FA5}">
+                      <a16:colId xmlns:a16="http://schemas.microsoft.com/office/drawing/2014/main" val="20002"/>
+                    </a:ext>
+                  </a:extLst>
+                </a:gridCol>
               </a:tblGrid>
               <a:tr h="502920">
                 <a:tc>
@@ -7544,7 +7814,7 @@
                     <a:bodyPr/>
                     <a:lstStyle/>
                     <a:p>
-                      <a:pPr algn="ctr" indent="0" marL="0">
+                      <a:pPr marL="0" indent="0" algn="ctr">
                         <a:buNone/>
                       </a:pPr>
                       <a:r>
@@ -7565,7 +7835,7 @@
                       </a:endParaRPr>
                     </a:p>
                   </a:txBody>
-                  <a:tcPr marL="91440" marR="91440" marT="45720" marB="45720" anchor="ctr">
+                  <a:tcPr anchor="ctr">
                     <a:lnL w="6350" cap="flat" cmpd="sng" algn="ctr">
                       <a:solidFill>
                         <a:srgbClr val="CCCCCC"/>
@@ -7612,7 +7882,7 @@
                     <a:bodyPr/>
                     <a:lstStyle/>
                     <a:p>
-                      <a:pPr algn="ctr" indent="0" marL="0">
+                      <a:pPr marL="0" indent="0" algn="ctr">
                         <a:buNone/>
                       </a:pPr>
                       <a:r>
@@ -7633,7 +7903,7 @@
                       </a:endParaRPr>
                     </a:p>
                   </a:txBody>
-                  <a:tcPr marL="91440" marR="91440" marT="45720" marB="45720" anchor="ctr">
+                  <a:tcPr anchor="ctr">
                     <a:lnL w="6350" cap="flat" cmpd="sng" algn="ctr">
                       <a:solidFill>
                         <a:srgbClr val="CCCCCC"/>
@@ -7680,7 +7950,7 @@
                     <a:bodyPr/>
                     <a:lstStyle/>
                     <a:p>
-                      <a:pPr algn="ctr" indent="0" marL="0">
+                      <a:pPr marL="0" indent="0" algn="ctr">
                         <a:buNone/>
                       </a:pPr>
                       <a:r>
@@ -7701,7 +7971,7 @@
                       </a:endParaRPr>
                     </a:p>
                   </a:txBody>
-                  <a:tcPr marL="91440" marR="91440" marT="45720" marB="45720" anchor="ctr">
+                  <a:tcPr anchor="ctr">
                     <a:lnL w="6350" cap="flat" cmpd="sng" algn="ctr">
                       <a:solidFill>
                         <a:srgbClr val="CCCCCC"/>
@@ -7743,6 +8013,11 @@
                     </a:solidFill>
                   </a:tcPr>
                 </a:tc>
+                <a:extLst>
+                  <a:ext uri="{0D108BD9-81ED-4DB2-BD59-A6C34878D82A}">
+                    <a16:rowId xmlns:a16="http://schemas.microsoft.com/office/drawing/2014/main" val="10000"/>
+                  </a:ext>
+                </a:extLst>
               </a:tr>
               <a:tr h="502920">
                 <a:tc>
@@ -7750,7 +8025,7 @@
                     <a:bodyPr/>
                     <a:lstStyle/>
                     <a:p>
-                      <a:pPr indent="0" marL="0">
+                      <a:pPr marL="0" indent="0">
                         <a:buNone/>
                       </a:pPr>
                       <a:r>
@@ -7771,7 +8046,7 @@
                       </a:endParaRPr>
                     </a:p>
                   </a:txBody>
-                  <a:tcPr marL="91440" marR="91440" marT="45720" marB="45720" anchor="t">
+                  <a:tcPr>
                     <a:lnL w="6350" cap="flat" cmpd="sng" algn="ctr">
                       <a:solidFill>
                         <a:srgbClr val="CCCCCC"/>
@@ -7818,7 +8093,7 @@
                     <a:bodyPr/>
                     <a:lstStyle/>
                     <a:p>
-                      <a:pPr indent="0" marL="0">
+                      <a:pPr marL="0" indent="0">
                         <a:buNone/>
                       </a:pPr>
                       <a:r>
@@ -7839,7 +8114,7 @@
                       </a:endParaRPr>
                     </a:p>
                     <a:p>
-                      <a:pPr indent="0" marL="0">
+                      <a:pPr marL="0" indent="0">
                         <a:buNone/>
                       </a:pPr>
                       <a:r>
@@ -7860,7 +8135,7 @@
                       </a:endParaRPr>
                     </a:p>
                   </a:txBody>
-                  <a:tcPr marL="91440" marR="91440" marT="45720" marB="45720" anchor="t">
+                  <a:tcPr>
                     <a:lnL w="6350" cap="flat" cmpd="sng" algn="ctr">
                       <a:solidFill>
                         <a:srgbClr val="CCCCCC"/>
@@ -7907,7 +8182,7 @@
                     <a:bodyPr/>
                     <a:lstStyle/>
                     <a:p>
-                      <a:pPr indent="0" marL="0">
+                      <a:pPr marL="0" indent="0">
                         <a:buNone/>
                       </a:pPr>
                       <a:r>
@@ -7928,7 +8203,7 @@
                       </a:endParaRPr>
                     </a:p>
                     <a:p>
-                      <a:pPr indent="0" marL="0">
+                      <a:pPr marL="0" indent="0">
                         <a:buNone/>
                       </a:pPr>
                       <a:r>
@@ -7949,7 +8224,7 @@
                       </a:endParaRPr>
                     </a:p>
                   </a:txBody>
-                  <a:tcPr marL="91440" marR="91440" marT="45720" marB="45720" anchor="t">
+                  <a:tcPr>
                     <a:lnL w="6350" cap="flat" cmpd="sng" algn="ctr">
                       <a:solidFill>
                         <a:srgbClr val="CCCCCC"/>
@@ -7991,6 +8266,11 @@
                     </a:solidFill>
                   </a:tcPr>
                 </a:tc>
+                <a:extLst>
+                  <a:ext uri="{0D108BD9-81ED-4DB2-BD59-A6C34878D82A}">
+                    <a16:rowId xmlns:a16="http://schemas.microsoft.com/office/drawing/2014/main" val="10001"/>
+                  </a:ext>
+                </a:extLst>
               </a:tr>
               <a:tr h="502920">
                 <a:tc>
@@ -7998,7 +8278,7 @@
                     <a:bodyPr/>
                     <a:lstStyle/>
                     <a:p>
-                      <a:pPr indent="0" marL="0">
+                      <a:pPr marL="0" indent="0">
                         <a:buNone/>
                       </a:pPr>
                       <a:r>
@@ -8019,7 +8299,7 @@
                       </a:endParaRPr>
                     </a:p>
                   </a:txBody>
-                  <a:tcPr marL="91440" marR="91440" marT="45720" marB="45720" anchor="t">
+                  <a:tcPr>
                     <a:lnL w="6350" cap="flat" cmpd="sng" algn="ctr">
                       <a:solidFill>
                         <a:srgbClr val="CCCCCC"/>
@@ -8066,7 +8346,7 @@
                     <a:bodyPr/>
                     <a:lstStyle/>
                     <a:p>
-                      <a:pPr indent="0" marL="0">
+                      <a:pPr marL="0" indent="0">
                         <a:buNone/>
                       </a:pPr>
                       <a:r>
@@ -8087,7 +8367,7 @@
                       </a:endParaRPr>
                     </a:p>
                     <a:p>
-                      <a:pPr indent="0" marL="0">
+                      <a:pPr marL="0" indent="0">
                         <a:buNone/>
                       </a:pPr>
                       <a:r>
@@ -8108,7 +8388,7 @@
                       </a:endParaRPr>
                     </a:p>
                   </a:txBody>
-                  <a:tcPr marL="91440" marR="91440" marT="45720" marB="45720" anchor="t">
+                  <a:tcPr>
                     <a:lnL w="6350" cap="flat" cmpd="sng" algn="ctr">
                       <a:solidFill>
                         <a:srgbClr val="CCCCCC"/>
@@ -8155,7 +8435,7 @@
                     <a:bodyPr/>
                     <a:lstStyle/>
                     <a:p>
-                      <a:pPr indent="0" marL="0">
+                      <a:pPr marL="0" indent="0">
                         <a:buNone/>
                       </a:pPr>
                       <a:r>
@@ -8176,7 +8456,7 @@
                       </a:endParaRPr>
                     </a:p>
                     <a:p>
-                      <a:pPr indent="0" marL="0">
+                      <a:pPr marL="0" indent="0">
                         <a:buNone/>
                       </a:pPr>
                       <a:r>
@@ -8197,7 +8477,7 @@
                       </a:endParaRPr>
                     </a:p>
                   </a:txBody>
-                  <a:tcPr marL="91440" marR="91440" marT="45720" marB="45720" anchor="t">
+                  <a:tcPr>
                     <a:lnL w="6350" cap="flat" cmpd="sng" algn="ctr">
                       <a:solidFill>
                         <a:srgbClr val="CCCCCC"/>
@@ -8239,6 +8519,11 @@
                     </a:solidFill>
                   </a:tcPr>
                 </a:tc>
+                <a:extLst>
+                  <a:ext uri="{0D108BD9-81ED-4DB2-BD59-A6C34878D82A}">
+                    <a16:rowId xmlns:a16="http://schemas.microsoft.com/office/drawing/2014/main" val="10002"/>
+                  </a:ext>
+                </a:extLst>
               </a:tr>
               <a:tr h="502920">
                 <a:tc>
@@ -8246,7 +8531,7 @@
                     <a:bodyPr/>
                     <a:lstStyle/>
                     <a:p>
-                      <a:pPr indent="0" marL="0">
+                      <a:pPr marL="0" indent="0">
                         <a:buNone/>
                       </a:pPr>
                       <a:r>
@@ -8267,7 +8552,7 @@
                       </a:endParaRPr>
                     </a:p>
                   </a:txBody>
-                  <a:tcPr marL="91440" marR="91440" marT="45720" marB="45720" anchor="t">
+                  <a:tcPr>
                     <a:lnL w="6350" cap="flat" cmpd="sng" algn="ctr">
                       <a:solidFill>
                         <a:srgbClr val="CCCCCC"/>
@@ -8314,7 +8599,7 @@
                     <a:bodyPr/>
                     <a:lstStyle/>
                     <a:p>
-                      <a:pPr indent="0" marL="0">
+                      <a:pPr marL="0" indent="0">
                         <a:buNone/>
                       </a:pPr>
                       <a:r>
@@ -8335,7 +8620,7 @@
                       </a:endParaRPr>
                     </a:p>
                     <a:p>
-                      <a:pPr indent="0" marL="0">
+                      <a:pPr marL="0" indent="0">
                         <a:buNone/>
                       </a:pPr>
                       <a:r>
@@ -8356,7 +8641,7 @@
                       </a:endParaRPr>
                     </a:p>
                   </a:txBody>
-                  <a:tcPr marL="91440" marR="91440" marT="45720" marB="45720" anchor="t">
+                  <a:tcPr>
                     <a:lnL w="6350" cap="flat" cmpd="sng" algn="ctr">
                       <a:solidFill>
                         <a:srgbClr val="CCCCCC"/>
@@ -8403,7 +8688,7 @@
                     <a:bodyPr/>
                     <a:lstStyle/>
                     <a:p>
-                      <a:pPr indent="0" marL="0">
+                      <a:pPr marL="0" indent="0">
                         <a:buNone/>
                       </a:pPr>
                       <a:r>
@@ -8424,7 +8709,7 @@
                       </a:endParaRPr>
                     </a:p>
                     <a:p>
-                      <a:pPr indent="0" marL="0">
+                      <a:pPr marL="0" indent="0">
                         <a:buNone/>
                       </a:pPr>
                       <a:r>
@@ -8445,7 +8730,7 @@
                       </a:endParaRPr>
                     </a:p>
                   </a:txBody>
-                  <a:tcPr marL="91440" marR="91440" marT="45720" marB="45720" anchor="t">
+                  <a:tcPr>
                     <a:lnL w="6350" cap="flat" cmpd="sng" algn="ctr">
                       <a:solidFill>
                         <a:srgbClr val="CCCCCC"/>
@@ -8487,6 +8772,11 @@
                     </a:solidFill>
                   </a:tcPr>
                 </a:tc>
+                <a:extLst>
+                  <a:ext uri="{0D108BD9-81ED-4DB2-BD59-A6C34878D82A}">
+                    <a16:rowId xmlns:a16="http://schemas.microsoft.com/office/drawing/2014/main" val="10003"/>
+                  </a:ext>
+                </a:extLst>
               </a:tr>
               <a:tr h="502920">
                 <a:tc>
@@ -8494,7 +8784,7 @@
                     <a:bodyPr/>
                     <a:lstStyle/>
                     <a:p>
-                      <a:pPr algn="ctr" indent="0" marL="0">
+                      <a:pPr marL="0" indent="0" algn="ctr">
                         <a:buNone/>
                       </a:pPr>
                       <a:r>
@@ -8515,7 +8805,7 @@
                       </a:endParaRPr>
                     </a:p>
                     <a:p>
-                      <a:pPr algn="ctr" indent="0" marL="0">
+                      <a:pPr marL="0" indent="0" algn="ctr">
                         <a:buNone/>
                       </a:pPr>
                       <a:r>
@@ -8536,7 +8826,7 @@
                       </a:endParaRPr>
                     </a:p>
                   </a:txBody>
-                  <a:tcPr marL="91440" marR="91440" marT="45720" marB="45720" anchor="ctr">
+                  <a:tcPr anchor="ctr">
                     <a:lnL w="6350" cap="flat" cmpd="sng" algn="ctr">
                       <a:solidFill>
                         <a:srgbClr val="CCCCCC"/>
@@ -8583,7 +8873,7 @@
                     <a:bodyPr/>
                     <a:lstStyle/>
                     <a:p>
-                      <a:pPr indent="0" marL="0">
+                      <a:pPr marL="0" indent="0">
                         <a:buNone/>
                       </a:pPr>
                       <a:r>
@@ -8604,7 +8894,7 @@
                       </a:endParaRPr>
                     </a:p>
                   </a:txBody>
-                  <a:tcPr marL="91440" marR="91440" marT="45720" marB="45720" anchor="t">
+                  <a:tcPr>
                     <a:lnL w="6350" cap="flat" cmpd="sng" algn="ctr">
                       <a:solidFill>
                         <a:srgbClr val="CCCCCC"/>
@@ -8651,7 +8941,7 @@
                     <a:bodyPr/>
                     <a:lstStyle/>
                     <a:p>
-                      <a:pPr indent="0" marL="0">
+                      <a:pPr marL="0" indent="0">
                         <a:buNone/>
                       </a:pPr>
                       <a:r>
@@ -8672,7 +8962,7 @@
                       </a:endParaRPr>
                     </a:p>
                     <a:p>
-                      <a:pPr indent="0" marL="0">
+                      <a:pPr marL="0" indent="0">
                         <a:buNone/>
                       </a:pPr>
                       <a:r>
@@ -8693,7 +8983,7 @@
                       </a:endParaRPr>
                     </a:p>
                   </a:txBody>
-                  <a:tcPr marL="91440" marR="91440" marT="45720" marB="45720" anchor="t">
+                  <a:tcPr>
                     <a:lnL w="6350" cap="flat" cmpd="sng" algn="ctr">
                       <a:solidFill>
                         <a:srgbClr val="CCCCCC"/>
@@ -8735,6 +9025,11 @@
                     </a:solidFill>
                   </a:tcPr>
                 </a:tc>
+                <a:extLst>
+                  <a:ext uri="{0D108BD9-81ED-4DB2-BD59-A6C34878D82A}">
+                    <a16:rowId xmlns:a16="http://schemas.microsoft.com/office/drawing/2014/main" val="10004"/>
+                  </a:ext>
+                </a:extLst>
               </a:tr>
             </a:tbl>
           </a:graphicData>
@@ -8764,6 +9059,13 @@
             <a:prstDash val="solid"/>
           </a:ln>
         </p:spPr>
+        <p:txBody>
+          <a:bodyPr/>
+          <a:lstStyle/>
+          <a:p>
+            <a:endParaRPr lang="ja-JP" altLang="en-US"/>
+          </a:p>
+        </p:txBody>
       </p:sp>
       <p:sp>
         <p:nvSpPr>
@@ -8786,7 +9088,7 @@
           <a:bodyPr wrap="square" lIns="0" tIns="0" rIns="0" bIns="0" rtlCol="0" anchor="ctr"/>
           <a:lstStyle/>
           <a:p>
-            <a:pPr indent="0" marL="0">
+            <a:pPr marL="0" indent="0">
               <a:buNone/>
             </a:pPr>
             <a:r>
@@ -8825,7 +9127,7 @@
           <a:bodyPr wrap="square" lIns="0" tIns="0" rIns="0" bIns="0" rtlCol="0" anchor="ctr"/>
           <a:lstStyle/>
           <a:p>
-            <a:pPr indent="0" marL="0">
+            <a:pPr marL="0" indent="0">
               <a:buNone/>
             </a:pPr>
             <a:r>
@@ -8864,7 +9166,7 @@
           <a:bodyPr wrap="square" lIns="0" tIns="0" rIns="0" bIns="0" rtlCol="0" anchor="ctr"/>
           <a:lstStyle/>
           <a:p>
-            <a:pPr indent="0" marL="0">
+            <a:pPr marL="0" indent="0">
               <a:buNone/>
             </a:pPr>
             <a:r>
@@ -8903,7 +9205,7 @@
           <a:bodyPr wrap="square" lIns="0" tIns="0" rIns="0" bIns="0" rtlCol="0" anchor="ctr"/>
           <a:lstStyle/>
           <a:p>
-            <a:pPr indent="0" marL="0">
+            <a:pPr marL="0" indent="0">
               <a:buNone/>
             </a:pPr>
             <a:r>
@@ -8942,7 +9244,7 @@
           <a:bodyPr wrap="square" lIns="0" tIns="0" rIns="0" bIns="0" rtlCol="0" anchor="ctr"/>
           <a:lstStyle/>
           <a:p>
-            <a:pPr indent="0" marL="0">
+            <a:pPr marL="0" indent="0">
               <a:buNone/>
             </a:pPr>
             <a:r>
@@ -8976,6 +9278,7 @@
         <a:solidFill>
           <a:srgbClr val="FFFFFF"/>
         </a:solidFill>
+        <a:effectLst/>
       </p:bgPr>
     </p:bg>
     <p:spTree>
@@ -8994,94 +9297,7 @@
       </p:grpSpPr>
       <p:pic>
         <p:nvPicPr>
-          <p:cNvPr id="2" name="Image 0" descr="/mnt/skills/user/luvina-ppt/assets/decoration_dots.png">    </p:cNvPr>
-          <p:cNvPicPr>
-            <a:picLocks noChangeAspect="1"/>
-          </p:cNvPicPr>
-          <p:nvPr/>
-        </p:nvPicPr>
-        <p:blipFill>
-          <a:blip r:embed="rId1"/>
-          <a:stretch>
-            <a:fillRect/>
-          </a:stretch>
-        </p:blipFill>
-        <p:spPr>
-          <a:xfrm>
-            <a:off x="0" y="0"/>
-            <a:ext cx="3904488" cy="2880360"/>
-          </a:xfrm>
-          <a:prstGeom prst="rect">
-            <a:avLst/>
-          </a:prstGeom>
-        </p:spPr>
-      </p:pic>
-      <p:pic>
-        <p:nvPicPr>
-          <p:cNvPr id="3" name="Image 1" descr="/mnt/skills/user/luvina-ppt/assets/luvina_badge.png">    </p:cNvPr>
-          <p:cNvPicPr>
-            <a:picLocks noChangeAspect="1"/>
-          </p:cNvPicPr>
-          <p:nvPr/>
-        </p:nvPicPr>
-        <p:blipFill>
-          <a:blip r:embed="rId2"/>
-          <a:stretch>
-            <a:fillRect/>
-          </a:stretch>
-        </p:blipFill>
-        <p:spPr>
-          <a:xfrm>
-            <a:off x="109728" y="109728"/>
-            <a:ext cx="1874520" cy="466344"/>
-          </a:xfrm>
-          <a:prstGeom prst="rect">
-            <a:avLst/>
-          </a:prstGeom>
-        </p:spPr>
-      </p:pic>
-      <p:sp>
-        <p:nvSpPr>
-          <p:cNvPr id="4" name="Text 0"/>
-          <p:cNvSpPr/>
-          <p:nvPr/>
-        </p:nvSpPr>
-        <p:spPr>
-          <a:xfrm>
-            <a:off x="438912" y="173736"/>
-            <a:ext cx="1216152" cy="329184"/>
-          </a:xfrm>
-          <a:prstGeom prst="rect">
-            <a:avLst/>
-          </a:prstGeom>
-          <a:noFill/>
-          <a:ln/>
-        </p:spPr>
-        <p:txBody>
-          <a:bodyPr wrap="square" lIns="0" tIns="0" rIns="0" bIns="0" rtlCol="0" anchor="ctr"/>
-          <a:lstStyle/>
-          <a:p>
-            <a:pPr indent="0" marL="0">
-              <a:buNone/>
-            </a:pPr>
-            <a:r>
-              <a:rPr lang="en-US" sz="1600" b="1" dirty="0">
-                <a:solidFill>
-                  <a:srgbClr val="FFFFFF"/>
-                </a:solidFill>
-                <a:latin typeface="Arial Black" pitchFamily="34" charset="0"/>
-                <a:ea typeface="Arial Black" pitchFamily="34" charset="-122"/>
-                <a:cs typeface="Arial Black" pitchFamily="34" charset="-120"/>
-              </a:rPr>
-              <a:t>LUVINA</a:t>
-            </a:r>
-            <a:endParaRPr lang="en-US" sz="1600" dirty="0"/>
-          </a:p>
-        </p:txBody>
-      </p:sp>
-      <p:pic>
-        <p:nvPicPr>
-          <p:cNvPr id="5" name="Image 2" descr="/mnt/skills/user/luvina-ppt/assets/luvina_logo.png">    </p:cNvPr>
+          <p:cNvPr id="2" name="Image 0" descr="/mnt/skills/user/luvina-ppt/assets/decoration_dots.png"/>
           <p:cNvPicPr>
             <a:picLocks noChangeAspect="1"/>
           </p:cNvPicPr>
@@ -9095,6 +9311,93 @@
         </p:blipFill>
         <p:spPr>
           <a:xfrm>
+            <a:off x="0" y="0"/>
+            <a:ext cx="3904488" cy="2880360"/>
+          </a:xfrm>
+          <a:prstGeom prst="rect">
+            <a:avLst/>
+          </a:prstGeom>
+        </p:spPr>
+      </p:pic>
+      <p:pic>
+        <p:nvPicPr>
+          <p:cNvPr id="3" name="Image 1" descr="/mnt/skills/user/luvina-ppt/assets/luvina_badge.png"/>
+          <p:cNvPicPr>
+            <a:picLocks noChangeAspect="1"/>
+          </p:cNvPicPr>
+          <p:nvPr/>
+        </p:nvPicPr>
+        <p:blipFill>
+          <a:blip r:embed="rId4"/>
+          <a:stretch>
+            <a:fillRect/>
+          </a:stretch>
+        </p:blipFill>
+        <p:spPr>
+          <a:xfrm>
+            <a:off x="109728" y="109728"/>
+            <a:ext cx="1874520" cy="466344"/>
+          </a:xfrm>
+          <a:prstGeom prst="rect">
+            <a:avLst/>
+          </a:prstGeom>
+        </p:spPr>
+      </p:pic>
+      <p:sp>
+        <p:nvSpPr>
+          <p:cNvPr id="4" name="Text 0"/>
+          <p:cNvSpPr/>
+          <p:nvPr/>
+        </p:nvSpPr>
+        <p:spPr>
+          <a:xfrm>
+            <a:off x="438912" y="173736"/>
+            <a:ext cx="1216152" cy="329184"/>
+          </a:xfrm>
+          <a:prstGeom prst="rect">
+            <a:avLst/>
+          </a:prstGeom>
+          <a:noFill/>
+          <a:ln/>
+        </p:spPr>
+        <p:txBody>
+          <a:bodyPr wrap="square" lIns="0" tIns="0" rIns="0" bIns="0" rtlCol="0" anchor="ctr"/>
+          <a:lstStyle/>
+          <a:p>
+            <a:pPr marL="0" indent="0">
+              <a:buNone/>
+            </a:pPr>
+            <a:r>
+              <a:rPr lang="en-US" sz="1600" b="1" dirty="0">
+                <a:solidFill>
+                  <a:srgbClr val="FFFFFF"/>
+                </a:solidFill>
+                <a:latin typeface="Arial Black" pitchFamily="34" charset="0"/>
+                <a:ea typeface="Arial Black" pitchFamily="34" charset="-122"/>
+                <a:cs typeface="Arial Black" pitchFamily="34" charset="-120"/>
+              </a:rPr>
+              <a:t>LUVINA</a:t>
+            </a:r>
+            <a:endParaRPr lang="en-US" sz="1600" dirty="0"/>
+          </a:p>
+        </p:txBody>
+      </p:sp>
+      <p:pic>
+        <p:nvPicPr>
+          <p:cNvPr id="5" name="Image 2" descr="/mnt/skills/user/luvina-ppt/assets/luvina_logo.png"/>
+          <p:cNvPicPr>
+            <a:picLocks noChangeAspect="1"/>
+          </p:cNvPicPr>
+          <p:nvPr/>
+        </p:nvPicPr>
+        <p:blipFill>
+          <a:blip r:embed="rId5"/>
+          <a:stretch>
+            <a:fillRect/>
+          </a:stretch>
+        </p:blipFill>
+        <p:spPr>
+          <a:xfrm>
             <a:off x="8924544" y="109728"/>
             <a:ext cx="932688" cy="466344"/>
           </a:xfrm>
@@ -9122,6 +9425,13 @@
           </a:solidFill>
           <a:ln/>
         </p:spPr>
+        <p:txBody>
+          <a:bodyPr/>
+          <a:lstStyle/>
+          <a:p>
+            <a:endParaRPr lang="ja-JP" altLang="en-US"/>
+          </a:p>
+        </p:txBody>
       </p:sp>
       <p:sp>
         <p:nvSpPr>
@@ -9144,7 +9454,7 @@
           <a:bodyPr wrap="square" lIns="0" tIns="0" rIns="0" bIns="0" rtlCol="0" anchor="ctr"/>
           <a:lstStyle/>
           <a:p>
-            <a:pPr indent="0" marL="0">
+            <a:pPr marL="0" indent="0">
               <a:buNone/>
             </a:pPr>
             <a:r>
@@ -9183,7 +9493,7 @@
           <a:bodyPr wrap="square" lIns="0" tIns="0" rIns="0" bIns="0" rtlCol="0" anchor="ctr"/>
           <a:lstStyle/>
           <a:p>
-            <a:pPr indent="0" marL="0">
+            <a:pPr marL="0" indent="0">
               <a:buNone/>
             </a:pPr>
             <a:r>
@@ -9220,6 +9530,13 @@
           </a:solidFill>
           <a:ln/>
         </p:spPr>
+        <p:txBody>
+          <a:bodyPr/>
+          <a:lstStyle/>
+          <a:p>
+            <a:endParaRPr lang="ja-JP" altLang="en-US"/>
+          </a:p>
+        </p:txBody>
       </p:sp>
       <p:sp>
         <p:nvSpPr>
@@ -9242,7 +9559,7 @@
           <a:bodyPr wrap="square" lIns="0" tIns="0" rIns="0" bIns="0" rtlCol="0" anchor="ctr"/>
           <a:lstStyle/>
           <a:p>
-            <a:pPr indent="0" marL="0">
+            <a:pPr marL="0" indent="0">
               <a:buNone/>
             </a:pPr>
             <a:r>
@@ -9259,7 +9576,7 @@
       </p:sp>
       <p:graphicFrame>
         <p:nvGraphicFramePr>
-          <p:cNvPr id="8" name="Table 0"/>
+          <p:cNvPr id="11" name="Table 0"/>
           <p:cNvGraphicFramePr>
             <a:graphicFrameLocks noGrp="1"/>
           </p:cNvGraphicFramePr>
@@ -9280,10 +9597,34 @@
             <a:tbl>
               <a:tblPr/>
               <a:tblGrid>
-                <a:gridCol w="1828800"/>
-                <a:gridCol w="2286000"/>
-                <a:gridCol w="2286000"/>
-                <a:gridCol w="2770632"/>
+                <a:gridCol w="1828800">
+                  <a:extLst>
+                    <a:ext uri="{9D8B030D-6E8A-4147-A177-3AD203B41FA5}">
+                      <a16:colId xmlns:a16="http://schemas.microsoft.com/office/drawing/2014/main" val="20000"/>
+                    </a:ext>
+                  </a:extLst>
+                </a:gridCol>
+                <a:gridCol w="2286000">
+                  <a:extLst>
+                    <a:ext uri="{9D8B030D-6E8A-4147-A177-3AD203B41FA5}">
+                      <a16:colId xmlns:a16="http://schemas.microsoft.com/office/drawing/2014/main" val="20001"/>
+                    </a:ext>
+                  </a:extLst>
+                </a:gridCol>
+                <a:gridCol w="2286000">
+                  <a:extLst>
+                    <a:ext uri="{9D8B030D-6E8A-4147-A177-3AD203B41FA5}">
+                      <a16:colId xmlns:a16="http://schemas.microsoft.com/office/drawing/2014/main" val="20002"/>
+                    </a:ext>
+                  </a:extLst>
+                </a:gridCol>
+                <a:gridCol w="2770632">
+                  <a:extLst>
+                    <a:ext uri="{9D8B030D-6E8A-4147-A177-3AD203B41FA5}">
+                      <a16:colId xmlns:a16="http://schemas.microsoft.com/office/drawing/2014/main" val="20003"/>
+                    </a:ext>
+                  </a:extLst>
+                </a:gridCol>
               </a:tblGrid>
               <a:tr h="640080">
                 <a:tc>
@@ -9291,7 +9632,7 @@
                     <a:bodyPr/>
                     <a:lstStyle/>
                     <a:p>
-                      <a:pPr algn="ctr" indent="0" marL="0">
+                      <a:pPr marL="0" indent="0" algn="ctr">
                         <a:buNone/>
                       </a:pPr>
                       <a:r>
@@ -9312,7 +9653,7 @@
                       </a:endParaRPr>
                     </a:p>
                   </a:txBody>
-                  <a:tcPr marL="91440" marR="91440" marT="45720" marB="45720" anchor="ctr">
+                  <a:tcPr anchor="ctr">
                     <a:lnL w="6350" cap="flat" cmpd="sng" algn="ctr">
                       <a:solidFill>
                         <a:srgbClr val="CCCCCC"/>
@@ -9359,7 +9700,7 @@
                     <a:bodyPr/>
                     <a:lstStyle/>
                     <a:p>
-                      <a:pPr algn="ctr" indent="0" marL="0">
+                      <a:pPr marL="0" indent="0" algn="ctr">
                         <a:buNone/>
                       </a:pPr>
                       <a:r>
@@ -9380,7 +9721,7 @@
                       </a:endParaRPr>
                     </a:p>
                   </a:txBody>
-                  <a:tcPr marL="91440" marR="91440" marT="45720" marB="45720" anchor="ctr">
+                  <a:tcPr anchor="ctr">
                     <a:lnL w="6350" cap="flat" cmpd="sng" algn="ctr">
                       <a:solidFill>
                         <a:srgbClr val="CCCCCC"/>
@@ -9427,7 +9768,7 @@
                     <a:bodyPr/>
                     <a:lstStyle/>
                     <a:p>
-                      <a:pPr algn="ctr" indent="0" marL="0">
+                      <a:pPr marL="0" indent="0" algn="ctr">
                         <a:buNone/>
                       </a:pPr>
                       <a:r>
@@ -9448,7 +9789,7 @@
                       </a:endParaRPr>
                     </a:p>
                   </a:txBody>
-                  <a:tcPr marL="91440" marR="91440" marT="45720" marB="45720" anchor="ctr">
+                  <a:tcPr anchor="ctr">
                     <a:lnL w="6350" cap="flat" cmpd="sng" algn="ctr">
                       <a:solidFill>
                         <a:srgbClr val="CCCCCC"/>
@@ -9495,7 +9836,7 @@
                     <a:bodyPr/>
                     <a:lstStyle/>
                     <a:p>
-                      <a:pPr algn="ctr" indent="0" marL="0">
+                      <a:pPr marL="0" indent="0" algn="ctr">
                         <a:buNone/>
                       </a:pPr>
                       <a:r>
@@ -9516,7 +9857,7 @@
                       </a:endParaRPr>
                     </a:p>
                   </a:txBody>
-                  <a:tcPr marL="91440" marR="91440" marT="45720" marB="45720" anchor="ctr">
+                  <a:tcPr anchor="ctr">
                     <a:lnL w="6350" cap="flat" cmpd="sng" algn="ctr">
                       <a:solidFill>
                         <a:srgbClr val="CCCCCC"/>
@@ -9558,6 +9899,11 @@
                     </a:solidFill>
                   </a:tcPr>
                 </a:tc>
+                <a:extLst>
+                  <a:ext uri="{0D108BD9-81ED-4DB2-BD59-A6C34878D82A}">
+                    <a16:rowId xmlns:a16="http://schemas.microsoft.com/office/drawing/2014/main" val="10000"/>
+                  </a:ext>
+                </a:extLst>
               </a:tr>
               <a:tr h="640080">
                 <a:tc>
@@ -9565,7 +9911,7 @@
                     <a:bodyPr/>
                     <a:lstStyle/>
                     <a:p>
-                      <a:pPr algn="ctr" indent="0" marL="0">
+                      <a:pPr marL="0" indent="0" algn="ctr">
                         <a:buNone/>
                       </a:pPr>
                       <a:r>
@@ -9586,7 +9932,7 @@
                       </a:endParaRPr>
                     </a:p>
                     <a:p>
-                      <a:pPr algn="ctr" indent="0" marL="0">
+                      <a:pPr marL="0" indent="0" algn="ctr">
                         <a:buNone/>
                       </a:pPr>
                       <a:r>
@@ -9607,7 +9953,7 @@
                       </a:endParaRPr>
                     </a:p>
                   </a:txBody>
-                  <a:tcPr marL="91440" marR="91440" marT="45720" marB="45720" anchor="ctr">
+                  <a:tcPr anchor="ctr">
                     <a:lnL w="6350" cap="flat" cmpd="sng" algn="ctr">
                       <a:solidFill>
                         <a:srgbClr val="CCCCCC"/>
@@ -9654,7 +10000,7 @@
                     <a:bodyPr/>
                     <a:lstStyle/>
                     <a:p>
-                      <a:pPr indent="0" marL="0">
+                      <a:pPr marL="0" indent="0">
                         <a:buNone/>
                       </a:pPr>
                       <a:r>
@@ -9675,7 +10021,7 @@
                       </a:endParaRPr>
                     </a:p>
                     <a:p>
-                      <a:pPr indent="0" marL="0">
+                      <a:pPr marL="0" indent="0">
                         <a:buNone/>
                       </a:pPr>
                       <a:r>
@@ -9696,7 +10042,7 @@
                       </a:endParaRPr>
                     </a:p>
                   </a:txBody>
-                  <a:tcPr marL="91440" marR="91440" marT="45720" marB="45720" anchor="ctr">
+                  <a:tcPr anchor="ctr">
                     <a:lnL w="6350" cap="flat" cmpd="sng" algn="ctr">
                       <a:solidFill>
                         <a:srgbClr val="CCCCCC"/>
@@ -9743,7 +10089,7 @@
                     <a:bodyPr/>
                     <a:lstStyle/>
                     <a:p>
-                      <a:pPr algn="ctr" indent="0" marL="0">
+                      <a:pPr marL="0" indent="0" algn="ctr">
                         <a:buNone/>
                       </a:pPr>
                       <a:r>
@@ -9764,7 +10110,7 @@
                       </a:endParaRPr>
                     </a:p>
                   </a:txBody>
-                  <a:tcPr marL="91440" marR="91440" marT="45720" marB="45720" anchor="ctr">
+                  <a:tcPr anchor="ctr">
                     <a:lnL w="6350" cap="flat" cmpd="sng" algn="ctr">
                       <a:solidFill>
                         <a:srgbClr val="CCCCCC"/>
@@ -9811,7 +10157,7 @@
                     <a:bodyPr/>
                     <a:lstStyle/>
                     <a:p>
-                      <a:pPr indent="0" marL="0">
+                      <a:pPr marL="0" indent="0">
                         <a:buNone/>
                       </a:pPr>
                       <a:r>
@@ -9832,7 +10178,7 @@
                       </a:endParaRPr>
                     </a:p>
                     <a:p>
-                      <a:pPr indent="0" marL="0">
+                      <a:pPr marL="0" indent="0">
                         <a:buNone/>
                       </a:pPr>
                       <a:r>
@@ -9853,7 +10199,7 @@
                       </a:endParaRPr>
                     </a:p>
                   </a:txBody>
-                  <a:tcPr marL="91440" marR="91440" marT="45720" marB="45720" anchor="t">
+                  <a:tcPr>
                     <a:lnL w="6350" cap="flat" cmpd="sng" algn="ctr">
                       <a:solidFill>
                         <a:srgbClr val="CCCCCC"/>
@@ -9895,6 +10241,11 @@
                     </a:solidFill>
                   </a:tcPr>
                 </a:tc>
+                <a:extLst>
+                  <a:ext uri="{0D108BD9-81ED-4DB2-BD59-A6C34878D82A}">
+                    <a16:rowId xmlns:a16="http://schemas.microsoft.com/office/drawing/2014/main" val="10001"/>
+                  </a:ext>
+                </a:extLst>
               </a:tr>
               <a:tr h="640080">
                 <a:tc>
@@ -9902,7 +10253,7 @@
                     <a:bodyPr/>
                     <a:lstStyle/>
                     <a:p>
-                      <a:pPr algn="ctr" indent="0" marL="0">
+                      <a:pPr marL="0" indent="0" algn="ctr">
                         <a:buNone/>
                       </a:pPr>
                       <a:r>
@@ -9923,7 +10274,7 @@
                       </a:endParaRPr>
                     </a:p>
                   </a:txBody>
-                  <a:tcPr marL="91440" marR="91440" marT="45720" marB="45720" anchor="ctr">
+                  <a:tcPr anchor="ctr">
                     <a:lnL w="6350" cap="flat" cmpd="sng" algn="ctr">
                       <a:solidFill>
                         <a:srgbClr val="CCCCCC"/>
@@ -9970,7 +10321,7 @@
                     <a:bodyPr/>
                     <a:lstStyle/>
                     <a:p>
-                      <a:pPr indent="0" marL="0">
+                      <a:pPr marL="0" indent="0">
                         <a:buNone/>
                       </a:pPr>
                       <a:r>
@@ -9991,7 +10342,7 @@
                       </a:endParaRPr>
                     </a:p>
                   </a:txBody>
-                  <a:tcPr marL="91440" marR="91440" marT="45720" marB="45720" anchor="ctr">
+                  <a:tcPr anchor="ctr">
                     <a:lnL w="6350" cap="flat" cmpd="sng" algn="ctr">
                       <a:solidFill>
                         <a:srgbClr val="CCCCCC"/>
@@ -10038,7 +10389,7 @@
                     <a:bodyPr/>
                     <a:lstStyle/>
                     <a:p>
-                      <a:pPr algn="ctr" indent="0" marL="0">
+                      <a:pPr marL="0" indent="0" algn="ctr">
                         <a:buNone/>
                       </a:pPr>
                       <a:r>
@@ -10059,7 +10410,7 @@
                       </a:endParaRPr>
                     </a:p>
                   </a:txBody>
-                  <a:tcPr marL="91440" marR="91440" marT="45720" marB="45720" anchor="ctr">
+                  <a:tcPr anchor="ctr">
                     <a:lnL w="6350" cap="flat" cmpd="sng" algn="ctr">
                       <a:solidFill>
                         <a:srgbClr val="CCCCCC"/>
@@ -10106,7 +10457,7 @@
                     <a:bodyPr/>
                     <a:lstStyle/>
                     <a:p>
-                      <a:pPr indent="0" marL="0">
+                      <a:pPr marL="0" indent="0">
                         <a:buNone/>
                       </a:pPr>
                       <a:r>
@@ -10127,7 +10478,7 @@
                       </a:endParaRPr>
                     </a:p>
                     <a:p>
-                      <a:pPr indent="0" marL="0">
+                      <a:pPr marL="0" indent="0">
                         <a:buNone/>
                       </a:pPr>
                       <a:r>
@@ -10148,7 +10499,7 @@
                       </a:endParaRPr>
                     </a:p>
                   </a:txBody>
-                  <a:tcPr marL="91440" marR="91440" marT="45720" marB="45720" anchor="t">
+                  <a:tcPr>
                     <a:lnL w="6350" cap="flat" cmpd="sng" algn="ctr">
                       <a:solidFill>
                         <a:srgbClr val="CCCCCC"/>
@@ -10190,6 +10541,11 @@
                     </a:solidFill>
                   </a:tcPr>
                 </a:tc>
+                <a:extLst>
+                  <a:ext uri="{0D108BD9-81ED-4DB2-BD59-A6C34878D82A}">
+                    <a16:rowId xmlns:a16="http://schemas.microsoft.com/office/drawing/2014/main" val="10002"/>
+                  </a:ext>
+                </a:extLst>
               </a:tr>
               <a:tr h="640080">
                 <a:tc>
@@ -10197,7 +10553,7 @@
                     <a:bodyPr/>
                     <a:lstStyle/>
                     <a:p>
-                      <a:pPr algn="ctr" indent="0" marL="0">
+                      <a:pPr marL="0" indent="0" algn="ctr">
                         <a:buNone/>
                       </a:pPr>
                       <a:r>
@@ -10218,7 +10574,7 @@
                       </a:endParaRPr>
                     </a:p>
                   </a:txBody>
-                  <a:tcPr marL="91440" marR="91440" marT="45720" marB="45720" anchor="ctr">
+                  <a:tcPr anchor="ctr">
                     <a:lnL w="6350" cap="flat" cmpd="sng" algn="ctr">
                       <a:solidFill>
                         <a:srgbClr val="CCCCCC"/>
@@ -10265,7 +10621,7 @@
                     <a:bodyPr/>
                     <a:lstStyle/>
                     <a:p>
-                      <a:pPr indent="0" marL="0">
+                      <a:pPr marL="0" indent="0">
                         <a:buNone/>
                       </a:pPr>
                       <a:r>
@@ -10286,7 +10642,7 @@
                       </a:endParaRPr>
                     </a:p>
                   </a:txBody>
-                  <a:tcPr marL="91440" marR="91440" marT="45720" marB="45720" anchor="ctr">
+                  <a:tcPr anchor="ctr">
                     <a:lnL w="6350" cap="flat" cmpd="sng" algn="ctr">
                       <a:solidFill>
                         <a:srgbClr val="CCCCCC"/>
@@ -10333,7 +10689,7 @@
                     <a:bodyPr/>
                     <a:lstStyle/>
                     <a:p>
-                      <a:pPr algn="ctr" indent="0" marL="0">
+                      <a:pPr marL="0" indent="0" algn="ctr">
                         <a:buNone/>
                       </a:pPr>
                       <a:r>
@@ -10354,7 +10710,7 @@
                       </a:endParaRPr>
                     </a:p>
                   </a:txBody>
-                  <a:tcPr marL="91440" marR="91440" marT="45720" marB="45720" anchor="ctr">
+                  <a:tcPr anchor="ctr">
                     <a:lnL w="6350" cap="flat" cmpd="sng" algn="ctr">
                       <a:solidFill>
                         <a:srgbClr val="CCCCCC"/>
@@ -10401,7 +10757,7 @@
                     <a:bodyPr/>
                     <a:lstStyle/>
                     <a:p>
-                      <a:pPr indent="0" marL="0">
+                      <a:pPr marL="0" indent="0">
                         <a:buNone/>
                       </a:pPr>
                       <a:r>
@@ -10422,7 +10778,7 @@
                       </a:endParaRPr>
                     </a:p>
                   </a:txBody>
-                  <a:tcPr marL="91440" marR="91440" marT="45720" marB="45720" anchor="t">
+                  <a:tcPr>
                     <a:lnL w="6350" cap="flat" cmpd="sng" algn="ctr">
                       <a:solidFill>
                         <a:srgbClr val="CCCCCC"/>
@@ -10464,6 +10820,11 @@
                     </a:solidFill>
                   </a:tcPr>
                 </a:tc>
+                <a:extLst>
+                  <a:ext uri="{0D108BD9-81ED-4DB2-BD59-A6C34878D82A}">
+                    <a16:rowId xmlns:a16="http://schemas.microsoft.com/office/drawing/2014/main" val="10003"/>
+                  </a:ext>
+                </a:extLst>
               </a:tr>
               <a:tr h="640080">
                 <a:tc>
@@ -10471,7 +10832,7 @@
                     <a:bodyPr/>
                     <a:lstStyle/>
                     <a:p>
-                      <a:pPr algn="ctr" indent="0" marL="0">
+                      <a:pPr marL="0" indent="0" algn="ctr">
                         <a:buNone/>
                       </a:pPr>
                       <a:r>
@@ -10492,7 +10853,7 @@
                       </a:endParaRPr>
                     </a:p>
                     <a:p>
-                      <a:pPr algn="ctr" indent="0" marL="0">
+                      <a:pPr marL="0" indent="0" algn="ctr">
                         <a:buNone/>
                       </a:pPr>
                       <a:r>
@@ -10513,7 +10874,7 @@
                       </a:endParaRPr>
                     </a:p>
                   </a:txBody>
-                  <a:tcPr marL="91440" marR="91440" marT="45720" marB="45720" anchor="ctr">
+                  <a:tcPr anchor="ctr">
                     <a:lnL w="6350" cap="flat" cmpd="sng" algn="ctr">
                       <a:solidFill>
                         <a:srgbClr val="CCCCCC"/>
@@ -10560,7 +10921,7 @@
                     <a:bodyPr/>
                     <a:lstStyle/>
                     <a:p>
-                      <a:pPr indent="0" marL="0">
+                      <a:pPr marL="0" indent="0">
                         <a:buNone/>
                       </a:pPr>
                       <a:r>
@@ -10581,7 +10942,7 @@
                       </a:endParaRPr>
                     </a:p>
                     <a:p>
-                      <a:pPr indent="0" marL="0">
+                      <a:pPr marL="0" indent="0">
                         <a:buNone/>
                       </a:pPr>
                       <a:r>
@@ -10602,7 +10963,7 @@
                       </a:endParaRPr>
                     </a:p>
                   </a:txBody>
-                  <a:tcPr marL="91440" marR="91440" marT="45720" marB="45720" anchor="ctr">
+                  <a:tcPr anchor="ctr">
                     <a:lnL w="6350" cap="flat" cmpd="sng" algn="ctr">
                       <a:solidFill>
                         <a:srgbClr val="CCCCCC"/>
@@ -10649,7 +11010,7 @@
                     <a:bodyPr/>
                     <a:lstStyle/>
                     <a:p>
-                      <a:pPr algn="ctr" indent="0" marL="0">
+                      <a:pPr marL="0" indent="0" algn="ctr">
                         <a:buNone/>
                       </a:pPr>
                       <a:r>
@@ -10670,7 +11031,7 @@
                       </a:endParaRPr>
                     </a:p>
                     <a:p>
-                      <a:pPr algn="ctr" indent="0" marL="0">
+                      <a:pPr marL="0" indent="0" algn="ctr">
                         <a:buNone/>
                       </a:pPr>
                       <a:r>
@@ -10691,7 +11052,7 @@
                       </a:endParaRPr>
                     </a:p>
                   </a:txBody>
-                  <a:tcPr marL="91440" marR="91440" marT="45720" marB="45720" anchor="ctr">
+                  <a:tcPr anchor="ctr">
                     <a:lnL w="6350" cap="flat" cmpd="sng" algn="ctr">
                       <a:solidFill>
                         <a:srgbClr val="CCCCCC"/>
@@ -10738,7 +11099,7 @@
                     <a:bodyPr/>
                     <a:lstStyle/>
                     <a:p>
-                      <a:pPr indent="0" marL="0">
+                      <a:pPr marL="0" indent="0">
                         <a:buNone/>
                       </a:pPr>
                       <a:r>
@@ -10759,7 +11120,7 @@
                       </a:endParaRPr>
                     </a:p>
                     <a:p>
-                      <a:pPr indent="0" marL="0">
+                      <a:pPr marL="0" indent="0">
                         <a:buNone/>
                       </a:pPr>
                       <a:r>
@@ -10780,7 +11141,7 @@
                       </a:endParaRPr>
                     </a:p>
                   </a:txBody>
-                  <a:tcPr marL="91440" marR="91440" marT="45720" marB="45720" anchor="t">
+                  <a:tcPr>
                     <a:lnL w="6350" cap="flat" cmpd="sng" algn="ctr">
                       <a:solidFill>
                         <a:srgbClr val="CCCCCC"/>
@@ -10822,6 +11183,11 @@
                     </a:solidFill>
                   </a:tcPr>
                 </a:tc>
+                <a:extLst>
+                  <a:ext uri="{0D108BD9-81ED-4DB2-BD59-A6C34878D82A}">
+                    <a16:rowId xmlns:a16="http://schemas.microsoft.com/office/drawing/2014/main" val="10004"/>
+                  </a:ext>
+                </a:extLst>
               </a:tr>
               <a:tr h="640080">
                 <a:tc>
@@ -10829,7 +11195,7 @@
                     <a:bodyPr/>
                     <a:lstStyle/>
                     <a:p>
-                      <a:pPr algn="ctr" indent="0" marL="0">
+                      <a:pPr marL="0" indent="0" algn="ctr">
                         <a:buNone/>
                       </a:pPr>
                       <a:r>
@@ -10850,7 +11216,7 @@
                       </a:endParaRPr>
                     </a:p>
                   </a:txBody>
-                  <a:tcPr marL="91440" marR="91440" marT="45720" marB="45720" anchor="ctr">
+                  <a:tcPr anchor="ctr">
                     <a:lnL w="6350" cap="flat" cmpd="sng" algn="ctr">
                       <a:solidFill>
                         <a:srgbClr val="CCCCCC"/>
@@ -10897,7 +11263,7 @@
                     <a:bodyPr/>
                     <a:lstStyle/>
                     <a:p>
-                      <a:pPr indent="0" marL="0">
+                      <a:pPr marL="0" indent="0">
                         <a:buNone/>
                       </a:pPr>
                       <a:r>
@@ -10918,7 +11284,7 @@
                       </a:endParaRPr>
                     </a:p>
                   </a:txBody>
-                  <a:tcPr marL="91440" marR="91440" marT="45720" marB="45720" anchor="ctr">
+                  <a:tcPr anchor="ctr">
                     <a:lnL w="6350" cap="flat" cmpd="sng" algn="ctr">
                       <a:solidFill>
                         <a:srgbClr val="CCCCCC"/>
@@ -10965,7 +11331,7 @@
                     <a:bodyPr/>
                     <a:lstStyle/>
                     <a:p>
-                      <a:pPr algn="ctr" indent="0" marL="0">
+                      <a:pPr marL="0" indent="0" algn="ctr">
                         <a:buNone/>
                       </a:pPr>
                       <a:r>
@@ -10986,7 +11352,7 @@
                       </a:endParaRPr>
                     </a:p>
                   </a:txBody>
-                  <a:tcPr marL="91440" marR="91440" marT="45720" marB="45720" anchor="ctr">
+                  <a:tcPr anchor="ctr">
                     <a:lnL w="6350" cap="flat" cmpd="sng" algn="ctr">
                       <a:solidFill>
                         <a:srgbClr val="CCCCCC"/>
@@ -11033,7 +11399,7 @@
                     <a:bodyPr/>
                     <a:lstStyle/>
                     <a:p>
-                      <a:pPr indent="0" marL="0">
+                      <a:pPr marL="0" indent="0">
                         <a:buNone/>
                       </a:pPr>
                       <a:r>
@@ -11054,7 +11420,7 @@
                       </a:endParaRPr>
                     </a:p>
                     <a:p>
-                      <a:pPr indent="0" marL="0">
+                      <a:pPr marL="0" indent="0">
                         <a:buNone/>
                       </a:pPr>
                       <a:r>
@@ -11075,7 +11441,7 @@
                       </a:endParaRPr>
                     </a:p>
                   </a:txBody>
-                  <a:tcPr marL="91440" marR="91440" marT="45720" marB="45720" anchor="t">
+                  <a:tcPr>
                     <a:lnL w="6350" cap="flat" cmpd="sng" algn="ctr">
                       <a:solidFill>
                         <a:srgbClr val="CCCCCC"/>
@@ -11117,6 +11483,11 @@
                     </a:solidFill>
                   </a:tcPr>
                 </a:tc>
+                <a:extLst>
+                  <a:ext uri="{0D108BD9-81ED-4DB2-BD59-A6C34878D82A}">
+                    <a16:rowId xmlns:a16="http://schemas.microsoft.com/office/drawing/2014/main" val="10005"/>
+                  </a:ext>
+                </a:extLst>
               </a:tr>
             </a:tbl>
           </a:graphicData>
@@ -11143,7 +11514,7 @@
           <a:bodyPr wrap="square" lIns="0" tIns="0" rIns="0" bIns="0" rtlCol="0" anchor="ctr"/>
           <a:lstStyle/>
           <a:p>
-            <a:pPr indent="0" marL="0">
+            <a:pPr marL="0" indent="0">
               <a:buNone/>
             </a:pPr>
             <a:r>
@@ -11177,6 +11548,7 @@
         <a:solidFill>
           <a:srgbClr val="FFFFFF"/>
         </a:solidFill>
+        <a:effectLst/>
       </p:bgPr>
     </p:bg>
     <p:spTree>
@@ -11195,94 +11567,7 @@
       </p:grpSpPr>
       <p:pic>
         <p:nvPicPr>
-          <p:cNvPr id="2" name="Image 0" descr="/mnt/skills/user/luvina-ppt/assets/decoration_dots.png">    </p:cNvPr>
-          <p:cNvPicPr>
-            <a:picLocks noChangeAspect="1"/>
-          </p:cNvPicPr>
-          <p:nvPr/>
-        </p:nvPicPr>
-        <p:blipFill>
-          <a:blip r:embed="rId1"/>
-          <a:stretch>
-            <a:fillRect/>
-          </a:stretch>
-        </p:blipFill>
-        <p:spPr>
-          <a:xfrm>
-            <a:off x="0" y="0"/>
-            <a:ext cx="3904488" cy="2880360"/>
-          </a:xfrm>
-          <a:prstGeom prst="rect">
-            <a:avLst/>
-          </a:prstGeom>
-        </p:spPr>
-      </p:pic>
-      <p:pic>
-        <p:nvPicPr>
-          <p:cNvPr id="3" name="Image 1" descr="/mnt/skills/user/luvina-ppt/assets/luvina_badge.png">    </p:cNvPr>
-          <p:cNvPicPr>
-            <a:picLocks noChangeAspect="1"/>
-          </p:cNvPicPr>
-          <p:nvPr/>
-        </p:nvPicPr>
-        <p:blipFill>
-          <a:blip r:embed="rId2"/>
-          <a:stretch>
-            <a:fillRect/>
-          </a:stretch>
-        </p:blipFill>
-        <p:spPr>
-          <a:xfrm>
-            <a:off x="109728" y="109728"/>
-            <a:ext cx="1874520" cy="466344"/>
-          </a:xfrm>
-          <a:prstGeom prst="rect">
-            <a:avLst/>
-          </a:prstGeom>
-        </p:spPr>
-      </p:pic>
-      <p:sp>
-        <p:nvSpPr>
-          <p:cNvPr id="4" name="Text 0"/>
-          <p:cNvSpPr/>
-          <p:nvPr/>
-        </p:nvSpPr>
-        <p:spPr>
-          <a:xfrm>
-            <a:off x="438912" y="173736"/>
-            <a:ext cx="1216152" cy="329184"/>
-          </a:xfrm>
-          <a:prstGeom prst="rect">
-            <a:avLst/>
-          </a:prstGeom>
-          <a:noFill/>
-          <a:ln/>
-        </p:spPr>
-        <p:txBody>
-          <a:bodyPr wrap="square" lIns="0" tIns="0" rIns="0" bIns="0" rtlCol="0" anchor="ctr"/>
-          <a:lstStyle/>
-          <a:p>
-            <a:pPr indent="0" marL="0">
-              <a:buNone/>
-            </a:pPr>
-            <a:r>
-              <a:rPr lang="en-US" sz="1600" b="1" dirty="0">
-                <a:solidFill>
-                  <a:srgbClr val="FFFFFF"/>
-                </a:solidFill>
-                <a:latin typeface="Arial Black" pitchFamily="34" charset="0"/>
-                <a:ea typeface="Arial Black" pitchFamily="34" charset="-122"/>
-                <a:cs typeface="Arial Black" pitchFamily="34" charset="-120"/>
-              </a:rPr>
-              <a:t>LUVINA</a:t>
-            </a:r>
-            <a:endParaRPr lang="en-US" sz="1600" dirty="0"/>
-          </a:p>
-        </p:txBody>
-      </p:sp>
-      <p:pic>
-        <p:nvPicPr>
-          <p:cNvPr id="5" name="Image 2" descr="/mnt/skills/user/luvina-ppt/assets/luvina_logo.png">    </p:cNvPr>
+          <p:cNvPr id="2" name="Image 0" descr="/mnt/skills/user/luvina-ppt/assets/decoration_dots.png"/>
           <p:cNvPicPr>
             <a:picLocks noChangeAspect="1"/>
           </p:cNvPicPr>
@@ -11296,6 +11581,93 @@
         </p:blipFill>
         <p:spPr>
           <a:xfrm>
+            <a:off x="0" y="0"/>
+            <a:ext cx="3904488" cy="2880360"/>
+          </a:xfrm>
+          <a:prstGeom prst="rect">
+            <a:avLst/>
+          </a:prstGeom>
+        </p:spPr>
+      </p:pic>
+      <p:pic>
+        <p:nvPicPr>
+          <p:cNvPr id="3" name="Image 1" descr="/mnt/skills/user/luvina-ppt/assets/luvina_badge.png"/>
+          <p:cNvPicPr>
+            <a:picLocks noChangeAspect="1"/>
+          </p:cNvPicPr>
+          <p:nvPr/>
+        </p:nvPicPr>
+        <p:blipFill>
+          <a:blip r:embed="rId4"/>
+          <a:stretch>
+            <a:fillRect/>
+          </a:stretch>
+        </p:blipFill>
+        <p:spPr>
+          <a:xfrm>
+            <a:off x="109728" y="109728"/>
+            <a:ext cx="1874520" cy="466344"/>
+          </a:xfrm>
+          <a:prstGeom prst="rect">
+            <a:avLst/>
+          </a:prstGeom>
+        </p:spPr>
+      </p:pic>
+      <p:sp>
+        <p:nvSpPr>
+          <p:cNvPr id="4" name="Text 0"/>
+          <p:cNvSpPr/>
+          <p:nvPr/>
+        </p:nvSpPr>
+        <p:spPr>
+          <a:xfrm>
+            <a:off x="438912" y="173736"/>
+            <a:ext cx="1216152" cy="329184"/>
+          </a:xfrm>
+          <a:prstGeom prst="rect">
+            <a:avLst/>
+          </a:prstGeom>
+          <a:noFill/>
+          <a:ln/>
+        </p:spPr>
+        <p:txBody>
+          <a:bodyPr wrap="square" lIns="0" tIns="0" rIns="0" bIns="0" rtlCol="0" anchor="ctr"/>
+          <a:lstStyle/>
+          <a:p>
+            <a:pPr marL="0" indent="0">
+              <a:buNone/>
+            </a:pPr>
+            <a:r>
+              <a:rPr lang="en-US" sz="1600" b="1" dirty="0">
+                <a:solidFill>
+                  <a:srgbClr val="FFFFFF"/>
+                </a:solidFill>
+                <a:latin typeface="Arial Black" pitchFamily="34" charset="0"/>
+                <a:ea typeface="Arial Black" pitchFamily="34" charset="-122"/>
+                <a:cs typeface="Arial Black" pitchFamily="34" charset="-120"/>
+              </a:rPr>
+              <a:t>LUVINA</a:t>
+            </a:r>
+            <a:endParaRPr lang="en-US" sz="1600" dirty="0"/>
+          </a:p>
+        </p:txBody>
+      </p:sp>
+      <p:pic>
+        <p:nvPicPr>
+          <p:cNvPr id="5" name="Image 2" descr="/mnt/skills/user/luvina-ppt/assets/luvina_logo.png"/>
+          <p:cNvPicPr>
+            <a:picLocks noChangeAspect="1"/>
+          </p:cNvPicPr>
+          <p:nvPr/>
+        </p:nvPicPr>
+        <p:blipFill>
+          <a:blip r:embed="rId5"/>
+          <a:stretch>
+            <a:fillRect/>
+          </a:stretch>
+        </p:blipFill>
+        <p:spPr>
+          <a:xfrm>
             <a:off x="8924544" y="109728"/>
             <a:ext cx="932688" cy="466344"/>
           </a:xfrm>
@@ -11323,6 +11695,13 @@
           </a:solidFill>
           <a:ln/>
         </p:spPr>
+        <p:txBody>
+          <a:bodyPr/>
+          <a:lstStyle/>
+          <a:p>
+            <a:endParaRPr lang="ja-JP" altLang="en-US"/>
+          </a:p>
+        </p:txBody>
       </p:sp>
       <p:sp>
         <p:nvSpPr>
@@ -11345,7 +11724,7 @@
           <a:bodyPr wrap="square" lIns="0" tIns="0" rIns="0" bIns="0" rtlCol="0" anchor="ctr"/>
           <a:lstStyle/>
           <a:p>
-            <a:pPr indent="0" marL="0">
+            <a:pPr marL="0" indent="0">
               <a:buNone/>
             </a:pPr>
             <a:r>
@@ -11384,7 +11763,7 @@
           <a:bodyPr wrap="square" lIns="0" tIns="0" rIns="0" bIns="0" rtlCol="0" anchor="ctr"/>
           <a:lstStyle/>
           <a:p>
-            <a:pPr indent="0" marL="0">
+            <a:pPr marL="0" indent="0">
               <a:buNone/>
             </a:pPr>
             <a:r>
@@ -11421,6 +11800,13 @@
           </a:solidFill>
           <a:ln/>
         </p:spPr>
+        <p:txBody>
+          <a:bodyPr/>
+          <a:lstStyle/>
+          <a:p>
+            <a:endParaRPr lang="ja-JP" altLang="en-US"/>
+          </a:p>
+        </p:txBody>
       </p:sp>
       <p:sp>
         <p:nvSpPr>
@@ -11443,7 +11829,7 @@
           <a:bodyPr wrap="square" lIns="0" tIns="0" rIns="0" bIns="0" rtlCol="0" anchor="ctr"/>
           <a:lstStyle/>
           <a:p>
-            <a:pPr indent="0" marL="0">
+            <a:pPr marL="0" indent="0">
               <a:buNone/>
             </a:pPr>
             <a:r>
@@ -11477,6 +11863,13 @@
           </a:solidFill>
           <a:ln/>
         </p:spPr>
+        <p:txBody>
+          <a:bodyPr/>
+          <a:lstStyle/>
+          <a:p>
+            <a:endParaRPr lang="ja-JP" altLang="en-US"/>
+          </a:p>
+        </p:txBody>
       </p:sp>
       <p:sp>
         <p:nvSpPr>
@@ -11499,7 +11892,7 @@
           <a:bodyPr wrap="square" lIns="0" tIns="0" rIns="0" bIns="0" rtlCol="0" anchor="ctr"/>
           <a:lstStyle/>
           <a:p>
-            <a:pPr algn="ctr" indent="0" marL="0">
+            <a:pPr marL="0" indent="0" algn="ctr">
               <a:buNone/>
             </a:pPr>
             <a:r>
@@ -11536,6 +11929,13 @@
           </a:solidFill>
           <a:ln/>
         </p:spPr>
+        <p:txBody>
+          <a:bodyPr/>
+          <a:lstStyle/>
+          <a:p>
+            <a:endParaRPr lang="ja-JP" altLang="en-US"/>
+          </a:p>
+        </p:txBody>
       </p:sp>
       <p:sp>
         <p:nvSpPr>
@@ -11558,7 +11958,7 @@
           <a:bodyPr wrap="square" lIns="0" tIns="0" rIns="0" bIns="0" rtlCol="0" anchor="ctr"/>
           <a:lstStyle/>
           <a:p>
-            <a:pPr algn="ctr" indent="0" marL="0">
+            <a:pPr marL="0" indent="0" algn="ctr">
               <a:buNone/>
             </a:pPr>
             <a:r>
@@ -11595,6 +11995,13 @@
           </a:solidFill>
           <a:ln/>
         </p:spPr>
+        <p:txBody>
+          <a:bodyPr/>
+          <a:lstStyle/>
+          <a:p>
+            <a:endParaRPr lang="ja-JP" altLang="en-US"/>
+          </a:p>
+        </p:txBody>
       </p:sp>
       <p:sp>
         <p:nvSpPr>
@@ -11617,7 +12024,7 @@
           <a:bodyPr wrap="square" lIns="0" tIns="0" rIns="0" bIns="0" rtlCol="0" anchor="ctr"/>
           <a:lstStyle/>
           <a:p>
-            <a:pPr algn="ctr" indent="0" marL="0">
+            <a:pPr marL="0" indent="0" algn="ctr">
               <a:buNone/>
             </a:pPr>
             <a:r>
@@ -11654,6 +12061,13 @@
           </a:solidFill>
           <a:ln/>
         </p:spPr>
+        <p:txBody>
+          <a:bodyPr/>
+          <a:lstStyle/>
+          <a:p>
+            <a:endParaRPr lang="ja-JP" altLang="en-US"/>
+          </a:p>
+        </p:txBody>
       </p:sp>
       <p:sp>
         <p:nvSpPr>
@@ -11676,7 +12090,7 @@
           <a:bodyPr wrap="square" lIns="0" tIns="0" rIns="0" bIns="0" rtlCol="0" anchor="ctr"/>
           <a:lstStyle/>
           <a:p>
-            <a:pPr algn="ctr" indent="0" marL="0">
+            <a:pPr marL="0" indent="0" algn="ctr">
               <a:buNone/>
             </a:pPr>
             <a:r>
@@ -11713,6 +12127,13 @@
           </a:solidFill>
           <a:ln/>
         </p:spPr>
+        <p:txBody>
+          <a:bodyPr/>
+          <a:lstStyle/>
+          <a:p>
+            <a:endParaRPr lang="ja-JP" altLang="en-US"/>
+          </a:p>
+        </p:txBody>
       </p:sp>
       <p:sp>
         <p:nvSpPr>
@@ -11735,7 +12156,7 @@
           <a:bodyPr wrap="square" lIns="0" tIns="0" rIns="0" bIns="0" rtlCol="0" anchor="ctr"/>
           <a:lstStyle/>
           <a:p>
-            <a:pPr algn="ctr" indent="0" marL="0">
+            <a:pPr marL="0" indent="0" algn="ctr">
               <a:buNone/>
             </a:pPr>
             <a:r>
@@ -11772,6 +12193,13 @@
           </a:solidFill>
           <a:ln/>
         </p:spPr>
+        <p:txBody>
+          <a:bodyPr/>
+          <a:lstStyle/>
+          <a:p>
+            <a:endParaRPr lang="ja-JP" altLang="en-US"/>
+          </a:p>
+        </p:txBody>
       </p:sp>
       <p:sp>
         <p:nvSpPr>
@@ -11794,7 +12222,7 @@
           <a:bodyPr wrap="square" lIns="0" tIns="0" rIns="0" bIns="0" rtlCol="0" anchor="ctr"/>
           <a:lstStyle/>
           <a:p>
-            <a:pPr algn="ctr" indent="0" marL="0">
+            <a:pPr marL="0" indent="0" algn="ctr">
               <a:buNone/>
             </a:pPr>
             <a:r>
@@ -11836,6 +12264,13 @@
             <a:prstDash val="solid"/>
           </a:ln>
         </p:spPr>
+        <p:txBody>
+          <a:bodyPr/>
+          <a:lstStyle/>
+          <a:p>
+            <a:endParaRPr lang="ja-JP" altLang="en-US"/>
+          </a:p>
+        </p:txBody>
       </p:sp>
       <p:sp>
         <p:nvSpPr>
@@ -11858,7 +12293,7 @@
           <a:bodyPr wrap="square" lIns="0" tIns="0" rIns="0" bIns="0" rtlCol="0" anchor="ctr"/>
           <a:lstStyle/>
           <a:p>
-            <a:pPr indent="0" marL="0">
+            <a:pPr marL="0" indent="0">
               <a:buNone/>
             </a:pPr>
             <a:r>
@@ -11875,7 +12310,7 @@
             <a:endParaRPr lang="en-US" sz="800" dirty="0"/>
           </a:p>
           <a:p>
-            <a:pPr indent="0" marL="0">
+            <a:pPr marL="0" indent="0">
               <a:buNone/>
             </a:pPr>
             <a:r>
@@ -11917,6 +12352,13 @@
             <a:prstDash val="solid"/>
           </a:ln>
         </p:spPr>
+        <p:txBody>
+          <a:bodyPr/>
+          <a:lstStyle/>
+          <a:p>
+            <a:endParaRPr lang="ja-JP" altLang="en-US"/>
+          </a:p>
+        </p:txBody>
       </p:sp>
       <p:sp>
         <p:nvSpPr>
@@ -11942,6 +12384,13 @@
             <a:prstDash val="solid"/>
           </a:ln>
         </p:spPr>
+        <p:txBody>
+          <a:bodyPr/>
+          <a:lstStyle/>
+          <a:p>
+            <a:endParaRPr lang="ja-JP" altLang="en-US"/>
+          </a:p>
+        </p:txBody>
       </p:sp>
       <p:sp>
         <p:nvSpPr>
@@ -11967,6 +12416,13 @@
             <a:prstDash val="solid"/>
           </a:ln>
         </p:spPr>
+        <p:txBody>
+          <a:bodyPr/>
+          <a:lstStyle/>
+          <a:p>
+            <a:endParaRPr lang="ja-JP" altLang="en-US"/>
+          </a:p>
+        </p:txBody>
       </p:sp>
       <p:sp>
         <p:nvSpPr>
@@ -11992,6 +12448,13 @@
             <a:prstDash val="solid"/>
           </a:ln>
         </p:spPr>
+        <p:txBody>
+          <a:bodyPr/>
+          <a:lstStyle/>
+          <a:p>
+            <a:endParaRPr lang="ja-JP" altLang="en-US"/>
+          </a:p>
+        </p:txBody>
       </p:sp>
       <p:sp>
         <p:nvSpPr>
@@ -12017,6 +12480,13 @@
             <a:prstDash val="solid"/>
           </a:ln>
         </p:spPr>
+        <p:txBody>
+          <a:bodyPr/>
+          <a:lstStyle/>
+          <a:p>
+            <a:endParaRPr lang="ja-JP" altLang="en-US"/>
+          </a:p>
+        </p:txBody>
       </p:sp>
       <p:sp>
         <p:nvSpPr>
@@ -12037,6 +12507,13 @@
           </a:solidFill>
           <a:ln/>
         </p:spPr>
+        <p:txBody>
+          <a:bodyPr/>
+          <a:lstStyle/>
+          <a:p>
+            <a:endParaRPr lang="ja-JP" altLang="en-US"/>
+          </a:p>
+        </p:txBody>
       </p:sp>
       <p:sp>
         <p:nvSpPr>
@@ -12059,7 +12536,7 @@
           <a:bodyPr wrap="square" lIns="0" tIns="0" rIns="0" bIns="0" rtlCol="0" anchor="ctr"/>
           <a:lstStyle/>
           <a:p>
-            <a:pPr algn="ctr" indent="0" marL="0">
+            <a:pPr marL="0" indent="0" algn="ctr">
               <a:buNone/>
             </a:pPr>
             <a:r>
@@ -12101,6 +12578,13 @@
             <a:prstDash val="solid"/>
           </a:ln>
         </p:spPr>
+        <p:txBody>
+          <a:bodyPr/>
+          <a:lstStyle/>
+          <a:p>
+            <a:endParaRPr lang="ja-JP" altLang="en-US"/>
+          </a:p>
+        </p:txBody>
       </p:sp>
       <p:sp>
         <p:nvSpPr>
@@ -12123,7 +12607,7 @@
           <a:bodyPr wrap="square" lIns="0" tIns="0" rIns="0" bIns="0" rtlCol="0" anchor="ctr"/>
           <a:lstStyle/>
           <a:p>
-            <a:pPr indent="0" marL="0">
+            <a:pPr marL="0" indent="0">
               <a:buNone/>
             </a:pPr>
             <a:r>
@@ -12140,7 +12624,7 @@
             <a:endParaRPr lang="en-US" sz="800" dirty="0"/>
           </a:p>
           <a:p>
-            <a:pPr indent="0" marL="0">
+            <a:pPr marL="0" indent="0">
               <a:buNone/>
             </a:pPr>
             <a:r>
@@ -12182,6 +12666,13 @@
             <a:prstDash val="solid"/>
           </a:ln>
         </p:spPr>
+        <p:txBody>
+          <a:bodyPr/>
+          <a:lstStyle/>
+          <a:p>
+            <a:endParaRPr lang="ja-JP" altLang="en-US"/>
+          </a:p>
+        </p:txBody>
       </p:sp>
       <p:sp>
         <p:nvSpPr>
@@ -12207,6 +12698,13 @@
             <a:prstDash val="solid"/>
           </a:ln>
         </p:spPr>
+        <p:txBody>
+          <a:bodyPr/>
+          <a:lstStyle/>
+          <a:p>
+            <a:endParaRPr lang="ja-JP" altLang="en-US"/>
+          </a:p>
+        </p:txBody>
       </p:sp>
       <p:sp>
         <p:nvSpPr>
@@ -12232,6 +12730,13 @@
             <a:prstDash val="solid"/>
           </a:ln>
         </p:spPr>
+        <p:txBody>
+          <a:bodyPr/>
+          <a:lstStyle/>
+          <a:p>
+            <a:endParaRPr lang="ja-JP" altLang="en-US"/>
+          </a:p>
+        </p:txBody>
       </p:sp>
       <p:sp>
         <p:nvSpPr>
@@ -12257,6 +12762,13 @@
             <a:prstDash val="solid"/>
           </a:ln>
         </p:spPr>
+        <p:txBody>
+          <a:bodyPr/>
+          <a:lstStyle/>
+          <a:p>
+            <a:endParaRPr lang="ja-JP" altLang="en-US"/>
+          </a:p>
+        </p:txBody>
       </p:sp>
       <p:sp>
         <p:nvSpPr>
@@ -12282,6 +12794,13 @@
             <a:prstDash val="solid"/>
           </a:ln>
         </p:spPr>
+        <p:txBody>
+          <a:bodyPr/>
+          <a:lstStyle/>
+          <a:p>
+            <a:endParaRPr lang="ja-JP" altLang="en-US"/>
+          </a:p>
+        </p:txBody>
       </p:sp>
       <p:sp>
         <p:nvSpPr>
@@ -12302,6 +12821,13 @@
           </a:solidFill>
           <a:ln/>
         </p:spPr>
+        <p:txBody>
+          <a:bodyPr/>
+          <a:lstStyle/>
+          <a:p>
+            <a:endParaRPr lang="ja-JP" altLang="en-US"/>
+          </a:p>
+        </p:txBody>
       </p:sp>
       <p:sp>
         <p:nvSpPr>
@@ -12324,7 +12850,7 @@
           <a:bodyPr wrap="square" lIns="0" tIns="0" rIns="0" bIns="0" rtlCol="0" anchor="ctr"/>
           <a:lstStyle/>
           <a:p>
-            <a:pPr algn="ctr" indent="0" marL="0">
+            <a:pPr marL="0" indent="0" algn="ctr">
               <a:buNone/>
             </a:pPr>
             <a:r>
@@ -12366,6 +12892,13 @@
             <a:prstDash val="solid"/>
           </a:ln>
         </p:spPr>
+        <p:txBody>
+          <a:bodyPr/>
+          <a:lstStyle/>
+          <a:p>
+            <a:endParaRPr lang="ja-JP" altLang="en-US"/>
+          </a:p>
+        </p:txBody>
       </p:sp>
       <p:sp>
         <p:nvSpPr>
@@ -12388,7 +12921,7 @@
           <a:bodyPr wrap="square" lIns="0" tIns="0" rIns="0" bIns="0" rtlCol="0" anchor="ctr"/>
           <a:lstStyle/>
           <a:p>
-            <a:pPr indent="0" marL="0">
+            <a:pPr marL="0" indent="0">
               <a:buNone/>
             </a:pPr>
             <a:r>
@@ -12405,7 +12938,7 @@
             <a:endParaRPr lang="en-US" sz="800" dirty="0"/>
           </a:p>
           <a:p>
-            <a:pPr indent="0" marL="0">
+            <a:pPr marL="0" indent="0">
               <a:buNone/>
             </a:pPr>
             <a:r>
@@ -12447,6 +12980,13 @@
             <a:prstDash val="solid"/>
           </a:ln>
         </p:spPr>
+        <p:txBody>
+          <a:bodyPr/>
+          <a:lstStyle/>
+          <a:p>
+            <a:endParaRPr lang="ja-JP" altLang="en-US"/>
+          </a:p>
+        </p:txBody>
       </p:sp>
       <p:sp>
         <p:nvSpPr>
@@ -12472,6 +13012,13 @@
             <a:prstDash val="solid"/>
           </a:ln>
         </p:spPr>
+        <p:txBody>
+          <a:bodyPr/>
+          <a:lstStyle/>
+          <a:p>
+            <a:endParaRPr lang="ja-JP" altLang="en-US"/>
+          </a:p>
+        </p:txBody>
       </p:sp>
       <p:sp>
         <p:nvSpPr>
@@ -12497,6 +13044,13 @@
             <a:prstDash val="solid"/>
           </a:ln>
         </p:spPr>
+        <p:txBody>
+          <a:bodyPr/>
+          <a:lstStyle/>
+          <a:p>
+            <a:endParaRPr lang="ja-JP" altLang="en-US"/>
+          </a:p>
+        </p:txBody>
       </p:sp>
       <p:sp>
         <p:nvSpPr>
@@ -12522,6 +13076,13 @@
             <a:prstDash val="solid"/>
           </a:ln>
         </p:spPr>
+        <p:txBody>
+          <a:bodyPr/>
+          <a:lstStyle/>
+          <a:p>
+            <a:endParaRPr lang="ja-JP" altLang="en-US"/>
+          </a:p>
+        </p:txBody>
       </p:sp>
       <p:sp>
         <p:nvSpPr>
@@ -12547,6 +13108,13 @@
             <a:prstDash val="solid"/>
           </a:ln>
         </p:spPr>
+        <p:txBody>
+          <a:bodyPr/>
+          <a:lstStyle/>
+          <a:p>
+            <a:endParaRPr lang="ja-JP" altLang="en-US"/>
+          </a:p>
+        </p:txBody>
       </p:sp>
       <p:sp>
         <p:nvSpPr>
@@ -12567,6 +13135,13 @@
           </a:solidFill>
           <a:ln/>
         </p:spPr>
+        <p:txBody>
+          <a:bodyPr/>
+          <a:lstStyle/>
+          <a:p>
+            <a:endParaRPr lang="ja-JP" altLang="en-US"/>
+          </a:p>
+        </p:txBody>
       </p:sp>
       <p:sp>
         <p:nvSpPr>
@@ -12589,7 +13164,7 @@
           <a:bodyPr wrap="square" lIns="0" tIns="0" rIns="0" bIns="0" rtlCol="0" anchor="ctr"/>
           <a:lstStyle/>
           <a:p>
-            <a:pPr algn="ctr" indent="0" marL="0">
+            <a:pPr marL="0" indent="0" algn="ctr">
               <a:buNone/>
             </a:pPr>
             <a:r>
@@ -12631,6 +13206,13 @@
             <a:prstDash val="solid"/>
           </a:ln>
         </p:spPr>
+        <p:txBody>
+          <a:bodyPr/>
+          <a:lstStyle/>
+          <a:p>
+            <a:endParaRPr lang="ja-JP" altLang="en-US"/>
+          </a:p>
+        </p:txBody>
       </p:sp>
       <p:sp>
         <p:nvSpPr>
@@ -12653,7 +13235,7 @@
           <a:bodyPr wrap="square" lIns="0" tIns="0" rIns="0" bIns="0" rtlCol="0" anchor="ctr"/>
           <a:lstStyle/>
           <a:p>
-            <a:pPr indent="0" marL="0">
+            <a:pPr marL="0" indent="0">
               <a:buNone/>
             </a:pPr>
             <a:r>
@@ -12670,7 +13252,7 @@
             <a:endParaRPr lang="en-US" sz="800" dirty="0"/>
           </a:p>
           <a:p>
-            <a:pPr indent="0" marL="0">
+            <a:pPr marL="0" indent="0">
               <a:buNone/>
             </a:pPr>
             <a:r>
@@ -12712,6 +13294,13 @@
             <a:prstDash val="solid"/>
           </a:ln>
         </p:spPr>
+        <p:txBody>
+          <a:bodyPr/>
+          <a:lstStyle/>
+          <a:p>
+            <a:endParaRPr lang="ja-JP" altLang="en-US"/>
+          </a:p>
+        </p:txBody>
       </p:sp>
       <p:sp>
         <p:nvSpPr>
@@ -12737,6 +13326,13 @@
             <a:prstDash val="solid"/>
           </a:ln>
         </p:spPr>
+        <p:txBody>
+          <a:bodyPr/>
+          <a:lstStyle/>
+          <a:p>
+            <a:endParaRPr lang="ja-JP" altLang="en-US"/>
+          </a:p>
+        </p:txBody>
       </p:sp>
       <p:sp>
         <p:nvSpPr>
@@ -12762,6 +13358,13 @@
             <a:prstDash val="solid"/>
           </a:ln>
         </p:spPr>
+        <p:txBody>
+          <a:bodyPr/>
+          <a:lstStyle/>
+          <a:p>
+            <a:endParaRPr lang="ja-JP" altLang="en-US"/>
+          </a:p>
+        </p:txBody>
       </p:sp>
       <p:sp>
         <p:nvSpPr>
@@ -12787,6 +13390,13 @@
             <a:prstDash val="solid"/>
           </a:ln>
         </p:spPr>
+        <p:txBody>
+          <a:bodyPr/>
+          <a:lstStyle/>
+          <a:p>
+            <a:endParaRPr lang="ja-JP" altLang="en-US"/>
+          </a:p>
+        </p:txBody>
       </p:sp>
       <p:sp>
         <p:nvSpPr>
@@ -12812,6 +13422,13 @@
             <a:prstDash val="solid"/>
           </a:ln>
         </p:spPr>
+        <p:txBody>
+          <a:bodyPr/>
+          <a:lstStyle/>
+          <a:p>
+            <a:endParaRPr lang="ja-JP" altLang="en-US"/>
+          </a:p>
+        </p:txBody>
       </p:sp>
       <p:sp>
         <p:nvSpPr>
@@ -12832,6 +13449,13 @@
           </a:solidFill>
           <a:ln/>
         </p:spPr>
+        <p:txBody>
+          <a:bodyPr/>
+          <a:lstStyle/>
+          <a:p>
+            <a:endParaRPr lang="ja-JP" altLang="en-US"/>
+          </a:p>
+        </p:txBody>
       </p:sp>
       <p:sp>
         <p:nvSpPr>
@@ -12854,7 +13478,7 @@
           <a:bodyPr wrap="square" lIns="0" tIns="0" rIns="0" bIns="0" rtlCol="0" anchor="ctr"/>
           <a:lstStyle/>
           <a:p>
-            <a:pPr algn="ctr" indent="0" marL="0">
+            <a:pPr marL="0" indent="0" algn="ctr">
               <a:buNone/>
             </a:pPr>
             <a:r>
@@ -12896,6 +13520,13 @@
             <a:prstDash val="solid"/>
           </a:ln>
         </p:spPr>
+        <p:txBody>
+          <a:bodyPr/>
+          <a:lstStyle/>
+          <a:p>
+            <a:endParaRPr lang="ja-JP" altLang="en-US"/>
+          </a:p>
+        </p:txBody>
       </p:sp>
       <p:sp>
         <p:nvSpPr>
@@ -12918,7 +13549,7 @@
           <a:bodyPr wrap="square" lIns="0" tIns="0" rIns="0" bIns="0" rtlCol="0" anchor="ctr"/>
           <a:lstStyle/>
           <a:p>
-            <a:pPr indent="0" marL="0">
+            <a:pPr marL="0" indent="0">
               <a:buNone/>
             </a:pPr>
             <a:r>
@@ -12960,6 +13591,13 @@
             <a:prstDash val="solid"/>
           </a:ln>
         </p:spPr>
+        <p:txBody>
+          <a:bodyPr/>
+          <a:lstStyle/>
+          <a:p>
+            <a:endParaRPr lang="ja-JP" altLang="en-US"/>
+          </a:p>
+        </p:txBody>
       </p:sp>
       <p:sp>
         <p:nvSpPr>
@@ -12985,6 +13623,13 @@
             <a:prstDash val="solid"/>
           </a:ln>
         </p:spPr>
+        <p:txBody>
+          <a:bodyPr/>
+          <a:lstStyle/>
+          <a:p>
+            <a:endParaRPr lang="ja-JP" altLang="en-US"/>
+          </a:p>
+        </p:txBody>
       </p:sp>
       <p:sp>
         <p:nvSpPr>
@@ -13010,6 +13655,13 @@
             <a:prstDash val="solid"/>
           </a:ln>
         </p:spPr>
+        <p:txBody>
+          <a:bodyPr/>
+          <a:lstStyle/>
+          <a:p>
+            <a:endParaRPr lang="ja-JP" altLang="en-US"/>
+          </a:p>
+        </p:txBody>
       </p:sp>
       <p:sp>
         <p:nvSpPr>
@@ -13035,6 +13687,13 @@
             <a:prstDash val="solid"/>
           </a:ln>
         </p:spPr>
+        <p:txBody>
+          <a:bodyPr/>
+          <a:lstStyle/>
+          <a:p>
+            <a:endParaRPr lang="ja-JP" altLang="en-US"/>
+          </a:p>
+        </p:txBody>
       </p:sp>
       <p:sp>
         <p:nvSpPr>
@@ -13060,6 +13719,13 @@
             <a:prstDash val="solid"/>
           </a:ln>
         </p:spPr>
+        <p:txBody>
+          <a:bodyPr/>
+          <a:lstStyle/>
+          <a:p>
+            <a:endParaRPr lang="ja-JP" altLang="en-US"/>
+          </a:p>
+        </p:txBody>
       </p:sp>
       <p:sp>
         <p:nvSpPr>
@@ -13080,6 +13746,13 @@
           </a:solidFill>
           <a:ln/>
         </p:spPr>
+        <p:txBody>
+          <a:bodyPr/>
+          <a:lstStyle/>
+          <a:p>
+            <a:endParaRPr lang="ja-JP" altLang="en-US"/>
+          </a:p>
+        </p:txBody>
       </p:sp>
       <p:sp>
         <p:nvSpPr>
@@ -13102,7 +13775,7 @@
           <a:bodyPr wrap="square" lIns="0" tIns="0" rIns="0" bIns="0" rtlCol="0" anchor="ctr"/>
           <a:lstStyle/>
           <a:p>
-            <a:pPr algn="ctr" indent="0" marL="0">
+            <a:pPr marL="0" indent="0" algn="ctr">
               <a:buNone/>
             </a:pPr>
             <a:r>
@@ -13144,6 +13817,13 @@
             <a:prstDash val="solid"/>
           </a:ln>
         </p:spPr>
+        <p:txBody>
+          <a:bodyPr/>
+          <a:lstStyle/>
+          <a:p>
+            <a:endParaRPr lang="ja-JP" altLang="en-US"/>
+          </a:p>
+        </p:txBody>
       </p:sp>
       <p:sp>
         <p:nvSpPr>
@@ -13166,7 +13846,7 @@
           <a:bodyPr wrap="square" lIns="0" tIns="0" rIns="0" bIns="0" rtlCol="0" anchor="ctr"/>
           <a:lstStyle/>
           <a:p>
-            <a:pPr indent="0" marL="0">
+            <a:pPr marL="0" indent="0">
               <a:buNone/>
             </a:pPr>
             <a:r>
@@ -13208,6 +13888,13 @@
             <a:prstDash val="solid"/>
           </a:ln>
         </p:spPr>
+        <p:txBody>
+          <a:bodyPr/>
+          <a:lstStyle/>
+          <a:p>
+            <a:endParaRPr lang="ja-JP" altLang="en-US"/>
+          </a:p>
+        </p:txBody>
       </p:sp>
       <p:sp>
         <p:nvSpPr>
@@ -13233,6 +13920,13 @@
             <a:prstDash val="solid"/>
           </a:ln>
         </p:spPr>
+        <p:txBody>
+          <a:bodyPr/>
+          <a:lstStyle/>
+          <a:p>
+            <a:endParaRPr lang="ja-JP" altLang="en-US"/>
+          </a:p>
+        </p:txBody>
       </p:sp>
       <p:sp>
         <p:nvSpPr>
@@ -13258,6 +13952,13 @@
             <a:prstDash val="solid"/>
           </a:ln>
         </p:spPr>
+        <p:txBody>
+          <a:bodyPr/>
+          <a:lstStyle/>
+          <a:p>
+            <a:endParaRPr lang="ja-JP" altLang="en-US"/>
+          </a:p>
+        </p:txBody>
       </p:sp>
       <p:sp>
         <p:nvSpPr>
@@ -13283,6 +13984,13 @@
             <a:prstDash val="solid"/>
           </a:ln>
         </p:spPr>
+        <p:txBody>
+          <a:bodyPr/>
+          <a:lstStyle/>
+          <a:p>
+            <a:endParaRPr lang="ja-JP" altLang="en-US"/>
+          </a:p>
+        </p:txBody>
       </p:sp>
       <p:sp>
         <p:nvSpPr>
@@ -13308,6 +14016,13 @@
             <a:prstDash val="solid"/>
           </a:ln>
         </p:spPr>
+        <p:txBody>
+          <a:bodyPr/>
+          <a:lstStyle/>
+          <a:p>
+            <a:endParaRPr lang="ja-JP" altLang="en-US"/>
+          </a:p>
+        </p:txBody>
       </p:sp>
       <p:sp>
         <p:nvSpPr>
@@ -13328,6 +14043,13 @@
           </a:solidFill>
           <a:ln/>
         </p:spPr>
+        <p:txBody>
+          <a:bodyPr/>
+          <a:lstStyle/>
+          <a:p>
+            <a:endParaRPr lang="ja-JP" altLang="en-US"/>
+          </a:p>
+        </p:txBody>
       </p:sp>
       <p:sp>
         <p:nvSpPr>
@@ -13350,7 +14072,7 @@
           <a:bodyPr wrap="square" lIns="0" tIns="0" rIns="0" bIns="0" rtlCol="0" anchor="ctr"/>
           <a:lstStyle/>
           <a:p>
-            <a:pPr algn="ctr" indent="0" marL="0">
+            <a:pPr marL="0" indent="0" algn="ctr">
               <a:buNone/>
             </a:pPr>
             <a:r>
@@ -13387,6 +14109,13 @@
           </a:solidFill>
           <a:ln/>
         </p:spPr>
+        <p:txBody>
+          <a:bodyPr/>
+          <a:lstStyle/>
+          <a:p>
+            <a:endParaRPr lang="ja-JP" altLang="en-US"/>
+          </a:p>
+        </p:txBody>
       </p:sp>
       <p:sp>
         <p:nvSpPr>
@@ -13409,7 +14138,7 @@
           <a:bodyPr wrap="square" lIns="0" tIns="0" rIns="0" bIns="0" rtlCol="0" anchor="ctr"/>
           <a:lstStyle/>
           <a:p>
-            <a:pPr indent="0" marL="0">
+            <a:pPr marL="0" indent="0">
               <a:buNone/>
             </a:pPr>
             <a:r>
@@ -13446,6 +14175,13 @@
           </a:solidFill>
           <a:ln/>
         </p:spPr>
+        <p:txBody>
+          <a:bodyPr/>
+          <a:lstStyle/>
+          <a:p>
+            <a:endParaRPr lang="ja-JP" altLang="en-US"/>
+          </a:p>
+        </p:txBody>
       </p:sp>
       <p:sp>
         <p:nvSpPr>
@@ -13468,7 +14204,7 @@
           <a:bodyPr wrap="square" lIns="0" tIns="0" rIns="0" bIns="0" rtlCol="0" anchor="ctr"/>
           <a:lstStyle/>
           <a:p>
-            <a:pPr indent="0" marL="0">
+            <a:pPr marL="0" indent="0">
               <a:buNone/>
             </a:pPr>
             <a:r>
@@ -13505,6 +14241,13 @@
           </a:solidFill>
           <a:ln/>
         </p:spPr>
+        <p:txBody>
+          <a:bodyPr/>
+          <a:lstStyle/>
+          <a:p>
+            <a:endParaRPr lang="ja-JP" altLang="en-US"/>
+          </a:p>
+        </p:txBody>
       </p:sp>
       <p:sp>
         <p:nvSpPr>
@@ -13527,7 +14270,7 @@
           <a:bodyPr wrap="square" lIns="0" tIns="0" rIns="0" bIns="0" rtlCol="0" anchor="ctr"/>
           <a:lstStyle/>
           <a:p>
-            <a:pPr indent="0" marL="0">
+            <a:pPr marL="0" indent="0">
               <a:buNone/>
             </a:pPr>
             <a:r>
@@ -13564,6 +14307,13 @@
           </a:solidFill>
           <a:ln/>
         </p:spPr>
+        <p:txBody>
+          <a:bodyPr/>
+          <a:lstStyle/>
+          <a:p>
+            <a:endParaRPr lang="ja-JP" altLang="en-US"/>
+          </a:p>
+        </p:txBody>
       </p:sp>
       <p:sp>
         <p:nvSpPr>
@@ -13586,7 +14336,7 @@
           <a:bodyPr wrap="square" lIns="0" tIns="0" rIns="0" bIns="0" rtlCol="0" anchor="ctr"/>
           <a:lstStyle/>
           <a:p>
-            <a:pPr indent="0" marL="0">
+            <a:pPr marL="0" indent="0">
               <a:buNone/>
             </a:pPr>
             <a:r>
@@ -13623,6 +14373,13 @@
           </a:solidFill>
           <a:ln/>
         </p:spPr>
+        <p:txBody>
+          <a:bodyPr/>
+          <a:lstStyle/>
+          <a:p>
+            <a:endParaRPr lang="ja-JP" altLang="en-US"/>
+          </a:p>
+        </p:txBody>
       </p:sp>
       <p:sp>
         <p:nvSpPr>
@@ -13645,7 +14402,7 @@
           <a:bodyPr wrap="square" lIns="0" tIns="0" rIns="0" bIns="0" rtlCol="0" anchor="ctr"/>
           <a:lstStyle/>
           <a:p>
-            <a:pPr indent="0" marL="0">
+            <a:pPr marL="0" indent="0">
               <a:buNone/>
             </a:pPr>
             <a:r>
@@ -13679,6 +14436,7 @@
         <a:solidFill>
           <a:srgbClr val="FFFFFF"/>
         </a:solidFill>
+        <a:effectLst/>
       </p:bgPr>
     </p:bg>
     <p:spTree>
@@ -13697,94 +14455,7 @@
       </p:grpSpPr>
       <p:pic>
         <p:nvPicPr>
-          <p:cNvPr id="2" name="Image 0" descr="/mnt/skills/user/luvina-ppt/assets/decoration_dots.png">    </p:cNvPr>
-          <p:cNvPicPr>
-            <a:picLocks noChangeAspect="1"/>
-          </p:cNvPicPr>
-          <p:nvPr/>
-        </p:nvPicPr>
-        <p:blipFill>
-          <a:blip r:embed="rId1"/>
-          <a:stretch>
-            <a:fillRect/>
-          </a:stretch>
-        </p:blipFill>
-        <p:spPr>
-          <a:xfrm>
-            <a:off x="0" y="0"/>
-            <a:ext cx="3904488" cy="2880360"/>
-          </a:xfrm>
-          <a:prstGeom prst="rect">
-            <a:avLst/>
-          </a:prstGeom>
-        </p:spPr>
-      </p:pic>
-      <p:pic>
-        <p:nvPicPr>
-          <p:cNvPr id="3" name="Image 1" descr="/mnt/skills/user/luvina-ppt/assets/luvina_badge.png">    </p:cNvPr>
-          <p:cNvPicPr>
-            <a:picLocks noChangeAspect="1"/>
-          </p:cNvPicPr>
-          <p:nvPr/>
-        </p:nvPicPr>
-        <p:blipFill>
-          <a:blip r:embed="rId2"/>
-          <a:stretch>
-            <a:fillRect/>
-          </a:stretch>
-        </p:blipFill>
-        <p:spPr>
-          <a:xfrm>
-            <a:off x="109728" y="109728"/>
-            <a:ext cx="1874520" cy="466344"/>
-          </a:xfrm>
-          <a:prstGeom prst="rect">
-            <a:avLst/>
-          </a:prstGeom>
-        </p:spPr>
-      </p:pic>
-      <p:sp>
-        <p:nvSpPr>
-          <p:cNvPr id="4" name="Text 0"/>
-          <p:cNvSpPr/>
-          <p:nvPr/>
-        </p:nvSpPr>
-        <p:spPr>
-          <a:xfrm>
-            <a:off x="438912" y="173736"/>
-            <a:ext cx="1216152" cy="329184"/>
-          </a:xfrm>
-          <a:prstGeom prst="rect">
-            <a:avLst/>
-          </a:prstGeom>
-          <a:noFill/>
-          <a:ln/>
-        </p:spPr>
-        <p:txBody>
-          <a:bodyPr wrap="square" lIns="0" tIns="0" rIns="0" bIns="0" rtlCol="0" anchor="ctr"/>
-          <a:lstStyle/>
-          <a:p>
-            <a:pPr indent="0" marL="0">
-              <a:buNone/>
-            </a:pPr>
-            <a:r>
-              <a:rPr lang="en-US" sz="1600" b="1" dirty="0">
-                <a:solidFill>
-                  <a:srgbClr val="FFFFFF"/>
-                </a:solidFill>
-                <a:latin typeface="Arial Black" pitchFamily="34" charset="0"/>
-                <a:ea typeface="Arial Black" pitchFamily="34" charset="-122"/>
-                <a:cs typeface="Arial Black" pitchFamily="34" charset="-120"/>
-              </a:rPr>
-              <a:t>LUVINA</a:t>
-            </a:r>
-            <a:endParaRPr lang="en-US" sz="1600" dirty="0"/>
-          </a:p>
-        </p:txBody>
-      </p:sp>
-      <p:pic>
-        <p:nvPicPr>
-          <p:cNvPr id="5" name="Image 2" descr="/mnt/skills/user/luvina-ppt/assets/luvina_logo.png">    </p:cNvPr>
+          <p:cNvPr id="2" name="Image 0" descr="/mnt/skills/user/luvina-ppt/assets/decoration_dots.png"/>
           <p:cNvPicPr>
             <a:picLocks noChangeAspect="1"/>
           </p:cNvPicPr>
@@ -13798,6 +14469,93 @@
         </p:blipFill>
         <p:spPr>
           <a:xfrm>
+            <a:off x="0" y="0"/>
+            <a:ext cx="3904488" cy="2880360"/>
+          </a:xfrm>
+          <a:prstGeom prst="rect">
+            <a:avLst/>
+          </a:prstGeom>
+        </p:spPr>
+      </p:pic>
+      <p:pic>
+        <p:nvPicPr>
+          <p:cNvPr id="3" name="Image 1" descr="/mnt/skills/user/luvina-ppt/assets/luvina_badge.png"/>
+          <p:cNvPicPr>
+            <a:picLocks noChangeAspect="1"/>
+          </p:cNvPicPr>
+          <p:nvPr/>
+        </p:nvPicPr>
+        <p:blipFill>
+          <a:blip r:embed="rId4"/>
+          <a:stretch>
+            <a:fillRect/>
+          </a:stretch>
+        </p:blipFill>
+        <p:spPr>
+          <a:xfrm>
+            <a:off x="109728" y="109728"/>
+            <a:ext cx="1874520" cy="466344"/>
+          </a:xfrm>
+          <a:prstGeom prst="rect">
+            <a:avLst/>
+          </a:prstGeom>
+        </p:spPr>
+      </p:pic>
+      <p:sp>
+        <p:nvSpPr>
+          <p:cNvPr id="4" name="Text 0"/>
+          <p:cNvSpPr/>
+          <p:nvPr/>
+        </p:nvSpPr>
+        <p:spPr>
+          <a:xfrm>
+            <a:off x="438912" y="173736"/>
+            <a:ext cx="1216152" cy="329184"/>
+          </a:xfrm>
+          <a:prstGeom prst="rect">
+            <a:avLst/>
+          </a:prstGeom>
+          <a:noFill/>
+          <a:ln/>
+        </p:spPr>
+        <p:txBody>
+          <a:bodyPr wrap="square" lIns="0" tIns="0" rIns="0" bIns="0" rtlCol="0" anchor="ctr"/>
+          <a:lstStyle/>
+          <a:p>
+            <a:pPr marL="0" indent="0">
+              <a:buNone/>
+            </a:pPr>
+            <a:r>
+              <a:rPr lang="en-US" sz="1600" b="1" dirty="0">
+                <a:solidFill>
+                  <a:srgbClr val="FFFFFF"/>
+                </a:solidFill>
+                <a:latin typeface="Arial Black" pitchFamily="34" charset="0"/>
+                <a:ea typeface="Arial Black" pitchFamily="34" charset="-122"/>
+                <a:cs typeface="Arial Black" pitchFamily="34" charset="-120"/>
+              </a:rPr>
+              <a:t>LUVINA</a:t>
+            </a:r>
+            <a:endParaRPr lang="en-US" sz="1600" dirty="0"/>
+          </a:p>
+        </p:txBody>
+      </p:sp>
+      <p:pic>
+        <p:nvPicPr>
+          <p:cNvPr id="5" name="Image 2" descr="/mnt/skills/user/luvina-ppt/assets/luvina_logo.png"/>
+          <p:cNvPicPr>
+            <a:picLocks noChangeAspect="1"/>
+          </p:cNvPicPr>
+          <p:nvPr/>
+        </p:nvPicPr>
+        <p:blipFill>
+          <a:blip r:embed="rId5"/>
+          <a:stretch>
+            <a:fillRect/>
+          </a:stretch>
+        </p:blipFill>
+        <p:spPr>
+          <a:xfrm>
             <a:off x="8924544" y="109728"/>
             <a:ext cx="932688" cy="466344"/>
           </a:xfrm>
@@ -13825,6 +14583,13 @@
           </a:solidFill>
           <a:ln/>
         </p:spPr>
+        <p:txBody>
+          <a:bodyPr/>
+          <a:lstStyle/>
+          <a:p>
+            <a:endParaRPr lang="ja-JP" altLang="en-US"/>
+          </a:p>
+        </p:txBody>
       </p:sp>
       <p:sp>
         <p:nvSpPr>
@@ -13847,7 +14612,7 @@
           <a:bodyPr wrap="square" lIns="0" tIns="0" rIns="0" bIns="0" rtlCol="0" anchor="ctr"/>
           <a:lstStyle/>
           <a:p>
-            <a:pPr indent="0" marL="0">
+            <a:pPr marL="0" indent="0">
               <a:buNone/>
             </a:pPr>
             <a:r>
@@ -13884,6 +14649,13 @@
           </a:solidFill>
           <a:ln/>
         </p:spPr>
+        <p:txBody>
+          <a:bodyPr/>
+          <a:lstStyle/>
+          <a:p>
+            <a:endParaRPr lang="ja-JP" altLang="en-US"/>
+          </a:p>
+        </p:txBody>
       </p:sp>
       <p:sp>
         <p:nvSpPr>
@@ -13906,7 +14678,7 @@
           <a:bodyPr wrap="square" lIns="0" tIns="0" rIns="0" bIns="0" rtlCol="0" anchor="ctr"/>
           <a:lstStyle/>
           <a:p>
-            <a:pPr indent="0" marL="0">
+            <a:pPr marL="0" indent="0">
               <a:buNone/>
             </a:pPr>
             <a:r>
@@ -13945,13 +14717,20 @@
             <a:prstDash val="solid"/>
           </a:ln>
           <a:effectLst>
-            <a:outerShdw sx="100000" sy="100000" kx="0" ky="0" algn="bl" rotWithShape="0" blurRad="38100" dist="12700" dir="8100000">
+            <a:outerShdw blurRad="38100" dist="12700" dir="8100000" algn="bl" rotWithShape="0">
               <a:srgbClr val="000000">
                 <a:alpha val="8000"/>
               </a:srgbClr>
             </a:outerShdw>
           </a:effectLst>
         </p:spPr>
+        <p:txBody>
+          <a:bodyPr/>
+          <a:lstStyle/>
+          <a:p>
+            <a:endParaRPr lang="ja-JP" altLang="en-US"/>
+          </a:p>
+        </p:txBody>
       </p:sp>
       <p:sp>
         <p:nvSpPr>
@@ -13972,6 +14751,13 @@
           </a:solidFill>
           <a:ln/>
         </p:spPr>
+        <p:txBody>
+          <a:bodyPr/>
+          <a:lstStyle/>
+          <a:p>
+            <a:endParaRPr lang="ja-JP" altLang="en-US"/>
+          </a:p>
+        </p:txBody>
       </p:sp>
       <p:sp>
         <p:nvSpPr>
@@ -13994,7 +14780,7 @@
           <a:bodyPr wrap="square" lIns="0" tIns="0" rIns="0" bIns="0" rtlCol="0" anchor="ctr"/>
           <a:lstStyle/>
           <a:p>
-            <a:pPr algn="ctr" indent="0" marL="0">
+            <a:pPr marL="0" indent="0" algn="ctr">
               <a:buNone/>
             </a:pPr>
             <a:r>
@@ -14031,6 +14817,13 @@
           </a:solidFill>
           <a:ln/>
         </p:spPr>
+        <p:txBody>
+          <a:bodyPr/>
+          <a:lstStyle/>
+          <a:p>
+            <a:endParaRPr lang="ja-JP" altLang="en-US"/>
+          </a:p>
+        </p:txBody>
       </p:sp>
       <p:sp>
         <p:nvSpPr>
@@ -14053,7 +14846,7 @@
           <a:bodyPr wrap="square" lIns="0" tIns="0" rIns="0" bIns="0" rtlCol="0" anchor="ctr"/>
           <a:lstStyle/>
           <a:p>
-            <a:pPr algn="ctr" indent="0" marL="0">
+            <a:pPr marL="0" indent="0" algn="ctr">
               <a:buNone/>
             </a:pPr>
             <a:r>
@@ -14092,7 +14885,7 @@
           <a:bodyPr wrap="square" lIns="0" tIns="0" rIns="0" bIns="0" rtlCol="0" anchor="ctr"/>
           <a:lstStyle/>
           <a:p>
-            <a:pPr indent="0" marL="0">
+            <a:pPr marL="0" indent="0">
               <a:buNone/>
             </a:pPr>
             <a:r>
@@ -14131,7 +14924,7 @@
           <a:bodyPr wrap="square" lIns="0" tIns="0" rIns="0" bIns="0" rtlCol="0" anchor="ctr"/>
           <a:lstStyle/>
           <a:p>
-            <a:pPr indent="0" marL="0">
+            <a:pPr marL="0" indent="0">
               <a:buNone/>
             </a:pPr>
             <a:r>
@@ -14173,13 +14966,20 @@
             <a:prstDash val="solid"/>
           </a:ln>
           <a:effectLst>
-            <a:outerShdw sx="100000" sy="100000" kx="0" ky="0" algn="bl" rotWithShape="0" blurRad="38100" dist="12700" dir="8100000">
+            <a:outerShdw blurRad="38100" dist="12700" dir="8100000" algn="bl" rotWithShape="0">
               <a:srgbClr val="000000">
                 <a:alpha val="8000"/>
               </a:srgbClr>
             </a:outerShdw>
           </a:effectLst>
         </p:spPr>
+        <p:txBody>
+          <a:bodyPr/>
+          <a:lstStyle/>
+          <a:p>
+            <a:endParaRPr lang="ja-JP" altLang="en-US"/>
+          </a:p>
+        </p:txBody>
       </p:sp>
       <p:sp>
         <p:nvSpPr>
@@ -14200,6 +15000,13 @@
           </a:solidFill>
           <a:ln/>
         </p:spPr>
+        <p:txBody>
+          <a:bodyPr/>
+          <a:lstStyle/>
+          <a:p>
+            <a:endParaRPr lang="ja-JP" altLang="en-US"/>
+          </a:p>
+        </p:txBody>
       </p:sp>
       <p:sp>
         <p:nvSpPr>
@@ -14222,7 +15029,7 @@
           <a:bodyPr wrap="square" lIns="0" tIns="0" rIns="0" bIns="0" rtlCol="0" anchor="ctr"/>
           <a:lstStyle/>
           <a:p>
-            <a:pPr algn="ctr" indent="0" marL="0">
+            <a:pPr marL="0" indent="0" algn="ctr">
               <a:buNone/>
             </a:pPr>
             <a:r>
@@ -14259,6 +15066,13 @@
           </a:solidFill>
           <a:ln/>
         </p:spPr>
+        <p:txBody>
+          <a:bodyPr/>
+          <a:lstStyle/>
+          <a:p>
+            <a:endParaRPr lang="ja-JP" altLang="en-US"/>
+          </a:p>
+        </p:txBody>
       </p:sp>
       <p:sp>
         <p:nvSpPr>
@@ -14281,7 +15095,7 @@
           <a:bodyPr wrap="square" lIns="0" tIns="0" rIns="0" bIns="0" rtlCol="0" anchor="ctr"/>
           <a:lstStyle/>
           <a:p>
-            <a:pPr algn="ctr" indent="0" marL="0">
+            <a:pPr marL="0" indent="0" algn="ctr">
               <a:buNone/>
             </a:pPr>
             <a:r>
@@ -14320,7 +15134,7 @@
           <a:bodyPr wrap="square" lIns="0" tIns="0" rIns="0" bIns="0" rtlCol="0" anchor="ctr"/>
           <a:lstStyle/>
           <a:p>
-            <a:pPr indent="0" marL="0">
+            <a:pPr marL="0" indent="0">
               <a:buNone/>
             </a:pPr>
             <a:r>
@@ -14359,7 +15173,7 @@
           <a:bodyPr wrap="square" lIns="0" tIns="0" rIns="0" bIns="0" rtlCol="0" anchor="ctr"/>
           <a:lstStyle/>
           <a:p>
-            <a:pPr indent="0" marL="0">
+            <a:pPr marL="0" indent="0">
               <a:buNone/>
             </a:pPr>
             <a:r>
@@ -14401,13 +15215,20 @@
             <a:prstDash val="solid"/>
           </a:ln>
           <a:effectLst>
-            <a:outerShdw sx="100000" sy="100000" kx="0" ky="0" algn="bl" rotWithShape="0" blurRad="38100" dist="12700" dir="8100000">
+            <a:outerShdw blurRad="38100" dist="12700" dir="8100000" algn="bl" rotWithShape="0">
               <a:srgbClr val="000000">
                 <a:alpha val="8000"/>
               </a:srgbClr>
             </a:outerShdw>
           </a:effectLst>
         </p:spPr>
+        <p:txBody>
+          <a:bodyPr/>
+          <a:lstStyle/>
+          <a:p>
+            <a:endParaRPr lang="ja-JP" altLang="en-US"/>
+          </a:p>
+        </p:txBody>
       </p:sp>
       <p:sp>
         <p:nvSpPr>
@@ -14428,6 +15249,13 @@
           </a:solidFill>
           <a:ln/>
         </p:spPr>
+        <p:txBody>
+          <a:bodyPr/>
+          <a:lstStyle/>
+          <a:p>
+            <a:endParaRPr lang="ja-JP" altLang="en-US"/>
+          </a:p>
+        </p:txBody>
       </p:sp>
       <p:sp>
         <p:nvSpPr>
@@ -14450,7 +15278,7 @@
           <a:bodyPr wrap="square" lIns="0" tIns="0" rIns="0" bIns="0" rtlCol="0" anchor="ctr"/>
           <a:lstStyle/>
           <a:p>
-            <a:pPr algn="ctr" indent="0" marL="0">
+            <a:pPr marL="0" indent="0" algn="ctr">
               <a:buNone/>
             </a:pPr>
             <a:r>
@@ -14487,6 +15315,13 @@
           </a:solidFill>
           <a:ln/>
         </p:spPr>
+        <p:txBody>
+          <a:bodyPr/>
+          <a:lstStyle/>
+          <a:p>
+            <a:endParaRPr lang="ja-JP" altLang="en-US"/>
+          </a:p>
+        </p:txBody>
       </p:sp>
       <p:sp>
         <p:nvSpPr>
@@ -14509,7 +15344,7 @@
           <a:bodyPr wrap="square" lIns="0" tIns="0" rIns="0" bIns="0" rtlCol="0" anchor="ctr"/>
           <a:lstStyle/>
           <a:p>
-            <a:pPr algn="ctr" indent="0" marL="0">
+            <a:pPr marL="0" indent="0" algn="ctr">
               <a:buNone/>
             </a:pPr>
             <a:r>
@@ -14548,7 +15383,7 @@
           <a:bodyPr wrap="square" lIns="0" tIns="0" rIns="0" bIns="0" rtlCol="0" anchor="ctr"/>
           <a:lstStyle/>
           <a:p>
-            <a:pPr indent="0" marL="0">
+            <a:pPr marL="0" indent="0">
               <a:buNone/>
             </a:pPr>
             <a:r>
@@ -14587,7 +15422,7 @@
           <a:bodyPr wrap="square" lIns="0" tIns="0" rIns="0" bIns="0" rtlCol="0" anchor="ctr"/>
           <a:lstStyle/>
           <a:p>
-            <a:pPr indent="0" marL="0">
+            <a:pPr marL="0" indent="0">
               <a:buNone/>
             </a:pPr>
             <a:r>
@@ -14629,13 +15464,20 @@
             <a:prstDash val="solid"/>
           </a:ln>
           <a:effectLst>
-            <a:outerShdw sx="100000" sy="100000" kx="0" ky="0" algn="bl" rotWithShape="0" blurRad="38100" dist="12700" dir="8100000">
+            <a:outerShdw blurRad="38100" dist="12700" dir="8100000" algn="bl" rotWithShape="0">
               <a:srgbClr val="000000">
                 <a:alpha val="8000"/>
               </a:srgbClr>
             </a:outerShdw>
           </a:effectLst>
         </p:spPr>
+        <p:txBody>
+          <a:bodyPr/>
+          <a:lstStyle/>
+          <a:p>
+            <a:endParaRPr lang="ja-JP" altLang="en-US"/>
+          </a:p>
+        </p:txBody>
       </p:sp>
       <p:sp>
         <p:nvSpPr>
@@ -14656,6 +15498,13 @@
           </a:solidFill>
           <a:ln/>
         </p:spPr>
+        <p:txBody>
+          <a:bodyPr/>
+          <a:lstStyle/>
+          <a:p>
+            <a:endParaRPr lang="ja-JP" altLang="en-US"/>
+          </a:p>
+        </p:txBody>
       </p:sp>
       <p:sp>
         <p:nvSpPr>
@@ -14678,7 +15527,7 @@
           <a:bodyPr wrap="square" lIns="0" tIns="0" rIns="0" bIns="0" rtlCol="0" anchor="ctr"/>
           <a:lstStyle/>
           <a:p>
-            <a:pPr algn="ctr" indent="0" marL="0">
+            <a:pPr marL="0" indent="0" algn="ctr">
               <a:buNone/>
             </a:pPr>
             <a:r>
@@ -14715,6 +15564,13 @@
           </a:solidFill>
           <a:ln/>
         </p:spPr>
+        <p:txBody>
+          <a:bodyPr/>
+          <a:lstStyle/>
+          <a:p>
+            <a:endParaRPr lang="ja-JP" altLang="en-US"/>
+          </a:p>
+        </p:txBody>
       </p:sp>
       <p:sp>
         <p:nvSpPr>
@@ -14737,7 +15593,7 @@
           <a:bodyPr wrap="square" lIns="0" tIns="0" rIns="0" bIns="0" rtlCol="0" anchor="ctr"/>
           <a:lstStyle/>
           <a:p>
-            <a:pPr algn="ctr" indent="0" marL="0">
+            <a:pPr marL="0" indent="0" algn="ctr">
               <a:buNone/>
             </a:pPr>
             <a:r>
@@ -14776,7 +15632,7 @@
           <a:bodyPr wrap="square" lIns="0" tIns="0" rIns="0" bIns="0" rtlCol="0" anchor="ctr"/>
           <a:lstStyle/>
           <a:p>
-            <a:pPr indent="0" marL="0">
+            <a:pPr marL="0" indent="0">
               <a:buNone/>
             </a:pPr>
             <a:r>
@@ -14815,7 +15671,7 @@
           <a:bodyPr wrap="square" lIns="0" tIns="0" rIns="0" bIns="0" rtlCol="0" anchor="ctr"/>
           <a:lstStyle/>
           <a:p>
-            <a:pPr indent="0" marL="0">
+            <a:pPr marL="0" indent="0">
               <a:buNone/>
             </a:pPr>
             <a:r>
@@ -15134,4 +15990,319 @@
     </a:ext>
   </a:extLst>
 </a:theme>
+</file>
+
+<file path=ppt/theme/theme2.xml><?xml version="1.0" encoding="utf-8"?>
+<a:theme xmlns:a="http://schemas.openxmlformats.org/drawingml/2006/main" name="Office テーマ">
+  <a:themeElements>
+    <a:clrScheme name="Office">
+      <a:dk1>
+        <a:sysClr val="windowText" lastClr="000000"/>
+      </a:dk1>
+      <a:lt1>
+        <a:sysClr val="window" lastClr="FFFFFF"/>
+      </a:lt1>
+      <a:dk2>
+        <a:srgbClr val="0E2841"/>
+      </a:dk2>
+      <a:lt2>
+        <a:srgbClr val="E8E8E8"/>
+      </a:lt2>
+      <a:accent1>
+        <a:srgbClr val="156082"/>
+      </a:accent1>
+      <a:accent2>
+        <a:srgbClr val="E97132"/>
+      </a:accent2>
+      <a:accent3>
+        <a:srgbClr val="196B24"/>
+      </a:accent3>
+      <a:accent4>
+        <a:srgbClr val="0F9ED5"/>
+      </a:accent4>
+      <a:accent5>
+        <a:srgbClr val="A02B93"/>
+      </a:accent5>
+      <a:accent6>
+        <a:srgbClr val="4EA72E"/>
+      </a:accent6>
+      <a:hlink>
+        <a:srgbClr val="467886"/>
+      </a:hlink>
+      <a:folHlink>
+        <a:srgbClr val="96607D"/>
+      </a:folHlink>
+    </a:clrScheme>
+    <a:fontScheme name="Office">
+      <a:majorFont>
+        <a:latin typeface="游ゴシック Light" panose="02110004020202020204"/>
+        <a:ea typeface=""/>
+        <a:cs typeface=""/>
+        <a:font script="Jpan" typeface="游ゴシック Light"/>
+        <a:font script="Hang" typeface="맑은 고딕"/>
+        <a:font script="Hans" typeface="等线 Light"/>
+        <a:font script="Hant" typeface="新細明體"/>
+        <a:font script="Arab" typeface="Times New Roman"/>
+        <a:font script="Hebr" typeface="Times New Roman"/>
+        <a:font script="Thai" typeface="Angsana New"/>
+        <a:font script="Ethi" typeface="Nyala"/>
+        <a:font script="Beng" typeface="Vrinda"/>
+        <a:font script="Gujr" typeface="Shruti"/>
+        <a:font script="Khmr" typeface="MoolBoran"/>
+        <a:font script="Knda" typeface="Tunga"/>
+        <a:font script="Guru" typeface="Raavi"/>
+        <a:font script="Cans" typeface="Euphemia"/>
+        <a:font script="Cher" typeface="Plantagenet Cherokee"/>
+        <a:font script="Yiii" typeface="Microsoft Yi Baiti"/>
+        <a:font script="Tibt" typeface="Microsoft Himalaya"/>
+        <a:font script="Thaa" typeface="MV Boli"/>
+        <a:font script="Deva" typeface="Mangal"/>
+        <a:font script="Telu" typeface="Gautami"/>
+        <a:font script="Taml" typeface="Latha"/>
+        <a:font script="Syrc" typeface="Estrangelo Edessa"/>
+        <a:font script="Orya" typeface="Kalinga"/>
+        <a:font script="Mlym" typeface="Kartika"/>
+        <a:font script="Laoo" typeface="DokChampa"/>
+        <a:font script="Sinh" typeface="Iskoola Pota"/>
+        <a:font script="Mong" typeface="Mongolian Baiti"/>
+        <a:font script="Viet" typeface="Times New Roman"/>
+        <a:font script="Uigh" typeface="Microsoft Uighur"/>
+        <a:font script="Geor" typeface="Sylfaen"/>
+        <a:font script="Armn" typeface="Arial"/>
+        <a:font script="Bugi" typeface="Leelawadee UI"/>
+        <a:font script="Bopo" typeface="Microsoft JhengHei"/>
+        <a:font script="Java" typeface="Javanese Text"/>
+        <a:font script="Lisu" typeface="Segoe UI"/>
+        <a:font script="Mymr" typeface="Myanmar Text"/>
+        <a:font script="Nkoo" typeface="Ebrima"/>
+        <a:font script="Olck" typeface="Nirmala UI"/>
+        <a:font script="Osma" typeface="Ebrima"/>
+        <a:font script="Phag" typeface="Phagspa"/>
+        <a:font script="Syrn" typeface="Estrangelo Edessa"/>
+        <a:font script="Syrj" typeface="Estrangelo Edessa"/>
+        <a:font script="Syre" typeface="Estrangelo Edessa"/>
+        <a:font script="Sora" typeface="Nirmala UI"/>
+        <a:font script="Tale" typeface="Microsoft Tai Le"/>
+        <a:font script="Talu" typeface="Microsoft New Tai Lue"/>
+        <a:font script="Tfng" typeface="Ebrima"/>
+      </a:majorFont>
+      <a:minorFont>
+        <a:latin typeface="游ゴシック" panose="02110004020202020204"/>
+        <a:ea typeface=""/>
+        <a:cs typeface=""/>
+        <a:font script="Jpan" typeface="游ゴシック"/>
+        <a:font script="Hang" typeface="맑은 고딕"/>
+        <a:font script="Hans" typeface="等线"/>
+        <a:font script="Hant" typeface="新細明體"/>
+        <a:font script="Arab" typeface="Arial"/>
+        <a:font script="Hebr" typeface="Arial"/>
+        <a:font script="Thai" typeface="Cordia New"/>
+        <a:font script="Ethi" typeface="Nyala"/>
+        <a:font script="Beng" typeface="Vrinda"/>
+        <a:font script="Gujr" typeface="Shruti"/>
+        <a:font script="Khmr" typeface="DaunPenh"/>
+        <a:font script="Knda" typeface="Tunga"/>
+        <a:font script="Guru" typeface="Raavi"/>
+        <a:font script="Cans" typeface="Euphemia"/>
+        <a:font script="Cher" typeface="Plantagenet Cherokee"/>
+        <a:font script="Yiii" typeface="Microsoft Yi Baiti"/>
+        <a:font script="Tibt" typeface="Microsoft Himalaya"/>
+        <a:font script="Thaa" typeface="MV Boli"/>
+        <a:font script="Deva" typeface="Mangal"/>
+        <a:font script="Telu" typeface="Gautami"/>
+        <a:font script="Taml" typeface="Latha"/>
+        <a:font script="Syrc" typeface="Estrangelo Edessa"/>
+        <a:font script="Orya" typeface="Kalinga"/>
+        <a:font script="Mlym" typeface="Kartika"/>
+        <a:font script="Laoo" typeface="DokChampa"/>
+        <a:font script="Sinh" typeface="Iskoola Pota"/>
+        <a:font script="Mong" typeface="Mongolian Baiti"/>
+        <a:font script="Viet" typeface="Arial"/>
+        <a:font script="Uigh" typeface="Microsoft Uighur"/>
+        <a:font script="Geor" typeface="Sylfaen"/>
+        <a:font script="Armn" typeface="Arial"/>
+        <a:font script="Bugi" typeface="Leelawadee UI"/>
+        <a:font script="Bopo" typeface="Microsoft JhengHei"/>
+        <a:font script="Java" typeface="Javanese Text"/>
+        <a:font script="Lisu" typeface="Segoe UI"/>
+        <a:font script="Mymr" typeface="Myanmar Text"/>
+        <a:font script="Nkoo" typeface="Ebrima"/>
+        <a:font script="Olck" typeface="Nirmala UI"/>
+        <a:font script="Osma" typeface="Ebrima"/>
+        <a:font script="Phag" typeface="Phagspa"/>
+        <a:font script="Syrn" typeface="Estrangelo Edessa"/>
+        <a:font script="Syrj" typeface="Estrangelo Edessa"/>
+        <a:font script="Syre" typeface="Estrangelo Edessa"/>
+        <a:font script="Sora" typeface="Nirmala UI"/>
+        <a:font script="Tale" typeface="Microsoft Tai Le"/>
+        <a:font script="Talu" typeface="Microsoft New Tai Lue"/>
+        <a:font script="Tfng" typeface="Ebrima"/>
+      </a:minorFont>
+    </a:fontScheme>
+    <a:fmtScheme name="Office">
+      <a:fillStyleLst>
+        <a:solidFill>
+          <a:schemeClr val="phClr"/>
+        </a:solidFill>
+        <a:gradFill rotWithShape="1">
+          <a:gsLst>
+            <a:gs pos="0">
+              <a:schemeClr val="phClr">
+                <a:lumMod val="110000"/>
+                <a:satMod val="105000"/>
+                <a:tint val="67000"/>
+              </a:schemeClr>
+            </a:gs>
+            <a:gs pos="50000">
+              <a:schemeClr val="phClr">
+                <a:lumMod val="105000"/>
+                <a:satMod val="103000"/>
+                <a:tint val="73000"/>
+              </a:schemeClr>
+            </a:gs>
+            <a:gs pos="100000">
+              <a:schemeClr val="phClr">
+                <a:lumMod val="105000"/>
+                <a:satMod val="109000"/>
+                <a:tint val="81000"/>
+              </a:schemeClr>
+            </a:gs>
+          </a:gsLst>
+          <a:lin ang="5400000" scaled="0"/>
+        </a:gradFill>
+        <a:gradFill rotWithShape="1">
+          <a:gsLst>
+            <a:gs pos="0">
+              <a:schemeClr val="phClr">
+                <a:satMod val="103000"/>
+                <a:lumMod val="102000"/>
+                <a:tint val="94000"/>
+              </a:schemeClr>
+            </a:gs>
+            <a:gs pos="50000">
+              <a:schemeClr val="phClr">
+                <a:satMod val="110000"/>
+                <a:lumMod val="100000"/>
+                <a:shade val="100000"/>
+              </a:schemeClr>
+            </a:gs>
+            <a:gs pos="100000">
+              <a:schemeClr val="phClr">
+                <a:lumMod val="99000"/>
+                <a:satMod val="120000"/>
+                <a:shade val="78000"/>
+              </a:schemeClr>
+            </a:gs>
+          </a:gsLst>
+          <a:lin ang="5400000" scaled="0"/>
+        </a:gradFill>
+      </a:fillStyleLst>
+      <a:lnStyleLst>
+        <a:ln w="12700" cap="flat" cmpd="sng" algn="ctr">
+          <a:solidFill>
+            <a:schemeClr val="phClr"/>
+          </a:solidFill>
+          <a:prstDash val="solid"/>
+          <a:miter lim="800000"/>
+        </a:ln>
+        <a:ln w="19050" cap="flat" cmpd="sng" algn="ctr">
+          <a:solidFill>
+            <a:schemeClr val="phClr"/>
+          </a:solidFill>
+          <a:prstDash val="solid"/>
+          <a:miter lim="800000"/>
+        </a:ln>
+        <a:ln w="25400" cap="flat" cmpd="sng" algn="ctr">
+          <a:solidFill>
+            <a:schemeClr val="phClr"/>
+          </a:solidFill>
+          <a:prstDash val="solid"/>
+          <a:miter lim="800000"/>
+        </a:ln>
+      </a:lnStyleLst>
+      <a:effectStyleLst>
+        <a:effectStyle>
+          <a:effectLst/>
+        </a:effectStyle>
+        <a:effectStyle>
+          <a:effectLst/>
+        </a:effectStyle>
+        <a:effectStyle>
+          <a:effectLst>
+            <a:outerShdw blurRad="57150" dist="19050" dir="5400000" algn="ctr" rotWithShape="0">
+              <a:srgbClr val="000000">
+                <a:alpha val="63000"/>
+              </a:srgbClr>
+            </a:outerShdw>
+          </a:effectLst>
+        </a:effectStyle>
+      </a:effectStyleLst>
+      <a:bgFillStyleLst>
+        <a:solidFill>
+          <a:schemeClr val="phClr"/>
+        </a:solidFill>
+        <a:solidFill>
+          <a:schemeClr val="phClr">
+            <a:tint val="95000"/>
+            <a:satMod val="170000"/>
+          </a:schemeClr>
+        </a:solidFill>
+        <a:gradFill rotWithShape="1">
+          <a:gsLst>
+            <a:gs pos="0">
+              <a:schemeClr val="phClr">
+                <a:tint val="93000"/>
+                <a:satMod val="150000"/>
+                <a:shade val="98000"/>
+                <a:lumMod val="102000"/>
+              </a:schemeClr>
+            </a:gs>
+            <a:gs pos="50000">
+              <a:schemeClr val="phClr">
+                <a:tint val="98000"/>
+                <a:satMod val="130000"/>
+                <a:shade val="90000"/>
+                <a:lumMod val="103000"/>
+              </a:schemeClr>
+            </a:gs>
+            <a:gs pos="100000">
+              <a:schemeClr val="phClr">
+                <a:shade val="63000"/>
+                <a:satMod val="120000"/>
+              </a:schemeClr>
+            </a:gs>
+          </a:gsLst>
+          <a:lin ang="5400000" scaled="0"/>
+        </a:gradFill>
+      </a:bgFillStyleLst>
+    </a:fmtScheme>
+  </a:themeElements>
+  <a:objectDefaults>
+    <a:lnDef>
+      <a:spPr/>
+      <a:bodyPr/>
+      <a:lstStyle/>
+      <a:style>
+        <a:lnRef idx="2">
+          <a:schemeClr val="accent1"/>
+        </a:lnRef>
+        <a:fillRef idx="0">
+          <a:schemeClr val="accent1"/>
+        </a:fillRef>
+        <a:effectRef idx="1">
+          <a:schemeClr val="accent1"/>
+        </a:effectRef>
+        <a:fontRef idx="minor">
+          <a:schemeClr val="tx1"/>
+        </a:fontRef>
+      </a:style>
+    </a:lnDef>
+  </a:objectDefaults>
+  <a:extraClrSchemeLst/>
+  <a:extLst>
+    <a:ext uri="{05A4C25C-085E-4340-85A3-A5531E510DB2}">
+      <thm15:themeFamily xmlns:thm15="http://schemas.microsoft.com/office/thememl/2012/main" name="Office Theme" id="{2E142A2C-CD16-42D6-873A-C26D2A0506FA}" vid="{1BDDFF52-6CD6-40A5-AB3C-68EB2F1E4D0A}"/>
+    </a:ext>
+  </a:extLst>
+</a:theme>
 </file>